--- a/decks/wetland-mcp-marketplace.pptx
+++ b/decks/wetland-mcp-marketplace.pptx
@@ -3892,7 +3892,7 @@
                 <a:ea typeface="Noto Sans Black"/>
                 <a:cs typeface="Noto Sans Black"/>
               </a:rPr>
-              <a:t>Find the helper. Paste the link. Then decide.</a:t>
+              <a:t>Find a capability. Open the approved agent.</a:t>
             </a:r>
           </a:p>
         </p:txBody>
@@ -3960,7 +3960,7 @@
                 <a:ea typeface="Noto Sans"/>
                 <a:cs typeface="Noto Sans"/>
               </a:rPr>
-              <a:t>Search by the task: a grant draft, a brand token, a retention question.</a:t>
+              <a:t>Browse Wetland by task and try the synthetic Growth demo.</a:t>
             </a:r>
           </a:p>
         </p:txBody>
@@ -4028,7 +4028,7 @@
                 <a:ea typeface="Noto Sans"/>
                 <a:cs typeface="Noto Sans"/>
               </a:rPr>
-              <a:t>Live and Pilot can be used. Proposed stays labelled as an idea.</a:t>
+              <a:t>Open the approved Copilot agent after IT configures its MCP connections.</a:t>
             </a:r>
           </a:p>
         </p:txBody>
@@ -4096,7 +4096,7 @@
                 <a:ea typeface="Noto Sans"/>
                 <a:cs typeface="Noto Sans"/>
               </a:rPr>
-              <a:t>Copy the MCP link into the assistant you already use. One helper per chat.</a:t>
+              <a:t>Copy the example prompt. Pasting an MCP URL alone does not connect Copilot.</a:t>
             </a:r>
           </a:p>
         </p:txBody>
@@ -4164,7 +4164,7 @@
                 <a:ea typeface="Noto Sans"/>
                 <a:cs typeface="Noto Sans"/>
               </a:rPr>
-              <a:t>Read the answer, open the source, and check it before it leaves your desk.</a:t>
+              <a:t>Review the report, source and definition before sharing.</a:t>
             </a:r>
           </a:p>
         </p:txBody>
@@ -4367,7 +4367,7 @@
                 <a:ea typeface="Noto Sans Black"/>
                 <a:cs typeface="Noto Sans Black"/>
               </a:rPr>
-              <a:t>One live endpoint. Seven honest concepts.</a:t>
+              <a:t>Brand and Growth are live demos</a:t>
             </a:r>
           </a:p>
         </p:txBody>
@@ -4585,13 +4585,193 @@
       </p:sp>
       <p:sp>
         <p:nvSpPr>
-          <p:cNvPr id="11" name="Rounded Rectangle 10"/>
+          <p:cNvPr id="11" name="Rectangle 10"/>
           <p:cNvSpPr/>
           <p:nvPr/>
         </p:nvSpPr>
         <p:spPr>
           <a:xfrm>
+            <a:off x="3495979" y="1947672"/>
+            <a:ext cx="64008" cy="1426464"/>
+          </a:xfrm>
+          <a:prstGeom prst="rect">
+            <a:avLst/>
+          </a:prstGeom>
+          <a:solidFill>
+            <a:srgbClr val="006BD9"/>
+          </a:solidFill>
+          <a:ln>
+            <a:noFill/>
+          </a:ln>
+        </p:spPr>
+        <p:txBody>
+          <a:bodyPr rtlCol="0" anchor="ctr"/>
+          <a:lstStyle/>
+          <a:p>
+            <a:pPr algn="ctr"/>
+          </a:p>
+        </p:txBody>
+      </p:sp>
+      <p:sp>
+        <p:nvSpPr>
+          <p:cNvPr id="12" name="Rounded Rectangle 11"/>
+          <p:cNvSpPr/>
+          <p:nvPr/>
+        </p:nvSpPr>
+        <p:spPr>
+          <a:xfrm>
             <a:off x="3569131" y="1874520"/>
+            <a:ext cx="1207008" cy="292608"/>
+          </a:xfrm>
+          <a:prstGeom prst="roundRect">
+            <a:avLst>
+              <a:gd name="adj" fmla="val 40000"/>
+            </a:avLst>
+          </a:prstGeom>
+          <a:solidFill>
+            <a:srgbClr val="D6FF00"/>
+          </a:solidFill>
+          <a:ln>
+            <a:noFill/>
+          </a:ln>
+        </p:spPr>
+        <p:txBody>
+          <a:bodyPr rtlCol="0" anchor="ctr" wrap="none"/>
+          <a:lstStyle/>
+          <a:p>
+            <a:pPr algn="ctr"/>
+            <a:r>
+              <a:rPr sz="1000" b="1">
+                <a:solidFill>
+                  <a:srgbClr val="151435"/>
+                </a:solidFill>
+                <a:latin typeface="Noto Sans"/>
+                <a:ea typeface="Noto Sans"/>
+                <a:cs typeface="Noto Sans"/>
+              </a:rPr>
+              <a:t>LIVE</a:t>
+            </a:r>
+          </a:p>
+        </p:txBody>
+      </p:sp>
+      <p:sp>
+        <p:nvSpPr>
+          <p:cNvPr id="13" name="TextBox 12"/>
+          <p:cNvSpPr txBox="1"/>
+          <p:nvPr/>
+        </p:nvSpPr>
+        <p:spPr>
+          <a:xfrm>
+            <a:off x="3569131" y="2313432"/>
+            <a:ext cx="2307259" cy="777240"/>
+          </a:xfrm>
+          <a:prstGeom prst="rect">
+            <a:avLst/>
+          </a:prstGeom>
+          <a:noFill/>
+        </p:spPr>
+        <p:txBody>
+          <a:bodyPr wrap="square" lIns="0" rIns="0" tIns="0" bIns="0" anchor="t"/>
+          <a:lstStyle/>
+          <a:p>
+            <a:pPr algn="l">
+              <a:lnSpc>
+                <a:spcPct val="95000"/>
+              </a:lnSpc>
+            </a:pPr>
+            <a:r>
+              <a:rPr sz="1500" b="0">
+                <a:solidFill>
+                  <a:srgbClr val="151435"/>
+                </a:solidFill>
+                <a:latin typeface="Noto Sans Black"/>
+                <a:ea typeface="Noto Sans Black"/>
+                <a:cs typeface="Noto Sans Black"/>
+              </a:rPr>
+              <a:t>Growth KPI reporting</a:t>
+            </a:r>
+          </a:p>
+        </p:txBody>
+      </p:sp>
+      <p:sp>
+        <p:nvSpPr>
+          <p:cNvPr id="14" name="TextBox 13"/>
+          <p:cNvSpPr txBox="1"/>
+          <p:nvPr/>
+        </p:nvSpPr>
+        <p:spPr>
+          <a:xfrm>
+            <a:off x="3569131" y="3136392"/>
+            <a:ext cx="2307259" cy="329184"/>
+          </a:xfrm>
+          <a:prstGeom prst="rect">
+            <a:avLst/>
+          </a:prstGeom>
+          <a:noFill/>
+        </p:spPr>
+        <p:txBody>
+          <a:bodyPr wrap="square" lIns="0" rIns="0" tIns="0" bIns="0" anchor="t"/>
+          <a:lstStyle/>
+          <a:p>
+            <a:pPr algn="l">
+              <a:lnSpc>
+                <a:spcPct val="100000"/>
+              </a:lnSpc>
+            </a:pPr>
+            <a:r>
+              <a:rPr sz="1100" b="0">
+                <a:solidFill>
+                  <a:srgbClr val="44435D"/>
+                </a:solidFill>
+                <a:latin typeface="Noto Sans"/>
+                <a:ea typeface="Noto Sans"/>
+                <a:cs typeface="Noto Sans"/>
+              </a:rPr>
+              <a:t>Synthetic donor reporting</a:t>
+            </a:r>
+          </a:p>
+        </p:txBody>
+      </p:sp>
+      <p:sp>
+        <p:nvSpPr>
+          <p:cNvPr id="15" name="Rounded Rectangle 14"/>
+          <p:cNvSpPr/>
+          <p:nvPr/>
+        </p:nvSpPr>
+        <p:spPr>
+          <a:xfrm>
+            <a:off x="6168999" y="1691640"/>
+            <a:ext cx="2654731" cy="1938528"/>
+          </a:xfrm>
+          <a:prstGeom prst="roundRect">
+            <a:avLst>
+              <a:gd name="adj" fmla="val 8000"/>
+            </a:avLst>
+          </a:prstGeom>
+          <a:solidFill>
+            <a:srgbClr val="FFFFFF"/>
+          </a:solidFill>
+          <a:ln>
+            <a:noFill/>
+          </a:ln>
+        </p:spPr>
+        <p:txBody>
+          <a:bodyPr rtlCol="0" anchor="ctr"/>
+          <a:lstStyle/>
+          <a:p>
+            <a:pPr algn="ctr"/>
+          </a:p>
+        </p:txBody>
+      </p:sp>
+      <p:sp>
+        <p:nvSpPr>
+          <p:cNvPr id="16" name="Rounded Rectangle 15"/>
+          <p:cNvSpPr/>
+          <p:nvPr/>
+        </p:nvSpPr>
+        <p:spPr>
+          <a:xfrm>
+            <a:off x="6370167" y="1874520"/>
             <a:ext cx="1207008" cy="292608"/>
           </a:xfrm>
           <a:prstGeom prst="roundRect">
@@ -4627,13 +4807,13 @@
       </p:sp>
       <p:sp>
         <p:nvSpPr>
-          <p:cNvPr id="12" name="TextBox 11"/>
+          <p:cNvPr id="17" name="TextBox 16"/>
           <p:cNvSpPr txBox="1"/>
           <p:nvPr/>
         </p:nvSpPr>
         <p:spPr>
           <a:xfrm>
-            <a:off x="3569131" y="2313432"/>
+            <a:off x="6370167" y="2313432"/>
             <a:ext cx="2307259" cy="777240"/>
           </a:xfrm>
           <a:prstGeom prst="rect">
@@ -4666,13 +4846,13 @@
       </p:sp>
       <p:sp>
         <p:nvSpPr>
-          <p:cNvPr id="13" name="TextBox 12"/>
+          <p:cNvPr id="18" name="TextBox 17"/>
           <p:cNvSpPr txBox="1"/>
           <p:nvPr/>
         </p:nvSpPr>
         <p:spPr>
           <a:xfrm>
-            <a:off x="3569131" y="3136392"/>
+            <a:off x="6370167" y="3136392"/>
             <a:ext cx="2307259" cy="329184"/>
           </a:xfrm>
           <a:prstGeom prst="rect">
@@ -4705,13 +4885,13 @@
       </p:sp>
       <p:sp>
         <p:nvSpPr>
-          <p:cNvPr id="14" name="Rounded Rectangle 13"/>
+          <p:cNvPr id="19" name="Rounded Rectangle 18"/>
           <p:cNvSpPr/>
           <p:nvPr/>
         </p:nvSpPr>
         <p:spPr>
           <a:xfrm>
-            <a:off x="6168999" y="1691640"/>
+            <a:off x="8970035" y="1691640"/>
             <a:ext cx="2654731" cy="1938528"/>
           </a:xfrm>
           <a:prstGeom prst="roundRect">
@@ -4736,13 +4916,13 @@
       </p:sp>
       <p:sp>
         <p:nvSpPr>
-          <p:cNvPr id="15" name="Rounded Rectangle 14"/>
+          <p:cNvPr id="20" name="Rounded Rectangle 19"/>
           <p:cNvSpPr/>
           <p:nvPr/>
         </p:nvSpPr>
         <p:spPr>
           <a:xfrm>
-            <a:off x="6370167" y="1874520"/>
+            <a:off x="9171203" y="1874520"/>
             <a:ext cx="1207008" cy="292608"/>
           </a:xfrm>
           <a:prstGeom prst="roundRect">
@@ -4778,13 +4958,13 @@
       </p:sp>
       <p:sp>
         <p:nvSpPr>
-          <p:cNvPr id="16" name="TextBox 15"/>
+          <p:cNvPr id="21" name="TextBox 20"/>
           <p:cNvSpPr txBox="1"/>
           <p:nvPr/>
         </p:nvSpPr>
         <p:spPr>
           <a:xfrm>
-            <a:off x="6370167" y="2313432"/>
+            <a:off x="9171203" y="2313432"/>
             <a:ext cx="2307259" cy="777240"/>
           </a:xfrm>
           <a:prstGeom prst="rect">
@@ -4817,13 +4997,13 @@
       </p:sp>
       <p:sp>
         <p:nvSpPr>
-          <p:cNvPr id="17" name="TextBox 16"/>
+          <p:cNvPr id="22" name="TextBox 21"/>
           <p:cNvSpPr txBox="1"/>
           <p:nvPr/>
         </p:nvSpPr>
         <p:spPr>
           <a:xfrm>
-            <a:off x="6370167" y="3136392"/>
+            <a:off x="9171203" y="3136392"/>
             <a:ext cx="2307259" cy="329184"/>
           </a:xfrm>
           <a:prstGeom prst="rect">
@@ -4856,13 +5036,13 @@
       </p:sp>
       <p:sp>
         <p:nvSpPr>
-          <p:cNvPr id="18" name="Rounded Rectangle 17"/>
+          <p:cNvPr id="23" name="Rounded Rectangle 22"/>
           <p:cNvSpPr/>
           <p:nvPr/>
         </p:nvSpPr>
         <p:spPr>
           <a:xfrm>
-            <a:off x="8970035" y="1691640"/>
+            <a:off x="566928" y="3776472"/>
             <a:ext cx="2654731" cy="1938528"/>
           </a:xfrm>
           <a:prstGeom prst="roundRect">
@@ -4887,13 +5067,13 @@
       </p:sp>
       <p:sp>
         <p:nvSpPr>
-          <p:cNvPr id="19" name="Rounded Rectangle 18"/>
+          <p:cNvPr id="24" name="Rounded Rectangle 23"/>
           <p:cNvSpPr/>
           <p:nvPr/>
         </p:nvSpPr>
         <p:spPr>
           <a:xfrm>
-            <a:off x="9171203" y="1874520"/>
+            <a:off x="768096" y="3959352"/>
             <a:ext cx="1207008" cy="292608"/>
           </a:xfrm>
           <a:prstGeom prst="roundRect">
@@ -4929,13 +5109,13 @@
       </p:sp>
       <p:sp>
         <p:nvSpPr>
-          <p:cNvPr id="20" name="TextBox 19"/>
+          <p:cNvPr id="25" name="TextBox 24"/>
           <p:cNvSpPr txBox="1"/>
           <p:nvPr/>
         </p:nvSpPr>
         <p:spPr>
           <a:xfrm>
-            <a:off x="9171203" y="2313432"/>
+            <a:off x="768096" y="4398264"/>
             <a:ext cx="2307259" cy="777240"/>
           </a:xfrm>
           <a:prstGeom prst="rect">
@@ -4968,13 +5148,13 @@
       </p:sp>
       <p:sp>
         <p:nvSpPr>
-          <p:cNvPr id="21" name="TextBox 20"/>
+          <p:cNvPr id="26" name="TextBox 25"/>
           <p:cNvSpPr txBox="1"/>
           <p:nvPr/>
         </p:nvSpPr>
         <p:spPr>
           <a:xfrm>
-            <a:off x="9171203" y="3136392"/>
+            <a:off x="768096" y="5221224"/>
             <a:ext cx="2307259" cy="329184"/>
           </a:xfrm>
           <a:prstGeom prst="rect">
@@ -5007,13 +5187,13 @@
       </p:sp>
       <p:sp>
         <p:nvSpPr>
-          <p:cNvPr id="22" name="Rounded Rectangle 21"/>
+          <p:cNvPr id="27" name="Rounded Rectangle 26"/>
           <p:cNvSpPr/>
           <p:nvPr/>
         </p:nvSpPr>
         <p:spPr>
           <a:xfrm>
-            <a:off x="566928" y="3776472"/>
+            <a:off x="3367963" y="3776472"/>
             <a:ext cx="2654731" cy="1938528"/>
           </a:xfrm>
           <a:prstGeom prst="roundRect">
@@ -5038,13 +5218,13 @@
       </p:sp>
       <p:sp>
         <p:nvSpPr>
-          <p:cNvPr id="23" name="Rounded Rectangle 22"/>
+          <p:cNvPr id="28" name="Rounded Rectangle 27"/>
           <p:cNvSpPr/>
           <p:nvPr/>
         </p:nvSpPr>
         <p:spPr>
           <a:xfrm>
-            <a:off x="768096" y="3959352"/>
+            <a:off x="3569131" y="3959352"/>
             <a:ext cx="1207008" cy="292608"/>
           </a:xfrm>
           <a:prstGeom prst="roundRect">
@@ -5080,13 +5260,13 @@
       </p:sp>
       <p:sp>
         <p:nvSpPr>
-          <p:cNvPr id="24" name="TextBox 23"/>
+          <p:cNvPr id="29" name="TextBox 28"/>
           <p:cNvSpPr txBox="1"/>
           <p:nvPr/>
         </p:nvSpPr>
         <p:spPr>
           <a:xfrm>
-            <a:off x="768096" y="4398264"/>
+            <a:off x="3569131" y="4398264"/>
             <a:ext cx="2307259" cy="777240"/>
           </a:xfrm>
           <a:prstGeom prst="rect">
@@ -5119,13 +5299,13 @@
       </p:sp>
       <p:sp>
         <p:nvSpPr>
-          <p:cNvPr id="25" name="TextBox 24"/>
+          <p:cNvPr id="30" name="TextBox 29"/>
           <p:cNvSpPr txBox="1"/>
           <p:nvPr/>
         </p:nvSpPr>
         <p:spPr>
           <a:xfrm>
-            <a:off x="768096" y="5221224"/>
+            <a:off x="3569131" y="5221224"/>
             <a:ext cx="2307259" cy="329184"/>
           </a:xfrm>
           <a:prstGeom prst="rect">
@@ -5158,13 +5338,13 @@
       </p:sp>
       <p:sp>
         <p:nvSpPr>
-          <p:cNvPr id="26" name="Rounded Rectangle 25"/>
+          <p:cNvPr id="31" name="Rounded Rectangle 30"/>
           <p:cNvSpPr/>
           <p:nvPr/>
         </p:nvSpPr>
         <p:spPr>
           <a:xfrm>
-            <a:off x="3367963" y="3776472"/>
+            <a:off x="6168999" y="3776472"/>
             <a:ext cx="2654731" cy="1938528"/>
           </a:xfrm>
           <a:prstGeom prst="roundRect">
@@ -5189,13 +5369,13 @@
       </p:sp>
       <p:sp>
         <p:nvSpPr>
-          <p:cNvPr id="27" name="Rounded Rectangle 26"/>
+          <p:cNvPr id="32" name="Rounded Rectangle 31"/>
           <p:cNvSpPr/>
           <p:nvPr/>
         </p:nvSpPr>
         <p:spPr>
           <a:xfrm>
-            <a:off x="3569131" y="3959352"/>
+            <a:off x="6370167" y="3959352"/>
             <a:ext cx="1207008" cy="292608"/>
           </a:xfrm>
           <a:prstGeom prst="roundRect">
@@ -5231,13 +5411,13 @@
       </p:sp>
       <p:sp>
         <p:nvSpPr>
-          <p:cNvPr id="28" name="TextBox 27"/>
+          <p:cNvPr id="33" name="TextBox 32"/>
           <p:cNvSpPr txBox="1"/>
           <p:nvPr/>
         </p:nvSpPr>
         <p:spPr>
           <a:xfrm>
-            <a:off x="3569131" y="4398264"/>
+            <a:off x="6370167" y="4398264"/>
             <a:ext cx="2307259" cy="777240"/>
           </a:xfrm>
           <a:prstGeom prst="rect">
@@ -5270,13 +5450,13 @@
       </p:sp>
       <p:sp>
         <p:nvSpPr>
-          <p:cNvPr id="29" name="TextBox 28"/>
+          <p:cNvPr id="34" name="TextBox 33"/>
           <p:cNvSpPr txBox="1"/>
           <p:nvPr/>
         </p:nvSpPr>
         <p:spPr>
           <a:xfrm>
-            <a:off x="3569131" y="5221224"/>
+            <a:off x="6370167" y="5221224"/>
             <a:ext cx="2307259" cy="329184"/>
           </a:xfrm>
           <a:prstGeom prst="rect">
@@ -5309,13 +5489,13 @@
       </p:sp>
       <p:sp>
         <p:nvSpPr>
-          <p:cNvPr id="30" name="Rounded Rectangle 29"/>
+          <p:cNvPr id="35" name="Rounded Rectangle 34"/>
           <p:cNvSpPr/>
           <p:nvPr/>
         </p:nvSpPr>
         <p:spPr>
           <a:xfrm>
-            <a:off x="6168999" y="3776472"/>
+            <a:off x="8970035" y="3776472"/>
             <a:ext cx="2654731" cy="1938528"/>
           </a:xfrm>
           <a:prstGeom prst="roundRect">
@@ -5340,13 +5520,13 @@
       </p:sp>
       <p:sp>
         <p:nvSpPr>
-          <p:cNvPr id="31" name="Rounded Rectangle 30"/>
+          <p:cNvPr id="36" name="Rounded Rectangle 35"/>
           <p:cNvSpPr/>
           <p:nvPr/>
         </p:nvSpPr>
         <p:spPr>
           <a:xfrm>
-            <a:off x="6370167" y="3959352"/>
+            <a:off x="9171203" y="3959352"/>
             <a:ext cx="1207008" cy="292608"/>
           </a:xfrm>
           <a:prstGeom prst="roundRect">
@@ -5382,13 +5562,13 @@
       </p:sp>
       <p:sp>
         <p:nvSpPr>
-          <p:cNvPr id="32" name="TextBox 31"/>
+          <p:cNvPr id="37" name="TextBox 36"/>
           <p:cNvSpPr txBox="1"/>
           <p:nvPr/>
         </p:nvSpPr>
         <p:spPr>
           <a:xfrm>
-            <a:off x="6370167" y="4398264"/>
+            <a:off x="9171203" y="4398264"/>
             <a:ext cx="2307259" cy="777240"/>
           </a:xfrm>
           <a:prstGeom prst="rect">
@@ -5421,13 +5601,13 @@
       </p:sp>
       <p:sp>
         <p:nvSpPr>
-          <p:cNvPr id="33" name="TextBox 32"/>
+          <p:cNvPr id="38" name="TextBox 37"/>
           <p:cNvSpPr txBox="1"/>
           <p:nvPr/>
         </p:nvSpPr>
         <p:spPr>
           <a:xfrm>
-            <a:off x="6370167" y="5221224"/>
+            <a:off x="9171203" y="5221224"/>
             <a:ext cx="2307259" cy="329184"/>
           </a:xfrm>
           <a:prstGeom prst="rect">
@@ -5460,126 +5640,14 @@
       </p:sp>
       <p:sp>
         <p:nvSpPr>
-          <p:cNvPr id="34" name="Rounded Rectangle 33"/>
-          <p:cNvSpPr/>
-          <p:nvPr/>
-        </p:nvSpPr>
-        <p:spPr>
-          <a:xfrm>
-            <a:off x="8970035" y="3776472"/>
-            <a:ext cx="2654731" cy="1938528"/>
-          </a:xfrm>
-          <a:prstGeom prst="roundRect">
-            <a:avLst>
-              <a:gd name="adj" fmla="val 8000"/>
-            </a:avLst>
-          </a:prstGeom>
-          <a:solidFill>
-            <a:srgbClr val="FFFFFF"/>
-          </a:solidFill>
-          <a:ln>
-            <a:noFill/>
-          </a:ln>
-        </p:spPr>
-        <p:txBody>
-          <a:bodyPr rtlCol="0" anchor="ctr"/>
-          <a:lstStyle/>
-          <a:p>
-            <a:pPr algn="ctr"/>
-          </a:p>
-        </p:txBody>
-      </p:sp>
-      <p:sp>
-        <p:nvSpPr>
-          <p:cNvPr id="35" name="Rounded Rectangle 34"/>
-          <p:cNvSpPr/>
-          <p:nvPr/>
-        </p:nvSpPr>
-        <p:spPr>
-          <a:xfrm>
-            <a:off x="9171203" y="3959352"/>
-            <a:ext cx="1207008" cy="292608"/>
-          </a:xfrm>
-          <a:prstGeom prst="roundRect">
-            <a:avLst>
-              <a:gd name="adj" fmla="val 40000"/>
-            </a:avLst>
-          </a:prstGeom>
-          <a:solidFill>
-            <a:srgbClr val="E7EEF6"/>
-          </a:solidFill>
-          <a:ln>
-            <a:noFill/>
-          </a:ln>
-        </p:spPr>
-        <p:txBody>
-          <a:bodyPr rtlCol="0" anchor="ctr" wrap="none"/>
-          <a:lstStyle/>
-          <a:p>
-            <a:pPr algn="ctr"/>
-            <a:r>
-              <a:rPr sz="1000" b="1">
-                <a:solidFill>
-                  <a:srgbClr val="44435D"/>
-                </a:solidFill>
-                <a:latin typeface="Noto Sans"/>
-                <a:ea typeface="Noto Sans"/>
-                <a:cs typeface="Noto Sans"/>
-              </a:rPr>
-              <a:t>CONCEPT</a:t>
-            </a:r>
-          </a:p>
-        </p:txBody>
-      </p:sp>
-      <p:sp>
-        <p:nvSpPr>
-          <p:cNvPr id="36" name="TextBox 35"/>
+          <p:cNvPr id="39" name="TextBox 38"/>
           <p:cNvSpPr txBox="1"/>
           <p:nvPr/>
         </p:nvSpPr>
         <p:spPr>
           <a:xfrm>
-            <a:off x="9171203" y="4398264"/>
-            <a:ext cx="2307259" cy="777240"/>
-          </a:xfrm>
-          <a:prstGeom prst="rect">
-            <a:avLst/>
-          </a:prstGeom>
-          <a:noFill/>
-        </p:spPr>
-        <p:txBody>
-          <a:bodyPr wrap="square" lIns="0" rIns="0" tIns="0" bIns="0" anchor="t"/>
-          <a:lstStyle/>
-          <a:p>
-            <a:pPr algn="l">
-              <a:lnSpc>
-                <a:spcPct val="95000"/>
-              </a:lnSpc>
-            </a:pPr>
-            <a:r>
-              <a:rPr sz="1500" b="0">
-                <a:solidFill>
-                  <a:srgbClr val="151435"/>
-                </a:solidFill>
-                <a:latin typeface="Noto Sans Black"/>
-                <a:ea typeface="Noto Sans Black"/>
-                <a:cs typeface="Noto Sans Black"/>
-              </a:rPr>
-              <a:t>Team knowledge</a:t>
-            </a:r>
-          </a:p>
-        </p:txBody>
-      </p:sp>
-      <p:sp>
-        <p:nvSpPr>
-          <p:cNvPr id="37" name="TextBox 36"/>
-          <p:cNvSpPr txBox="1"/>
-          <p:nvPr/>
-        </p:nvSpPr>
-        <p:spPr>
-          <a:xfrm>
-            <a:off x="9171203" y="5221224"/>
-            <a:ext cx="2307259" cy="329184"/>
+            <a:off x="566928" y="6446520"/>
+            <a:ext cx="8778240" cy="256032"/>
           </a:xfrm>
           <a:prstGeom prst="rect">
             <a:avLst/>
@@ -5604,45 +5672,6 @@
                 <a:ea typeface="Noto Sans"/>
                 <a:cs typeface="Noto Sans"/>
               </a:rPr>
-              <a:t>IT &amp; Operations</a:t>
-            </a:r>
-          </a:p>
-        </p:txBody>
-      </p:sp>
-      <p:sp>
-        <p:nvSpPr>
-          <p:cNvPr id="38" name="TextBox 37"/>
-          <p:cNvSpPr txBox="1"/>
-          <p:nvPr/>
-        </p:nvSpPr>
-        <p:spPr>
-          <a:xfrm>
-            <a:off x="566928" y="6446520"/>
-            <a:ext cx="8778240" cy="256032"/>
-          </a:xfrm>
-          <a:prstGeom prst="rect">
-            <a:avLst/>
-          </a:prstGeom>
-          <a:noFill/>
-        </p:spPr>
-        <p:txBody>
-          <a:bodyPr wrap="square" lIns="0" rIns="0" tIns="0" bIns="0" anchor="t"/>
-          <a:lstStyle/>
-          <a:p>
-            <a:pPr algn="l">
-              <a:lnSpc>
-                <a:spcPct val="100000"/>
-              </a:lnSpc>
-            </a:pPr>
-            <a:r>
-              <a:rPr sz="1100" b="0">
-                <a:solidFill>
-                  <a:srgbClr val="44435D"/>
-                </a:solidFill>
-                <a:latin typeface="Noto Sans"/>
-                <a:ea typeface="Noto Sans"/>
-                <a:cs typeface="Noto Sans"/>
-              </a:rPr>
               <a:t>Independent Wetland project  ·  Not official WaterAid guidance</a:t>
             </a:r>
           </a:p>
@@ -5650,7 +5679,7 @@
       </p:sp>
       <p:sp>
         <p:nvSpPr>
-          <p:cNvPr id="39" name="TextBox 38"/>
+          <p:cNvPr id="40" name="TextBox 39"/>
           <p:cNvSpPr txBox="1"/>
           <p:nvPr/>
         </p:nvSpPr>
@@ -5904,7 +5933,7 @@
                 <a:ea typeface="Noto Sans"/>
                 <a:cs typeface="Noto Sans"/>
               </a:rPr>
-              <a:t>An agent sends a brief: the message, the points, and the layout.</a:t>
+              <a:t>An agent sends a brief to the locally run Deck MCP.</a:t>
             </a:r>
           </a:p>
         </p:txBody>
@@ -6517,7 +6546,7 @@
                 <a:ea typeface="Noto Sans"/>
                 <a:cs typeface="Noto Sans"/>
               </a:rPr>
-              <a:t>The story is the Wetland marketplace: status, owner, and a link you can paste.</a:t>
+              <a:t>Find capabilities, demo links and connection instructions in Wetland.</a:t>
             </a:r>
           </a:p>
         </p:txBody>
@@ -7659,7 +7688,7 @@
                 <a:ea typeface="Noto Sans"/>
                 <a:cs typeface="Noto Sans"/>
               </a:rPr>
-              <a:t>The marketplace is the front door. The Deck MCP is how a presentation comes back out.</a:t>
+              <a:t>Try Growth and Brand live. Deck generation runs locally; a published Copilot agent still requires tenant setup.</a:t>
             </a:r>
           </a:p>
         </p:txBody>

--- a/decks/wetland-mcp-marketplace.pptx
+++ b/decks/wetland-mcp-marketplace.pptx
@@ -13,6 +13,8 @@
     <p:sldId id="261" r:id="rId12"/>
     <p:sldId id="262" r:id="rId13"/>
     <p:sldId id="263" r:id="rId14"/>
+    <p:sldId id="264" r:id="rId15"/>
+    <p:sldId id="265" r:id="rId16"/>
   </p:sldIdLst>
   <p:sldSz cx="12191695" cy="6858000" type="screen4x3"/>
   <p:notesSz cx="6858000" cy="9144000"/>
@@ -114,12 +116,12 @@
   <p:embeddedFontLst>
     <p:embeddedFont>
       <p:font typeface="Noto Sans" pitchFamily="34" charset="0"/>
-      <p:regular r:id="rId15"/>
-      <p:bold r:id="rId16"/>
+      <p:regular r:id="rId17"/>
+      <p:bold r:id="rId18"/>
     </p:embeddedFont>
     <p:embeddedFont>
       <p:font typeface="Noto Sans Black" pitchFamily="34" charset="0"/>
-      <p:regular r:id="rId17"/>
+      <p:regular r:id="rId19"/>
     </p:embeddedFont>
   </p:embeddedFontLst>
 </p:presentation>
@@ -3438,7 +3440,312 @@
                 <a:ea typeface="Noto Sans"/>
                 <a:cs typeface="Noto Sans"/>
               </a:rPr>
-              <a:t>01  /  08</a:t>
+              <a:t>01  /  10</a:t>
+            </a:r>
+          </a:p>
+        </p:txBody>
+      </p:sp>
+    </p:spTree>
+  </p:cSld>
+  <p:clrMapOvr>
+    <a:masterClrMapping/>
+  </p:clrMapOvr>
+</p:sld>
+</file>
+
+<file path=ppt/slides/slide10.xml><?xml version="1.0" encoding="utf-8"?>
+<p:sld xmlns:a="http://schemas.openxmlformats.org/drawingml/2006/main" xmlns:p="http://schemas.openxmlformats.org/presentationml/2006/main" xmlns:r="http://schemas.openxmlformats.org/officeDocument/2006/relationships">
+  <p:cSld>
+    <p:spTree>
+      <p:nvGrpSpPr>
+        <p:cNvPr id="1" name=""/>
+        <p:cNvGrpSpPr/>
+        <p:nvPr/>
+      </p:nvGrpSpPr>
+      <p:grpSpPr/>
+      <p:sp>
+        <p:nvSpPr>
+          <p:cNvPr id="2" name="Rectangle 1"/>
+          <p:cNvSpPr/>
+          <p:nvPr/>
+        </p:nvSpPr>
+        <p:spPr>
+          <a:xfrm>
+            <a:off x="0" y="0"/>
+            <a:ext cx="12191695" cy="6858000"/>
+          </a:xfrm>
+          <a:prstGeom prst="rect">
+            <a:avLst/>
+          </a:prstGeom>
+          <a:solidFill>
+            <a:srgbClr val="151435"/>
+          </a:solidFill>
+          <a:ln>
+            <a:noFill/>
+          </a:ln>
+        </p:spPr>
+        <p:txBody>
+          <a:bodyPr rtlCol="0" anchor="ctr"/>
+          <a:lstStyle/>
+          <a:p>
+            <a:pPr algn="ctr"/>
+          </a:p>
+        </p:txBody>
+      </p:sp>
+      <p:pic>
+        <p:nvPicPr>
+          <p:cNvPr id="3" name="Picture 2" descr="image.png"/>
+          <p:cNvPicPr>
+            <a:picLocks noChangeAspect="1"/>
+          </p:cNvPicPr>
+          <p:nvPr/>
+        </p:nvPicPr>
+        <p:blipFill>
+          <a:blip r:embed="rId2"/>
+          <a:stretch>
+            <a:fillRect/>
+          </a:stretch>
+        </p:blipFill>
+        <p:spPr>
+          <a:xfrm>
+            <a:off x="566928" y="384048"/>
+            <a:ext cx="1874519" cy="578465"/>
+          </a:xfrm>
+          <a:prstGeom prst="rect">
+            <a:avLst/>
+          </a:prstGeom>
+        </p:spPr>
+      </p:pic>
+      <p:sp>
+        <p:nvSpPr>
+          <p:cNvPr id="4" name="TextBox 3"/>
+          <p:cNvSpPr txBox="1"/>
+          <p:nvPr/>
+        </p:nvSpPr>
+        <p:spPr>
+          <a:xfrm>
+            <a:off x="566928" y="1691640"/>
+            <a:ext cx="9144000" cy="292608"/>
+          </a:xfrm>
+          <a:prstGeom prst="rect">
+            <a:avLst/>
+          </a:prstGeom>
+          <a:noFill/>
+        </p:spPr>
+        <p:txBody>
+          <a:bodyPr wrap="square" lIns="0" rIns="0" tIns="0" bIns="0" anchor="t"/>
+          <a:lstStyle/>
+          <a:p>
+            <a:pPr algn="l">
+              <a:lnSpc>
+                <a:spcPct val="100000"/>
+              </a:lnSpc>
+            </a:pPr>
+            <a:r>
+              <a:rPr sz="1300" b="1">
+                <a:solidFill>
+                  <a:srgbClr val="D6FF00"/>
+                </a:solidFill>
+                <a:latin typeface="Noto Sans"/>
+                <a:ea typeface="Noto Sans"/>
+                <a:cs typeface="Noto Sans"/>
+              </a:rPr>
+              <a:t>NEXT DECK, SAME PATH</a:t>
+            </a:r>
+          </a:p>
+        </p:txBody>
+      </p:sp>
+      <p:sp>
+        <p:nvSpPr>
+          <p:cNvPr id="5" name="TextBox 4"/>
+          <p:cNvSpPr txBox="1"/>
+          <p:nvPr/>
+        </p:nvSpPr>
+        <p:spPr>
+          <a:xfrm>
+            <a:off x="566928" y="2084831"/>
+            <a:ext cx="10972800" cy="1371600"/>
+          </a:xfrm>
+          <a:prstGeom prst="rect">
+            <a:avLst/>
+          </a:prstGeom>
+          <a:noFill/>
+        </p:spPr>
+        <p:txBody>
+          <a:bodyPr wrap="square" lIns="0" rIns="0" tIns="0" bIns="0" anchor="t"/>
+          <a:lstStyle/>
+          <a:p>
+            <a:pPr algn="l">
+              <a:lnSpc>
+                <a:spcPct val="96000"/>
+              </a:lnSpc>
+            </a:pPr>
+            <a:r>
+              <a:rPr sz="4400" b="0">
+                <a:solidFill>
+                  <a:srgbClr val="FFFFFF"/>
+                </a:solidFill>
+                <a:latin typeface="Noto Sans Black"/>
+                <a:ea typeface="Noto Sans Black"/>
+                <a:cs typeface="Noto Sans Black"/>
+              </a:rPr>
+              <a:t>Find the tool. Ask for the deck.</a:t>
+            </a:r>
+          </a:p>
+        </p:txBody>
+      </p:sp>
+      <p:sp>
+        <p:nvSpPr>
+          <p:cNvPr id="6" name="TextBox 5"/>
+          <p:cNvSpPr txBox="1"/>
+          <p:nvPr/>
+        </p:nvSpPr>
+        <p:spPr>
+          <a:xfrm>
+            <a:off x="566928" y="3611880"/>
+            <a:ext cx="10241280" cy="822960"/>
+          </a:xfrm>
+          <a:prstGeom prst="rect">
+            <a:avLst/>
+          </a:prstGeom>
+          <a:noFill/>
+        </p:spPr>
+        <p:txBody>
+          <a:bodyPr wrap="square" lIns="0" rIns="0" tIns="0" bIns="0" anchor="t"/>
+          <a:lstStyle/>
+          <a:p>
+            <a:pPr algn="l">
+              <a:lnSpc>
+                <a:spcPct val="100000"/>
+              </a:lnSpc>
+            </a:pPr>
+            <a:r>
+              <a:rPr sz="2000" b="0">
+                <a:solidFill>
+                  <a:srgbClr val="F8F0E4"/>
+                </a:solidFill>
+                <a:latin typeface="Noto Sans"/>
+                <a:ea typeface="Noto Sans"/>
+                <a:cs typeface="Noto Sans"/>
+              </a:rPr>
+              <a:t>Try the live demos in Wetland. Deck generation runs locally; a published Copilot agent still requires tenant setup.</a:t>
+            </a:r>
+          </a:p>
+        </p:txBody>
+      </p:sp>
+      <p:sp>
+        <p:nvSpPr>
+          <p:cNvPr id="7" name="TextBox 6"/>
+          <p:cNvSpPr txBox="1"/>
+          <p:nvPr/>
+        </p:nvSpPr>
+        <p:spPr>
+          <a:xfrm>
+            <a:off x="566928" y="4709160"/>
+            <a:ext cx="10972800" cy="411480"/>
+          </a:xfrm>
+          <a:prstGeom prst="rect">
+            <a:avLst/>
+          </a:prstGeom>
+          <a:noFill/>
+        </p:spPr>
+        <p:txBody>
+          <a:bodyPr wrap="square" lIns="0" rIns="0" tIns="0" bIns="0" anchor="t"/>
+          <a:lstStyle/>
+          <a:p>
+            <a:pPr algn="l">
+              <a:lnSpc>
+                <a:spcPct val="100000"/>
+              </a:lnSpc>
+            </a:pPr>
+            <a:r>
+              <a:rPr sz="1600" b="1">
+                <a:solidFill>
+                  <a:srgbClr val="D6FF00"/>
+                </a:solidFill>
+                <a:latin typeface="Noto Sans"/>
+                <a:ea typeface="Noto Sans"/>
+                <a:cs typeface="Noto Sans"/>
+              </a:rPr>
+              <a:t>https://wetland-ai-workspace-462504004653.northamerica-northeast2.run.app</a:t>
+            </a:r>
+          </a:p>
+        </p:txBody>
+      </p:sp>
+      <p:sp>
+        <p:nvSpPr>
+          <p:cNvPr id="8" name="TextBox 7"/>
+          <p:cNvSpPr txBox="1"/>
+          <p:nvPr/>
+        </p:nvSpPr>
+        <p:spPr>
+          <a:xfrm>
+            <a:off x="566928" y="6446520"/>
+            <a:ext cx="8778240" cy="256032"/>
+          </a:xfrm>
+          <a:prstGeom prst="rect">
+            <a:avLst/>
+          </a:prstGeom>
+          <a:noFill/>
+        </p:spPr>
+        <p:txBody>
+          <a:bodyPr wrap="square" lIns="0" rIns="0" tIns="0" bIns="0" anchor="t"/>
+          <a:lstStyle/>
+          <a:p>
+            <a:pPr algn="l">
+              <a:lnSpc>
+                <a:spcPct val="100000"/>
+              </a:lnSpc>
+            </a:pPr>
+            <a:r>
+              <a:rPr sz="1100" b="0">
+                <a:solidFill>
+                  <a:srgbClr val="F8F0E4"/>
+                </a:solidFill>
+                <a:latin typeface="Noto Sans"/>
+                <a:ea typeface="Noto Sans"/>
+                <a:cs typeface="Noto Sans"/>
+              </a:rPr>
+              <a:t>Independent Wetland project  ·  Not official WaterAid guidance</a:t>
+            </a:r>
+          </a:p>
+        </p:txBody>
+      </p:sp>
+      <p:sp>
+        <p:nvSpPr>
+          <p:cNvPr id="9" name="TextBox 8"/>
+          <p:cNvSpPr txBox="1"/>
+          <p:nvPr/>
+        </p:nvSpPr>
+        <p:spPr>
+          <a:xfrm>
+            <a:off x="9509760" y="6446520"/>
+            <a:ext cx="2103120" cy="256032"/>
+          </a:xfrm>
+          <a:prstGeom prst="rect">
+            <a:avLst/>
+          </a:prstGeom>
+          <a:noFill/>
+        </p:spPr>
+        <p:txBody>
+          <a:bodyPr wrap="square" lIns="0" rIns="0" tIns="0" bIns="0" anchor="t"/>
+          <a:lstStyle/>
+          <a:p>
+            <a:pPr algn="ctr">
+              <a:lnSpc>
+                <a:spcPct val="100000"/>
+              </a:lnSpc>
+            </a:pPr>
+            <a:r>
+              <a:rPr sz="1100" b="0">
+                <a:solidFill>
+                  <a:srgbClr val="F8F0E4"/>
+                </a:solidFill>
+                <a:latin typeface="Noto Sans"/>
+                <a:ea typeface="Noto Sans"/>
+                <a:cs typeface="Noto Sans"/>
+              </a:rPr>
+              <a:t>10  /  10</a:t>
             </a:r>
           </a:p>
         </p:txBody>
@@ -3738,7 +4045,7 @@
                 <a:ea typeface="Noto Sans"/>
                 <a:cs typeface="Noto Sans"/>
               </a:rPr>
-              <a:t>02  /  08</a:t>
+              <a:t>02  /  10</a:t>
             </a:r>
           </a:p>
         </p:txBody>
@@ -3960,7 +4267,7 @@
                 <a:ea typeface="Noto Sans"/>
                 <a:cs typeface="Noto Sans"/>
               </a:rPr>
-              <a:t>Browse Wetland by task and try the synthetic Growth demo.</a:t>
+              <a:t>Browse Wetland by task and try Growth or a synthetic capability example.</a:t>
             </a:r>
           </a:p>
         </p:txBody>
@@ -4242,7 +4549,7 @@
                 <a:ea typeface="Noto Sans"/>
                 <a:cs typeface="Noto Sans"/>
               </a:rPr>
-              <a:t>03  /  08</a:t>
+              <a:t>03  /  10</a:t>
             </a:r>
           </a:p>
         </p:txBody>
@@ -4280,115 +4587,6 @@
             <a:avLst/>
           </a:prstGeom>
           <a:solidFill>
-            <a:srgbClr val="F8F0E4"/>
-          </a:solidFill>
-          <a:ln>
-            <a:noFill/>
-          </a:ln>
-        </p:spPr>
-        <p:txBody>
-          <a:bodyPr rtlCol="0" anchor="ctr"/>
-          <a:lstStyle/>
-          <a:p>
-            <a:pPr algn="ctr"/>
-          </a:p>
-        </p:txBody>
-      </p:sp>
-      <p:sp>
-        <p:nvSpPr>
-          <p:cNvPr id="3" name="TextBox 2"/>
-          <p:cNvSpPr txBox="1"/>
-          <p:nvPr/>
-        </p:nvSpPr>
-        <p:spPr>
-          <a:xfrm>
-            <a:off x="566928" y="292608"/>
-            <a:ext cx="9144000" cy="292608"/>
-          </a:xfrm>
-          <a:prstGeom prst="rect">
-            <a:avLst/>
-          </a:prstGeom>
-          <a:noFill/>
-        </p:spPr>
-        <p:txBody>
-          <a:bodyPr wrap="square" lIns="0" rIns="0" tIns="0" bIns="0" anchor="t"/>
-          <a:lstStyle/>
-          <a:p>
-            <a:pPr algn="l">
-              <a:lnSpc>
-                <a:spcPct val="100000"/>
-              </a:lnSpc>
-            </a:pPr>
-            <a:r>
-              <a:rPr sz="1300" b="1">
-                <a:solidFill>
-                  <a:srgbClr val="006BD9"/>
-                </a:solidFill>
-                <a:latin typeface="Noto Sans"/>
-                <a:ea typeface="Noto Sans"/>
-                <a:cs typeface="Noto Sans"/>
-              </a:rPr>
-              <a:t>ON THE SHELF</a:t>
-            </a:r>
-          </a:p>
-        </p:txBody>
-      </p:sp>
-      <p:sp>
-        <p:nvSpPr>
-          <p:cNvPr id="4" name="TextBox 3"/>
-          <p:cNvSpPr txBox="1"/>
-          <p:nvPr/>
-        </p:nvSpPr>
-        <p:spPr>
-          <a:xfrm>
-            <a:off x="566928" y="603504"/>
-            <a:ext cx="10972800" cy="822960"/>
-          </a:xfrm>
-          <a:prstGeom prst="rect">
-            <a:avLst/>
-          </a:prstGeom>
-          <a:noFill/>
-        </p:spPr>
-        <p:txBody>
-          <a:bodyPr wrap="square" lIns="0" rIns="0" tIns="0" bIns="0" anchor="t"/>
-          <a:lstStyle/>
-          <a:p>
-            <a:pPr algn="l">
-              <a:lnSpc>
-                <a:spcPct val="100000"/>
-              </a:lnSpc>
-            </a:pPr>
-            <a:r>
-              <a:rPr sz="3200" b="0">
-                <a:solidFill>
-                  <a:srgbClr val="151435"/>
-                </a:solidFill>
-                <a:latin typeface="Noto Sans Black"/>
-                <a:ea typeface="Noto Sans Black"/>
-                <a:cs typeface="Noto Sans Black"/>
-              </a:rPr>
-              <a:t>Brand and Growth are live demos</a:t>
-            </a:r>
-          </a:p>
-        </p:txBody>
-      </p:sp>
-      <p:sp>
-        <p:nvSpPr>
-          <p:cNvPr id="5" name="Rounded Rectangle 4"/>
-          <p:cNvSpPr/>
-          <p:nvPr/>
-        </p:nvSpPr>
-        <p:spPr>
-          <a:xfrm>
-            <a:off x="566928" y="1691640"/>
-            <a:ext cx="2654731" cy="1938528"/>
-          </a:xfrm>
-          <a:prstGeom prst="roundRect">
-            <a:avLst>
-              <a:gd name="adj" fmla="val 8000"/>
-            </a:avLst>
-          </a:prstGeom>
-          <a:solidFill>
             <a:srgbClr val="FFFFFF"/>
           </a:solidFill>
           <a:ln>
@@ -4405,14 +4603,14 @@
       </p:sp>
       <p:sp>
         <p:nvSpPr>
-          <p:cNvPr id="6" name="Rectangle 5"/>
+          <p:cNvPr id="3" name="Rectangle 2"/>
           <p:cNvSpPr/>
           <p:nvPr/>
         </p:nvSpPr>
         <p:spPr>
           <a:xfrm>
-            <a:off x="694944" y="1947672"/>
-            <a:ext cx="64008" cy="1426464"/>
+            <a:off x="0" y="0"/>
+            <a:ext cx="128016" cy="6858000"/>
           </a:xfrm>
           <a:prstGeom prst="rect">
             <a:avLst/>
@@ -4434,19 +4632,95 @@
       </p:sp>
       <p:sp>
         <p:nvSpPr>
-          <p:cNvPr id="7" name="Rounded Rectangle 6"/>
+          <p:cNvPr id="4" name="TextBox 3"/>
+          <p:cNvSpPr txBox="1"/>
+          <p:nvPr/>
+        </p:nvSpPr>
+        <p:spPr>
+          <a:xfrm>
+            <a:off x="566928" y="384048"/>
+            <a:ext cx="9144000" cy="292608"/>
+          </a:xfrm>
+          <a:prstGeom prst="rect">
+            <a:avLst/>
+          </a:prstGeom>
+          <a:noFill/>
+        </p:spPr>
+        <p:txBody>
+          <a:bodyPr wrap="square" lIns="0" rIns="0" tIns="0" bIns="0" anchor="t"/>
+          <a:lstStyle/>
+          <a:p>
+            <a:pPr algn="l">
+              <a:lnSpc>
+                <a:spcPct val="100000"/>
+              </a:lnSpc>
+            </a:pPr>
+            <a:r>
+              <a:rPr sz="1300" b="1">
+                <a:solidFill>
+                  <a:srgbClr val="006BD9"/>
+                </a:solidFill>
+                <a:latin typeface="Noto Sans"/>
+                <a:ea typeface="Noto Sans"/>
+                <a:cs typeface="Noto Sans"/>
+              </a:rPr>
+              <a:t>LIVE REFERENCE AND REPORTING</a:t>
+            </a:r>
+          </a:p>
+        </p:txBody>
+      </p:sp>
+      <p:sp>
+        <p:nvSpPr>
+          <p:cNvPr id="5" name="TextBox 4"/>
+          <p:cNvSpPr txBox="1"/>
+          <p:nvPr/>
+        </p:nvSpPr>
+        <p:spPr>
+          <a:xfrm>
+            <a:off x="566928" y="749808"/>
+            <a:ext cx="10972800" cy="1234440"/>
+          </a:xfrm>
+          <a:prstGeom prst="rect">
+            <a:avLst/>
+          </a:prstGeom>
+          <a:noFill/>
+        </p:spPr>
+        <p:txBody>
+          <a:bodyPr wrap="square" lIns="0" rIns="0" tIns="0" bIns="0" anchor="t"/>
+          <a:lstStyle/>
+          <a:p>
+            <a:pPr algn="l">
+              <a:lnSpc>
+                <a:spcPct val="98000"/>
+              </a:lnSpc>
+            </a:pPr>
+            <a:r>
+              <a:rPr sz="3400" b="0">
+                <a:solidFill>
+                  <a:srgbClr val="151435"/>
+                </a:solidFill>
+                <a:latin typeface="Noto Sans Black"/>
+                <a:ea typeface="Noto Sans Black"/>
+                <a:cs typeface="Noto Sans Black"/>
+              </a:rPr>
+              <a:t>Brand guidance and Growth reporting</a:t>
+            </a:r>
+          </a:p>
+        </p:txBody>
+      </p:sp>
+      <p:sp>
+        <p:nvSpPr>
+          <p:cNvPr id="6" name="Rectangle 5"/>
           <p:cNvSpPr/>
           <p:nvPr/>
         </p:nvSpPr>
         <p:spPr>
           <a:xfrm>
-            <a:off x="768096" y="1874520"/>
-            <a:ext cx="1207008" cy="292608"/>
-          </a:xfrm>
-          <a:prstGeom prst="roundRect">
-            <a:avLst>
-              <a:gd name="adj" fmla="val 40000"/>
-            </a:avLst>
+            <a:off x="603504" y="2267712"/>
+            <a:ext cx="146304" cy="146304"/>
+          </a:xfrm>
+          <a:prstGeom prst="rect">
+            <a:avLst/>
           </a:prstGeom>
           <a:solidFill>
             <a:srgbClr val="D6FF00"/>
@@ -4456,177 +4730,65 @@
           </a:ln>
         </p:spPr>
         <p:txBody>
-          <a:bodyPr rtlCol="0" anchor="ctr" wrap="none"/>
+          <a:bodyPr rtlCol="0" anchor="ctr"/>
           <a:lstStyle/>
           <a:p>
             <a:pPr algn="ctr"/>
-            <a:r>
-              <a:rPr sz="1000" b="1">
-                <a:solidFill>
-                  <a:srgbClr val="151435"/>
+          </a:p>
+        </p:txBody>
+      </p:sp>
+      <p:sp>
+        <p:nvSpPr>
+          <p:cNvPr id="7" name="TextBox 6"/>
+          <p:cNvSpPr txBox="1"/>
+          <p:nvPr/>
+        </p:nvSpPr>
+        <p:spPr>
+          <a:xfrm>
+            <a:off x="960120" y="2139696"/>
+            <a:ext cx="10424160" cy="658368"/>
+          </a:xfrm>
+          <a:prstGeom prst="rect">
+            <a:avLst/>
+          </a:prstGeom>
+          <a:noFill/>
+        </p:spPr>
+        <p:txBody>
+          <a:bodyPr wrap="square" lIns="0" rIns="0" tIns="0" bIns="0" anchor="t"/>
+          <a:lstStyle/>
+          <a:p>
+            <a:pPr algn="l">
+              <a:lnSpc>
+                <a:spcPct val="105000"/>
+              </a:lnSpc>
+            </a:pPr>
+            <a:r>
+              <a:rPr sz="2000" b="0">
+                <a:solidFill>
+                  <a:srgbClr val="44435D"/>
                 </a:solidFill>
                 <a:latin typeface="Noto Sans"/>
                 <a:ea typeface="Noto Sans"/>
                 <a:cs typeface="Noto Sans"/>
               </a:rPr>
-              <a:t>LIVE</a:t>
-            </a:r>
-          </a:p>
-        </p:txBody>
-      </p:sp>
-      <p:sp>
-        <p:nvSpPr>
-          <p:cNvPr id="8" name="TextBox 7"/>
-          <p:cNvSpPr txBox="1"/>
-          <p:nvPr/>
-        </p:nvSpPr>
-        <p:spPr>
-          <a:xfrm>
-            <a:off x="768096" y="2313432"/>
-            <a:ext cx="2307259" cy="777240"/>
-          </a:xfrm>
-          <a:prstGeom prst="rect">
-            <a:avLst/>
-          </a:prstGeom>
-          <a:noFill/>
-        </p:spPr>
-        <p:txBody>
-          <a:bodyPr wrap="square" lIns="0" rIns="0" tIns="0" bIns="0" anchor="t"/>
-          <a:lstStyle/>
-          <a:p>
-            <a:pPr algn="l">
-              <a:lnSpc>
-                <a:spcPct val="95000"/>
-              </a:lnSpc>
-            </a:pPr>
-            <a:r>
-              <a:rPr sz="1500" b="0">
-                <a:solidFill>
-                  <a:srgbClr val="151435"/>
-                </a:solidFill>
-                <a:latin typeface="Noto Sans Black"/>
-                <a:ea typeface="Noto Sans Black"/>
-                <a:cs typeface="Noto Sans Black"/>
-              </a:rPr>
-              <a:t>Brand &amp; design system</a:t>
-            </a:r>
-          </a:p>
-        </p:txBody>
-      </p:sp>
-      <p:sp>
-        <p:nvSpPr>
-          <p:cNvPr id="9" name="TextBox 8"/>
-          <p:cNvSpPr txBox="1"/>
-          <p:nvPr/>
-        </p:nvSpPr>
-        <p:spPr>
-          <a:xfrm>
-            <a:off x="768096" y="3136392"/>
-            <a:ext cx="2307259" cy="329184"/>
-          </a:xfrm>
-          <a:prstGeom prst="rect">
-            <a:avLst/>
-          </a:prstGeom>
-          <a:noFill/>
-        </p:spPr>
-        <p:txBody>
-          <a:bodyPr wrap="square" lIns="0" rIns="0" tIns="0" bIns="0" anchor="t"/>
-          <a:lstStyle/>
-          <a:p>
-            <a:pPr algn="l">
-              <a:lnSpc>
-                <a:spcPct val="100000"/>
-              </a:lnSpc>
-            </a:pPr>
-            <a:r>
-              <a:rPr sz="1100" b="0">
-                <a:solidFill>
-                  <a:srgbClr val="44435D"/>
-                </a:solidFill>
-                <a:latin typeface="Noto Sans"/>
-                <a:ea typeface="Noto Sans"/>
-                <a:cs typeface="Noto Sans"/>
-              </a:rPr>
-              <a:t>Knowledge &amp; brand</a:t>
-            </a:r>
-          </a:p>
-        </p:txBody>
-      </p:sp>
-      <p:sp>
-        <p:nvSpPr>
-          <p:cNvPr id="10" name="Rounded Rectangle 9"/>
+              <a:t>Brand provides the shared colours, fonts, logos and document guidance.</a:t>
+            </a:r>
+          </a:p>
+        </p:txBody>
+      </p:sp>
+      <p:sp>
+        <p:nvSpPr>
+          <p:cNvPr id="8" name="Rectangle 7"/>
           <p:cNvSpPr/>
           <p:nvPr/>
         </p:nvSpPr>
         <p:spPr>
           <a:xfrm>
-            <a:off x="3367963" y="1691640"/>
-            <a:ext cx="2654731" cy="1938528"/>
-          </a:xfrm>
-          <a:prstGeom prst="roundRect">
-            <a:avLst>
-              <a:gd name="adj" fmla="val 8000"/>
-            </a:avLst>
-          </a:prstGeom>
-          <a:solidFill>
-            <a:srgbClr val="FFFFFF"/>
-          </a:solidFill>
-          <a:ln>
-            <a:noFill/>
-          </a:ln>
-        </p:spPr>
-        <p:txBody>
-          <a:bodyPr rtlCol="0" anchor="ctr"/>
-          <a:lstStyle/>
-          <a:p>
-            <a:pPr algn="ctr"/>
-          </a:p>
-        </p:txBody>
-      </p:sp>
-      <p:sp>
-        <p:nvSpPr>
-          <p:cNvPr id="11" name="Rectangle 10"/>
-          <p:cNvSpPr/>
-          <p:nvPr/>
-        </p:nvSpPr>
-        <p:spPr>
-          <a:xfrm>
-            <a:off x="3495979" y="1947672"/>
-            <a:ext cx="64008" cy="1426464"/>
-          </a:xfrm>
-          <a:prstGeom prst="rect">
-            <a:avLst/>
-          </a:prstGeom>
-          <a:solidFill>
-            <a:srgbClr val="006BD9"/>
-          </a:solidFill>
-          <a:ln>
-            <a:noFill/>
-          </a:ln>
-        </p:spPr>
-        <p:txBody>
-          <a:bodyPr rtlCol="0" anchor="ctr"/>
-          <a:lstStyle/>
-          <a:p>
-            <a:pPr algn="ctr"/>
-          </a:p>
-        </p:txBody>
-      </p:sp>
-      <p:sp>
-        <p:nvSpPr>
-          <p:cNvPr id="12" name="Rounded Rectangle 11"/>
-          <p:cNvSpPr/>
-          <p:nvPr/>
-        </p:nvSpPr>
-        <p:spPr>
-          <a:xfrm>
-            <a:off x="3569131" y="1874520"/>
-            <a:ext cx="1207008" cy="292608"/>
-          </a:xfrm>
-          <a:prstGeom prst="roundRect">
-            <a:avLst>
-              <a:gd name="adj" fmla="val 40000"/>
-            </a:avLst>
+            <a:off x="603504" y="3108960"/>
+            <a:ext cx="146304" cy="146304"/>
+          </a:xfrm>
+          <a:prstGeom prst="rect">
+            <a:avLst/>
           </a:prstGeom>
           <a:solidFill>
             <a:srgbClr val="D6FF00"/>
@@ -4636,21 +4798,146 @@
           </a:ln>
         </p:spPr>
         <p:txBody>
-          <a:bodyPr rtlCol="0" anchor="ctr" wrap="none"/>
+          <a:bodyPr rtlCol="0" anchor="ctr"/>
           <a:lstStyle/>
           <a:p>
             <a:pPr algn="ctr"/>
-            <a:r>
-              <a:rPr sz="1000" b="1">
-                <a:solidFill>
-                  <a:srgbClr val="151435"/>
+          </a:p>
+        </p:txBody>
+      </p:sp>
+      <p:sp>
+        <p:nvSpPr>
+          <p:cNvPr id="9" name="TextBox 8"/>
+          <p:cNvSpPr txBox="1"/>
+          <p:nvPr/>
+        </p:nvSpPr>
+        <p:spPr>
+          <a:xfrm>
+            <a:off x="960120" y="2980944"/>
+            <a:ext cx="10424160" cy="658368"/>
+          </a:xfrm>
+          <a:prstGeom prst="rect">
+            <a:avLst/>
+          </a:prstGeom>
+          <a:noFill/>
+        </p:spPr>
+        <p:txBody>
+          <a:bodyPr wrap="square" lIns="0" rIns="0" tIns="0" bIns="0" anchor="t"/>
+          <a:lstStyle/>
+          <a:p>
+            <a:pPr algn="l">
+              <a:lnSpc>
+                <a:spcPct val="105000"/>
+              </a:lnSpc>
+            </a:pPr>
+            <a:r>
+              <a:rPr sz="2000" b="0">
+                <a:solidFill>
+                  <a:srgbClr val="44435D"/>
                 </a:solidFill>
                 <a:latin typeface="Noto Sans"/>
                 <a:ea typeface="Noto Sans"/>
                 <a:cs typeface="Noto Sans"/>
               </a:rPr>
-              <a:t>LIVE</a:t>
-            </a:r>
+              <a:t>Growth uses synthetic donation history: Q3 has 120 new donors against a target of 150.</a:t>
+            </a:r>
+          </a:p>
+        </p:txBody>
+      </p:sp>
+      <p:sp>
+        <p:nvSpPr>
+          <p:cNvPr id="10" name="Rectangle 9"/>
+          <p:cNvSpPr/>
+          <p:nvPr/>
+        </p:nvSpPr>
+        <p:spPr>
+          <a:xfrm>
+            <a:off x="603504" y="3950208"/>
+            <a:ext cx="146304" cy="146304"/>
+          </a:xfrm>
+          <a:prstGeom prst="rect">
+            <a:avLst/>
+          </a:prstGeom>
+          <a:solidFill>
+            <a:srgbClr val="D6FF00"/>
+          </a:solidFill>
+          <a:ln>
+            <a:noFill/>
+          </a:ln>
+        </p:spPr>
+        <p:txBody>
+          <a:bodyPr rtlCol="0" anchor="ctr"/>
+          <a:lstStyle/>
+          <a:p>
+            <a:pPr algn="ctr"/>
+          </a:p>
+        </p:txBody>
+      </p:sp>
+      <p:sp>
+        <p:nvSpPr>
+          <p:cNvPr id="11" name="TextBox 10"/>
+          <p:cNvSpPr txBox="1"/>
+          <p:nvPr/>
+        </p:nvSpPr>
+        <p:spPr>
+          <a:xfrm>
+            <a:off x="960120" y="3822192"/>
+            <a:ext cx="10424160" cy="658368"/>
+          </a:xfrm>
+          <a:prstGeom prst="rect">
+            <a:avLst/>
+          </a:prstGeom>
+          <a:noFill/>
+        </p:spPr>
+        <p:txBody>
+          <a:bodyPr wrap="square" lIns="0" rIns="0" tIns="0" bIns="0" anchor="t"/>
+          <a:lstStyle/>
+          <a:p>
+            <a:pPr algn="l">
+              <a:lnSpc>
+                <a:spcPct val="105000"/>
+              </a:lnSpc>
+            </a:pPr>
+            <a:r>
+              <a:rPr sz="2000" b="0">
+                <a:solidFill>
+                  <a:srgbClr val="44435D"/>
+                </a:solidFill>
+                <a:latin typeface="Noto Sans"/>
+                <a:ea typeface="Noto Sans"/>
+                <a:cs typeface="Noto Sans"/>
+              </a:rPr>
+              <a:t>Growth must retrieve Brand guidance before releasing its PDF and HTML reports.</a:t>
+            </a:r>
+          </a:p>
+        </p:txBody>
+      </p:sp>
+      <p:sp>
+        <p:nvSpPr>
+          <p:cNvPr id="12" name="Rectangle 11"/>
+          <p:cNvSpPr/>
+          <p:nvPr/>
+        </p:nvSpPr>
+        <p:spPr>
+          <a:xfrm>
+            <a:off x="603504" y="4791456"/>
+            <a:ext cx="146304" cy="146304"/>
+          </a:xfrm>
+          <a:prstGeom prst="rect">
+            <a:avLst/>
+          </a:prstGeom>
+          <a:solidFill>
+            <a:srgbClr val="D6FF00"/>
+          </a:solidFill>
+          <a:ln>
+            <a:noFill/>
+          </a:ln>
+        </p:spPr>
+        <p:txBody>
+          <a:bodyPr rtlCol="0" anchor="ctr"/>
+          <a:lstStyle/>
+          <a:p>
+            <a:pPr algn="ctr"/>
           </a:p>
         </p:txBody>
       </p:sp>
@@ -4662,8 +4949,8 @@
         </p:nvSpPr>
         <p:spPr>
           <a:xfrm>
-            <a:off x="3569131" y="2313432"/>
-            <a:ext cx="2307259" cy="777240"/>
+            <a:off x="960120" y="4663440"/>
+            <a:ext cx="10424160" cy="658368"/>
           </a:xfrm>
           <a:prstGeom prst="rect">
             <a:avLst/>
@@ -4676,19 +4963,19 @@
           <a:p>
             <a:pPr algn="l">
               <a:lnSpc>
-                <a:spcPct val="95000"/>
+                <a:spcPct val="105000"/>
               </a:lnSpc>
             </a:pPr>
             <a:r>
-              <a:rPr sz="1500" b="0">
-                <a:solidFill>
-                  <a:srgbClr val="151435"/>
-                </a:solidFill>
-                <a:latin typeface="Noto Sans Black"/>
-                <a:ea typeface="Noto Sans Black"/>
-                <a:cs typeface="Noto Sans Black"/>
-              </a:rPr>
-              <a:t>Growth KPI reporting</a:t>
+              <a:rPr sz="2000" b="0">
+                <a:solidFill>
+                  <a:srgbClr val="44435D"/>
+                </a:solidFill>
+                <a:latin typeface="Noto Sans"/>
+                <a:ea typeface="Noto Sans"/>
+                <a:cs typeface="Noto Sans"/>
+              </a:rPr>
+              <a:t>These services demonstrate the workflow; real donor data is not connected.</a:t>
             </a:r>
           </a:p>
         </p:txBody>
@@ -4701,8 +4988,8 @@
         </p:nvSpPr>
         <p:spPr>
           <a:xfrm>
-            <a:off x="3569131" y="3136392"/>
-            <a:ext cx="2307259" cy="329184"/>
+            <a:off x="566928" y="6446520"/>
+            <a:ext cx="8778240" cy="256032"/>
           </a:xfrm>
           <a:prstGeom prst="rect">
             <a:avLst/>
@@ -4727,951 +5014,6 @@
                 <a:ea typeface="Noto Sans"/>
                 <a:cs typeface="Noto Sans"/>
               </a:rPr>
-              <a:t>Synthetic donor reporting</a:t>
-            </a:r>
-          </a:p>
-        </p:txBody>
-      </p:sp>
-      <p:sp>
-        <p:nvSpPr>
-          <p:cNvPr id="15" name="Rounded Rectangle 14"/>
-          <p:cNvSpPr/>
-          <p:nvPr/>
-        </p:nvSpPr>
-        <p:spPr>
-          <a:xfrm>
-            <a:off x="6168999" y="1691640"/>
-            <a:ext cx="2654731" cy="1938528"/>
-          </a:xfrm>
-          <a:prstGeom prst="roundRect">
-            <a:avLst>
-              <a:gd name="adj" fmla="val 8000"/>
-            </a:avLst>
-          </a:prstGeom>
-          <a:solidFill>
-            <a:srgbClr val="FFFFFF"/>
-          </a:solidFill>
-          <a:ln>
-            <a:noFill/>
-          </a:ln>
-        </p:spPr>
-        <p:txBody>
-          <a:bodyPr rtlCol="0" anchor="ctr"/>
-          <a:lstStyle/>
-          <a:p>
-            <a:pPr algn="ctr"/>
-          </a:p>
-        </p:txBody>
-      </p:sp>
-      <p:sp>
-        <p:nvSpPr>
-          <p:cNvPr id="16" name="Rounded Rectangle 15"/>
-          <p:cNvSpPr/>
-          <p:nvPr/>
-        </p:nvSpPr>
-        <p:spPr>
-          <a:xfrm>
-            <a:off x="6370167" y="1874520"/>
-            <a:ext cx="1207008" cy="292608"/>
-          </a:xfrm>
-          <a:prstGeom prst="roundRect">
-            <a:avLst>
-              <a:gd name="adj" fmla="val 40000"/>
-            </a:avLst>
-          </a:prstGeom>
-          <a:solidFill>
-            <a:srgbClr val="E7EEF6"/>
-          </a:solidFill>
-          <a:ln>
-            <a:noFill/>
-          </a:ln>
-        </p:spPr>
-        <p:txBody>
-          <a:bodyPr rtlCol="0" anchor="ctr" wrap="none"/>
-          <a:lstStyle/>
-          <a:p>
-            <a:pPr algn="ctr"/>
-            <a:r>
-              <a:rPr sz="1000" b="1">
-                <a:solidFill>
-                  <a:srgbClr val="44435D"/>
-                </a:solidFill>
-                <a:latin typeface="Noto Sans"/>
-                <a:ea typeface="Noto Sans"/>
-                <a:cs typeface="Noto Sans"/>
-              </a:rPr>
-              <a:t>CONCEPT</a:t>
-            </a:r>
-          </a:p>
-        </p:txBody>
-      </p:sp>
-      <p:sp>
-        <p:nvSpPr>
-          <p:cNvPr id="17" name="TextBox 16"/>
-          <p:cNvSpPr txBox="1"/>
-          <p:nvPr/>
-        </p:nvSpPr>
-        <p:spPr>
-          <a:xfrm>
-            <a:off x="6370167" y="2313432"/>
-            <a:ext cx="2307259" cy="777240"/>
-          </a:xfrm>
-          <a:prstGeom prst="rect">
-            <a:avLst/>
-          </a:prstGeom>
-          <a:noFill/>
-        </p:spPr>
-        <p:txBody>
-          <a:bodyPr wrap="square" lIns="0" rIns="0" tIns="0" bIns="0" anchor="t"/>
-          <a:lstStyle/>
-          <a:p>
-            <a:pPr algn="l">
-              <a:lnSpc>
-                <a:spcPct val="95000"/>
-              </a:lnSpc>
-            </a:pPr>
-            <a:r>
-              <a:rPr sz="1500" b="0">
-                <a:solidFill>
-                  <a:srgbClr val="151435"/>
-                </a:solidFill>
-                <a:latin typeface="Noto Sans Black"/>
-                <a:ea typeface="Noto Sans Black"/>
-                <a:cs typeface="Noto Sans Black"/>
-              </a:rPr>
-              <a:t>Programme reporting</a:t>
-            </a:r>
-          </a:p>
-        </p:txBody>
-      </p:sp>
-      <p:sp>
-        <p:nvSpPr>
-          <p:cNvPr id="18" name="TextBox 17"/>
-          <p:cNvSpPr txBox="1"/>
-          <p:nvPr/>
-        </p:nvSpPr>
-        <p:spPr>
-          <a:xfrm>
-            <a:off x="6370167" y="3136392"/>
-            <a:ext cx="2307259" cy="329184"/>
-          </a:xfrm>
-          <a:prstGeom prst="rect">
-            <a:avLst/>
-          </a:prstGeom>
-          <a:noFill/>
-        </p:spPr>
-        <p:txBody>
-          <a:bodyPr wrap="square" lIns="0" rIns="0" tIns="0" bIns="0" anchor="t"/>
-          <a:lstStyle/>
-          <a:p>
-            <a:pPr algn="l">
-              <a:lnSpc>
-                <a:spcPct val="100000"/>
-              </a:lnSpc>
-            </a:pPr>
-            <a:r>
-              <a:rPr sz="1100" b="0">
-                <a:solidFill>
-                  <a:srgbClr val="44435D"/>
-                </a:solidFill>
-                <a:latin typeface="Noto Sans"/>
-                <a:ea typeface="Noto Sans"/>
-                <a:cs typeface="Noto Sans"/>
-              </a:rPr>
-              <a:t>International Programmes</a:t>
-            </a:r>
-          </a:p>
-        </p:txBody>
-      </p:sp>
-      <p:sp>
-        <p:nvSpPr>
-          <p:cNvPr id="19" name="Rounded Rectangle 18"/>
-          <p:cNvSpPr/>
-          <p:nvPr/>
-        </p:nvSpPr>
-        <p:spPr>
-          <a:xfrm>
-            <a:off x="8970035" y="1691640"/>
-            <a:ext cx="2654731" cy="1938528"/>
-          </a:xfrm>
-          <a:prstGeom prst="roundRect">
-            <a:avLst>
-              <a:gd name="adj" fmla="val 8000"/>
-            </a:avLst>
-          </a:prstGeom>
-          <a:solidFill>
-            <a:srgbClr val="FFFFFF"/>
-          </a:solidFill>
-          <a:ln>
-            <a:noFill/>
-          </a:ln>
-        </p:spPr>
-        <p:txBody>
-          <a:bodyPr rtlCol="0" anchor="ctr"/>
-          <a:lstStyle/>
-          <a:p>
-            <a:pPr algn="ctr"/>
-          </a:p>
-        </p:txBody>
-      </p:sp>
-      <p:sp>
-        <p:nvSpPr>
-          <p:cNvPr id="20" name="Rounded Rectangle 19"/>
-          <p:cNvSpPr/>
-          <p:nvPr/>
-        </p:nvSpPr>
-        <p:spPr>
-          <a:xfrm>
-            <a:off x="9171203" y="1874520"/>
-            <a:ext cx="1207008" cy="292608"/>
-          </a:xfrm>
-          <a:prstGeom prst="roundRect">
-            <a:avLst>
-              <a:gd name="adj" fmla="val 40000"/>
-            </a:avLst>
-          </a:prstGeom>
-          <a:solidFill>
-            <a:srgbClr val="E7EEF6"/>
-          </a:solidFill>
-          <a:ln>
-            <a:noFill/>
-          </a:ln>
-        </p:spPr>
-        <p:txBody>
-          <a:bodyPr rtlCol="0" anchor="ctr" wrap="none"/>
-          <a:lstStyle/>
-          <a:p>
-            <a:pPr algn="ctr"/>
-            <a:r>
-              <a:rPr sz="1000" b="1">
-                <a:solidFill>
-                  <a:srgbClr val="44435D"/>
-                </a:solidFill>
-                <a:latin typeface="Noto Sans"/>
-                <a:ea typeface="Noto Sans"/>
-                <a:cs typeface="Noto Sans"/>
-              </a:rPr>
-              <a:t>CONCEPT</a:t>
-            </a:r>
-          </a:p>
-        </p:txBody>
-      </p:sp>
-      <p:sp>
-        <p:nvSpPr>
-          <p:cNvPr id="21" name="TextBox 20"/>
-          <p:cNvSpPr txBox="1"/>
-          <p:nvPr/>
-        </p:nvSpPr>
-        <p:spPr>
-          <a:xfrm>
-            <a:off x="9171203" y="2313432"/>
-            <a:ext cx="2307259" cy="777240"/>
-          </a:xfrm>
-          <a:prstGeom prst="rect">
-            <a:avLst/>
-          </a:prstGeom>
-          <a:noFill/>
-        </p:spPr>
-        <p:txBody>
-          <a:bodyPr wrap="square" lIns="0" rIns="0" tIns="0" bIns="0" anchor="t"/>
-          <a:lstStyle/>
-          <a:p>
-            <a:pPr algn="l">
-              <a:lnSpc>
-                <a:spcPct val="95000"/>
-              </a:lnSpc>
-            </a:pPr>
-            <a:r>
-              <a:rPr sz="1500" b="0">
-                <a:solidFill>
-                  <a:srgbClr val="151435"/>
-                </a:solidFill>
-                <a:latin typeface="Noto Sans Black"/>
-                <a:ea typeface="Noto Sans Black"/>
-                <a:cs typeface="Noto Sans Black"/>
-              </a:rPr>
-              <a:t>Supporter care</a:t>
-            </a:r>
-          </a:p>
-        </p:txBody>
-      </p:sp>
-      <p:sp>
-        <p:nvSpPr>
-          <p:cNvPr id="22" name="TextBox 21"/>
-          <p:cNvSpPr txBox="1"/>
-          <p:nvPr/>
-        </p:nvSpPr>
-        <p:spPr>
-          <a:xfrm>
-            <a:off x="9171203" y="3136392"/>
-            <a:ext cx="2307259" cy="329184"/>
-          </a:xfrm>
-          <a:prstGeom prst="rect">
-            <a:avLst/>
-          </a:prstGeom>
-          <a:noFill/>
-        </p:spPr>
-        <p:txBody>
-          <a:bodyPr wrap="square" lIns="0" rIns="0" tIns="0" bIns="0" anchor="t"/>
-          <a:lstStyle/>
-          <a:p>
-            <a:pPr algn="l">
-              <a:lnSpc>
-                <a:spcPct val="100000"/>
-              </a:lnSpc>
-            </a:pPr>
-            <a:r>
-              <a:rPr sz="1100" b="0">
-                <a:solidFill>
-                  <a:srgbClr val="44435D"/>
-                </a:solidFill>
-                <a:latin typeface="Noto Sans"/>
-                <a:ea typeface="Noto Sans"/>
-                <a:cs typeface="Noto Sans"/>
-              </a:rPr>
-              <a:t>Supporter Care</a:t>
-            </a:r>
-          </a:p>
-        </p:txBody>
-      </p:sp>
-      <p:sp>
-        <p:nvSpPr>
-          <p:cNvPr id="23" name="Rounded Rectangle 22"/>
-          <p:cNvSpPr/>
-          <p:nvPr/>
-        </p:nvSpPr>
-        <p:spPr>
-          <a:xfrm>
-            <a:off x="566928" y="3776472"/>
-            <a:ext cx="2654731" cy="1938528"/>
-          </a:xfrm>
-          <a:prstGeom prst="roundRect">
-            <a:avLst>
-              <a:gd name="adj" fmla="val 8000"/>
-            </a:avLst>
-          </a:prstGeom>
-          <a:solidFill>
-            <a:srgbClr val="FFFFFF"/>
-          </a:solidFill>
-          <a:ln>
-            <a:noFill/>
-          </a:ln>
-        </p:spPr>
-        <p:txBody>
-          <a:bodyPr rtlCol="0" anchor="ctr"/>
-          <a:lstStyle/>
-          <a:p>
-            <a:pPr algn="ctr"/>
-          </a:p>
-        </p:txBody>
-      </p:sp>
-      <p:sp>
-        <p:nvSpPr>
-          <p:cNvPr id="24" name="Rounded Rectangle 23"/>
-          <p:cNvSpPr/>
-          <p:nvPr/>
-        </p:nvSpPr>
-        <p:spPr>
-          <a:xfrm>
-            <a:off x="768096" y="3959352"/>
-            <a:ext cx="1207008" cy="292608"/>
-          </a:xfrm>
-          <a:prstGeom prst="roundRect">
-            <a:avLst>
-              <a:gd name="adj" fmla="val 40000"/>
-            </a:avLst>
-          </a:prstGeom>
-          <a:solidFill>
-            <a:srgbClr val="E7EEF6"/>
-          </a:solidFill>
-          <a:ln>
-            <a:noFill/>
-          </a:ln>
-        </p:spPr>
-        <p:txBody>
-          <a:bodyPr rtlCol="0" anchor="ctr" wrap="none"/>
-          <a:lstStyle/>
-          <a:p>
-            <a:pPr algn="ctr"/>
-            <a:r>
-              <a:rPr sz="1000" b="1">
-                <a:solidFill>
-                  <a:srgbClr val="44435D"/>
-                </a:solidFill>
-                <a:latin typeface="Noto Sans"/>
-                <a:ea typeface="Noto Sans"/>
-                <a:cs typeface="Noto Sans"/>
-              </a:rPr>
-              <a:t>CONCEPT</a:t>
-            </a:r>
-          </a:p>
-        </p:txBody>
-      </p:sp>
-      <p:sp>
-        <p:nvSpPr>
-          <p:cNvPr id="25" name="TextBox 24"/>
-          <p:cNvSpPr txBox="1"/>
-          <p:nvPr/>
-        </p:nvSpPr>
-        <p:spPr>
-          <a:xfrm>
-            <a:off x="768096" y="4398264"/>
-            <a:ext cx="2307259" cy="777240"/>
-          </a:xfrm>
-          <a:prstGeom prst="rect">
-            <a:avLst/>
-          </a:prstGeom>
-          <a:noFill/>
-        </p:spPr>
-        <p:txBody>
-          <a:bodyPr wrap="square" lIns="0" rIns="0" tIns="0" bIns="0" anchor="t"/>
-          <a:lstStyle/>
-          <a:p>
-            <a:pPr algn="l">
-              <a:lnSpc>
-                <a:spcPct val="95000"/>
-              </a:lnSpc>
-            </a:pPr>
-            <a:r>
-              <a:rPr sz="1500" b="0">
-                <a:solidFill>
-                  <a:srgbClr val="151435"/>
-                </a:solidFill>
-                <a:latin typeface="Noto Sans Black"/>
-                <a:ea typeface="Noto Sans Black"/>
-                <a:cs typeface="Noto Sans Black"/>
-              </a:rPr>
-              <a:t>Water point insights</a:t>
-            </a:r>
-          </a:p>
-        </p:txBody>
-      </p:sp>
-      <p:sp>
-        <p:nvSpPr>
-          <p:cNvPr id="26" name="TextBox 25"/>
-          <p:cNvSpPr txBox="1"/>
-          <p:nvPr/>
-        </p:nvSpPr>
-        <p:spPr>
-          <a:xfrm>
-            <a:off x="768096" y="5221224"/>
-            <a:ext cx="2307259" cy="329184"/>
-          </a:xfrm>
-          <a:prstGeom prst="rect">
-            <a:avLst/>
-          </a:prstGeom>
-          <a:noFill/>
-        </p:spPr>
-        <p:txBody>
-          <a:bodyPr wrap="square" lIns="0" rIns="0" tIns="0" bIns="0" anchor="t"/>
-          <a:lstStyle/>
-          <a:p>
-            <a:pPr algn="l">
-              <a:lnSpc>
-                <a:spcPct val="100000"/>
-              </a:lnSpc>
-            </a:pPr>
-            <a:r>
-              <a:rPr sz="1100" b="0">
-                <a:solidFill>
-                  <a:srgbClr val="44435D"/>
-                </a:solidFill>
-                <a:latin typeface="Noto Sans"/>
-                <a:ea typeface="Noto Sans"/>
-                <a:cs typeface="Noto Sans"/>
-              </a:rPr>
-              <a:t>Programme &amp; MERL</a:t>
-            </a:r>
-          </a:p>
-        </p:txBody>
-      </p:sp>
-      <p:sp>
-        <p:nvSpPr>
-          <p:cNvPr id="27" name="Rounded Rectangle 26"/>
-          <p:cNvSpPr/>
-          <p:nvPr/>
-        </p:nvSpPr>
-        <p:spPr>
-          <a:xfrm>
-            <a:off x="3367963" y="3776472"/>
-            <a:ext cx="2654731" cy="1938528"/>
-          </a:xfrm>
-          <a:prstGeom prst="roundRect">
-            <a:avLst>
-              <a:gd name="adj" fmla="val 8000"/>
-            </a:avLst>
-          </a:prstGeom>
-          <a:solidFill>
-            <a:srgbClr val="FFFFFF"/>
-          </a:solidFill>
-          <a:ln>
-            <a:noFill/>
-          </a:ln>
-        </p:spPr>
-        <p:txBody>
-          <a:bodyPr rtlCol="0" anchor="ctr"/>
-          <a:lstStyle/>
-          <a:p>
-            <a:pPr algn="ctr"/>
-          </a:p>
-        </p:txBody>
-      </p:sp>
-      <p:sp>
-        <p:nvSpPr>
-          <p:cNvPr id="28" name="Rounded Rectangle 27"/>
-          <p:cNvSpPr/>
-          <p:nvPr/>
-        </p:nvSpPr>
-        <p:spPr>
-          <a:xfrm>
-            <a:off x="3569131" y="3959352"/>
-            <a:ext cx="1207008" cy="292608"/>
-          </a:xfrm>
-          <a:prstGeom prst="roundRect">
-            <a:avLst>
-              <a:gd name="adj" fmla="val 40000"/>
-            </a:avLst>
-          </a:prstGeom>
-          <a:solidFill>
-            <a:srgbClr val="E7EEF6"/>
-          </a:solidFill>
-          <a:ln>
-            <a:noFill/>
-          </a:ln>
-        </p:spPr>
-        <p:txBody>
-          <a:bodyPr rtlCol="0" anchor="ctr" wrap="none"/>
-          <a:lstStyle/>
-          <a:p>
-            <a:pPr algn="ctr"/>
-            <a:r>
-              <a:rPr sz="1000" b="1">
-                <a:solidFill>
-                  <a:srgbClr val="44435D"/>
-                </a:solidFill>
-                <a:latin typeface="Noto Sans"/>
-                <a:ea typeface="Noto Sans"/>
-                <a:cs typeface="Noto Sans"/>
-              </a:rPr>
-              <a:t>CONCEPT</a:t>
-            </a:r>
-          </a:p>
-        </p:txBody>
-      </p:sp>
-      <p:sp>
-        <p:nvSpPr>
-          <p:cNvPr id="29" name="TextBox 28"/>
-          <p:cNvSpPr txBox="1"/>
-          <p:nvPr/>
-        </p:nvSpPr>
-        <p:spPr>
-          <a:xfrm>
-            <a:off x="3569131" y="4398264"/>
-            <a:ext cx="2307259" cy="777240"/>
-          </a:xfrm>
-          <a:prstGeom prst="rect">
-            <a:avLst/>
-          </a:prstGeom>
-          <a:noFill/>
-        </p:spPr>
-        <p:txBody>
-          <a:bodyPr wrap="square" lIns="0" rIns="0" tIns="0" bIns="0" anchor="t"/>
-          <a:lstStyle/>
-          <a:p>
-            <a:pPr algn="l">
-              <a:lnSpc>
-                <a:spcPct val="95000"/>
-              </a:lnSpc>
-            </a:pPr>
-            <a:r>
-              <a:rPr sz="1500" b="0">
-                <a:solidFill>
-                  <a:srgbClr val="151435"/>
-                </a:solidFill>
-                <a:latin typeface="Noto Sans Black"/>
-                <a:ea typeface="Noto Sans Black"/>
-                <a:cs typeface="Noto Sans Black"/>
-              </a:rPr>
-              <a:t>Fundraising intelligence</a:t>
-            </a:r>
-          </a:p>
-        </p:txBody>
-      </p:sp>
-      <p:sp>
-        <p:nvSpPr>
-          <p:cNvPr id="30" name="TextBox 29"/>
-          <p:cNvSpPr txBox="1"/>
-          <p:nvPr/>
-        </p:nvSpPr>
-        <p:spPr>
-          <a:xfrm>
-            <a:off x="3569131" y="5221224"/>
-            <a:ext cx="2307259" cy="329184"/>
-          </a:xfrm>
-          <a:prstGeom prst="rect">
-            <a:avLst/>
-          </a:prstGeom>
-          <a:noFill/>
-        </p:spPr>
-        <p:txBody>
-          <a:bodyPr wrap="square" lIns="0" rIns="0" tIns="0" bIns="0" anchor="t"/>
-          <a:lstStyle/>
-          <a:p>
-            <a:pPr algn="l">
-              <a:lnSpc>
-                <a:spcPct val="100000"/>
-              </a:lnSpc>
-            </a:pPr>
-            <a:r>
-              <a:rPr sz="1100" b="0">
-                <a:solidFill>
-                  <a:srgbClr val="44435D"/>
-                </a:solidFill>
-                <a:latin typeface="Noto Sans"/>
-                <a:ea typeface="Noto Sans"/>
-                <a:cs typeface="Noto Sans"/>
-              </a:rPr>
-              <a:t>Fundraising</a:t>
-            </a:r>
-          </a:p>
-        </p:txBody>
-      </p:sp>
-      <p:sp>
-        <p:nvSpPr>
-          <p:cNvPr id="31" name="Rounded Rectangle 30"/>
-          <p:cNvSpPr/>
-          <p:nvPr/>
-        </p:nvSpPr>
-        <p:spPr>
-          <a:xfrm>
-            <a:off x="6168999" y="3776472"/>
-            <a:ext cx="2654731" cy="1938528"/>
-          </a:xfrm>
-          <a:prstGeom prst="roundRect">
-            <a:avLst>
-              <a:gd name="adj" fmla="val 8000"/>
-            </a:avLst>
-          </a:prstGeom>
-          <a:solidFill>
-            <a:srgbClr val="FFFFFF"/>
-          </a:solidFill>
-          <a:ln>
-            <a:noFill/>
-          </a:ln>
-        </p:spPr>
-        <p:txBody>
-          <a:bodyPr rtlCol="0" anchor="ctr"/>
-          <a:lstStyle/>
-          <a:p>
-            <a:pPr algn="ctr"/>
-          </a:p>
-        </p:txBody>
-      </p:sp>
-      <p:sp>
-        <p:nvSpPr>
-          <p:cNvPr id="32" name="Rounded Rectangle 31"/>
-          <p:cNvSpPr/>
-          <p:nvPr/>
-        </p:nvSpPr>
-        <p:spPr>
-          <a:xfrm>
-            <a:off x="6370167" y="3959352"/>
-            <a:ext cx="1207008" cy="292608"/>
-          </a:xfrm>
-          <a:prstGeom prst="roundRect">
-            <a:avLst>
-              <a:gd name="adj" fmla="val 40000"/>
-            </a:avLst>
-          </a:prstGeom>
-          <a:solidFill>
-            <a:srgbClr val="E7EEF6"/>
-          </a:solidFill>
-          <a:ln>
-            <a:noFill/>
-          </a:ln>
-        </p:spPr>
-        <p:txBody>
-          <a:bodyPr rtlCol="0" anchor="ctr" wrap="none"/>
-          <a:lstStyle/>
-          <a:p>
-            <a:pPr algn="ctr"/>
-            <a:r>
-              <a:rPr sz="1000" b="1">
-                <a:solidFill>
-                  <a:srgbClr val="44435D"/>
-                </a:solidFill>
-                <a:latin typeface="Noto Sans"/>
-                <a:ea typeface="Noto Sans"/>
-                <a:cs typeface="Noto Sans"/>
-              </a:rPr>
-              <a:t>CONCEPT</a:t>
-            </a:r>
-          </a:p>
-        </p:txBody>
-      </p:sp>
-      <p:sp>
-        <p:nvSpPr>
-          <p:cNvPr id="33" name="TextBox 32"/>
-          <p:cNvSpPr txBox="1"/>
-          <p:nvPr/>
-        </p:nvSpPr>
-        <p:spPr>
-          <a:xfrm>
-            <a:off x="6370167" y="4398264"/>
-            <a:ext cx="2307259" cy="777240"/>
-          </a:xfrm>
-          <a:prstGeom prst="rect">
-            <a:avLst/>
-          </a:prstGeom>
-          <a:noFill/>
-        </p:spPr>
-        <p:txBody>
-          <a:bodyPr wrap="square" lIns="0" rIns="0" tIns="0" bIns="0" anchor="t"/>
-          <a:lstStyle/>
-          <a:p>
-            <a:pPr algn="l">
-              <a:lnSpc>
-                <a:spcPct val="95000"/>
-              </a:lnSpc>
-            </a:pPr>
-            <a:r>
-              <a:rPr sz="1500" b="0">
-                <a:solidFill>
-                  <a:srgbClr val="151435"/>
-                </a:solidFill>
-                <a:latin typeface="Noto Sans Black"/>
-                <a:ea typeface="Noto Sans Black"/>
-                <a:cs typeface="Noto Sans Black"/>
-              </a:rPr>
-              <a:t>Grant reconciliation</a:t>
-            </a:r>
-          </a:p>
-        </p:txBody>
-      </p:sp>
-      <p:sp>
-        <p:nvSpPr>
-          <p:cNvPr id="34" name="TextBox 33"/>
-          <p:cNvSpPr txBox="1"/>
-          <p:nvPr/>
-        </p:nvSpPr>
-        <p:spPr>
-          <a:xfrm>
-            <a:off x="6370167" y="5221224"/>
-            <a:ext cx="2307259" cy="329184"/>
-          </a:xfrm>
-          <a:prstGeom prst="rect">
-            <a:avLst/>
-          </a:prstGeom>
-          <a:noFill/>
-        </p:spPr>
-        <p:txBody>
-          <a:bodyPr wrap="square" lIns="0" rIns="0" tIns="0" bIns="0" anchor="t"/>
-          <a:lstStyle/>
-          <a:p>
-            <a:pPr algn="l">
-              <a:lnSpc>
-                <a:spcPct val="100000"/>
-              </a:lnSpc>
-            </a:pPr>
-            <a:r>
-              <a:rPr sz="1100" b="0">
-                <a:solidFill>
-                  <a:srgbClr val="44435D"/>
-                </a:solidFill>
-                <a:latin typeface="Noto Sans"/>
-                <a:ea typeface="Noto Sans"/>
-                <a:cs typeface="Noto Sans"/>
-              </a:rPr>
-              <a:t>Grants Finance</a:t>
-            </a:r>
-          </a:p>
-        </p:txBody>
-      </p:sp>
-      <p:sp>
-        <p:nvSpPr>
-          <p:cNvPr id="35" name="Rounded Rectangle 34"/>
-          <p:cNvSpPr/>
-          <p:nvPr/>
-        </p:nvSpPr>
-        <p:spPr>
-          <a:xfrm>
-            <a:off x="8970035" y="3776472"/>
-            <a:ext cx="2654731" cy="1938528"/>
-          </a:xfrm>
-          <a:prstGeom prst="roundRect">
-            <a:avLst>
-              <a:gd name="adj" fmla="val 8000"/>
-            </a:avLst>
-          </a:prstGeom>
-          <a:solidFill>
-            <a:srgbClr val="FFFFFF"/>
-          </a:solidFill>
-          <a:ln>
-            <a:noFill/>
-          </a:ln>
-        </p:spPr>
-        <p:txBody>
-          <a:bodyPr rtlCol="0" anchor="ctr"/>
-          <a:lstStyle/>
-          <a:p>
-            <a:pPr algn="ctr"/>
-          </a:p>
-        </p:txBody>
-      </p:sp>
-      <p:sp>
-        <p:nvSpPr>
-          <p:cNvPr id="36" name="Rounded Rectangle 35"/>
-          <p:cNvSpPr/>
-          <p:nvPr/>
-        </p:nvSpPr>
-        <p:spPr>
-          <a:xfrm>
-            <a:off x="9171203" y="3959352"/>
-            <a:ext cx="1207008" cy="292608"/>
-          </a:xfrm>
-          <a:prstGeom prst="roundRect">
-            <a:avLst>
-              <a:gd name="adj" fmla="val 40000"/>
-            </a:avLst>
-          </a:prstGeom>
-          <a:solidFill>
-            <a:srgbClr val="E7EEF6"/>
-          </a:solidFill>
-          <a:ln>
-            <a:noFill/>
-          </a:ln>
-        </p:spPr>
-        <p:txBody>
-          <a:bodyPr rtlCol="0" anchor="ctr" wrap="none"/>
-          <a:lstStyle/>
-          <a:p>
-            <a:pPr algn="ctr"/>
-            <a:r>
-              <a:rPr sz="1000" b="1">
-                <a:solidFill>
-                  <a:srgbClr val="44435D"/>
-                </a:solidFill>
-                <a:latin typeface="Noto Sans"/>
-                <a:ea typeface="Noto Sans"/>
-                <a:cs typeface="Noto Sans"/>
-              </a:rPr>
-              <a:t>CONCEPT</a:t>
-            </a:r>
-          </a:p>
-        </p:txBody>
-      </p:sp>
-      <p:sp>
-        <p:nvSpPr>
-          <p:cNvPr id="37" name="TextBox 36"/>
-          <p:cNvSpPr txBox="1"/>
-          <p:nvPr/>
-        </p:nvSpPr>
-        <p:spPr>
-          <a:xfrm>
-            <a:off x="9171203" y="4398264"/>
-            <a:ext cx="2307259" cy="777240"/>
-          </a:xfrm>
-          <a:prstGeom prst="rect">
-            <a:avLst/>
-          </a:prstGeom>
-          <a:noFill/>
-        </p:spPr>
-        <p:txBody>
-          <a:bodyPr wrap="square" lIns="0" rIns="0" tIns="0" bIns="0" anchor="t"/>
-          <a:lstStyle/>
-          <a:p>
-            <a:pPr algn="l">
-              <a:lnSpc>
-                <a:spcPct val="95000"/>
-              </a:lnSpc>
-            </a:pPr>
-            <a:r>
-              <a:rPr sz="1500" b="0">
-                <a:solidFill>
-                  <a:srgbClr val="151435"/>
-                </a:solidFill>
-                <a:latin typeface="Noto Sans Black"/>
-                <a:ea typeface="Noto Sans Black"/>
-                <a:cs typeface="Noto Sans Black"/>
-              </a:rPr>
-              <a:t>Policy &amp; evidence library</a:t>
-            </a:r>
-          </a:p>
-        </p:txBody>
-      </p:sp>
-      <p:sp>
-        <p:nvSpPr>
-          <p:cNvPr id="38" name="TextBox 37"/>
-          <p:cNvSpPr txBox="1"/>
-          <p:nvPr/>
-        </p:nvSpPr>
-        <p:spPr>
-          <a:xfrm>
-            <a:off x="9171203" y="5221224"/>
-            <a:ext cx="2307259" cy="329184"/>
-          </a:xfrm>
-          <a:prstGeom prst="rect">
-            <a:avLst/>
-          </a:prstGeom>
-          <a:noFill/>
-        </p:spPr>
-        <p:txBody>
-          <a:bodyPr wrap="square" lIns="0" rIns="0" tIns="0" bIns="0" anchor="t"/>
-          <a:lstStyle/>
-          <a:p>
-            <a:pPr algn="l">
-              <a:lnSpc>
-                <a:spcPct val="100000"/>
-              </a:lnSpc>
-            </a:pPr>
-            <a:r>
-              <a:rPr sz="1100" b="0">
-                <a:solidFill>
-                  <a:srgbClr val="44435D"/>
-                </a:solidFill>
-                <a:latin typeface="Noto Sans"/>
-                <a:ea typeface="Noto Sans"/>
-                <a:cs typeface="Noto Sans"/>
-              </a:rPr>
-              <a:t>Policy &amp; Advocacy</a:t>
-            </a:r>
-          </a:p>
-        </p:txBody>
-      </p:sp>
-      <p:sp>
-        <p:nvSpPr>
-          <p:cNvPr id="39" name="TextBox 38"/>
-          <p:cNvSpPr txBox="1"/>
-          <p:nvPr/>
-        </p:nvSpPr>
-        <p:spPr>
-          <a:xfrm>
-            <a:off x="566928" y="6446520"/>
-            <a:ext cx="8778240" cy="256032"/>
-          </a:xfrm>
-          <a:prstGeom prst="rect">
-            <a:avLst/>
-          </a:prstGeom>
-          <a:noFill/>
-        </p:spPr>
-        <p:txBody>
-          <a:bodyPr wrap="square" lIns="0" rIns="0" tIns="0" bIns="0" anchor="t"/>
-          <a:lstStyle/>
-          <a:p>
-            <a:pPr algn="l">
-              <a:lnSpc>
-                <a:spcPct val="100000"/>
-              </a:lnSpc>
-            </a:pPr>
-            <a:r>
-              <a:rPr sz="1100" b="0">
-                <a:solidFill>
-                  <a:srgbClr val="44435D"/>
-                </a:solidFill>
-                <a:latin typeface="Noto Sans"/>
-                <a:ea typeface="Noto Sans"/>
-                <a:cs typeface="Noto Sans"/>
-              </a:rPr>
               <a:t>Independent Wetland project  ·  Not official WaterAid guidance</a:t>
             </a:r>
           </a:p>
@@ -5679,7 +5021,7 @@
       </p:sp>
       <p:sp>
         <p:nvSpPr>
-          <p:cNvPr id="40" name="TextBox 39"/>
+          <p:cNvPr id="15" name="TextBox 14"/>
           <p:cNvSpPr txBox="1"/>
           <p:nvPr/>
         </p:nvSpPr>
@@ -5711,7 +5053,7 @@
                 <a:ea typeface="Noto Sans"/>
                 <a:cs typeface="Noto Sans"/>
               </a:rPr>
-              <a:t>04  /  08</a:t>
+              <a:t>04  /  10</a:t>
             </a:r>
           </a:p>
         </p:txBody>
@@ -5749,6 +5091,115 @@
             <a:avLst/>
           </a:prstGeom>
           <a:solidFill>
+            <a:srgbClr val="F8F0E4"/>
+          </a:solidFill>
+          <a:ln>
+            <a:noFill/>
+          </a:ln>
+        </p:spPr>
+        <p:txBody>
+          <a:bodyPr rtlCol="0" anchor="ctr"/>
+          <a:lstStyle/>
+          <a:p>
+            <a:pPr algn="ctr"/>
+          </a:p>
+        </p:txBody>
+      </p:sp>
+      <p:sp>
+        <p:nvSpPr>
+          <p:cNvPr id="3" name="TextBox 2"/>
+          <p:cNvSpPr txBox="1"/>
+          <p:nvPr/>
+        </p:nvSpPr>
+        <p:spPr>
+          <a:xfrm>
+            <a:off x="566928" y="292608"/>
+            <a:ext cx="9144000" cy="292608"/>
+          </a:xfrm>
+          <a:prstGeom prst="rect">
+            <a:avLst/>
+          </a:prstGeom>
+          <a:noFill/>
+        </p:spPr>
+        <p:txBody>
+          <a:bodyPr wrap="square" lIns="0" rIns="0" tIns="0" bIns="0" anchor="t"/>
+          <a:lstStyle/>
+          <a:p>
+            <a:pPr algn="l">
+              <a:lnSpc>
+                <a:spcPct val="100000"/>
+              </a:lnSpc>
+            </a:pPr>
+            <a:r>
+              <a:rPr sz="1300" b="1">
+                <a:solidFill>
+                  <a:srgbClr val="006BD9"/>
+                </a:solidFill>
+                <a:latin typeface="Noto Sans"/>
+                <a:ea typeface="Noto Sans"/>
+                <a:cs typeface="Noto Sans"/>
+              </a:rPr>
+              <a:t>LIVE SYNTHETIC CAPABILITY EXAMPLES</a:t>
+            </a:r>
+          </a:p>
+        </p:txBody>
+      </p:sp>
+      <p:sp>
+        <p:nvSpPr>
+          <p:cNvPr id="4" name="TextBox 3"/>
+          <p:cNvSpPr txBox="1"/>
+          <p:nvPr/>
+        </p:nvSpPr>
+        <p:spPr>
+          <a:xfrm>
+            <a:off x="566928" y="603504"/>
+            <a:ext cx="10972800" cy="822960"/>
+          </a:xfrm>
+          <a:prstGeom prst="rect">
+            <a:avLst/>
+          </a:prstGeom>
+          <a:noFill/>
+        </p:spPr>
+        <p:txBody>
+          <a:bodyPr wrap="square" lIns="0" rIns="0" tIns="0" bIns="0" anchor="t"/>
+          <a:lstStyle/>
+          <a:p>
+            <a:pPr algn="l">
+              <a:lnSpc>
+                <a:spcPct val="100000"/>
+              </a:lnSpc>
+            </a:pPr>
+            <a:r>
+              <a:rPr sz="3200" b="0">
+                <a:solidFill>
+                  <a:srgbClr val="151435"/>
+                </a:solidFill>
+                <a:latin typeface="Noto Sans Black"/>
+                <a:ea typeface="Noto Sans Black"/>
+                <a:cs typeface="Noto Sans Black"/>
+              </a:rPr>
+              <a:t>Eight scoped examples, one MCP service</a:t>
+            </a:r>
+          </a:p>
+        </p:txBody>
+      </p:sp>
+      <p:sp>
+        <p:nvSpPr>
+          <p:cNvPr id="5" name="Rounded Rectangle 4"/>
+          <p:cNvSpPr/>
+          <p:nvPr/>
+        </p:nvSpPr>
+        <p:spPr>
+          <a:xfrm>
+            <a:off x="566928" y="1691640"/>
+            <a:ext cx="2654731" cy="1938528"/>
+          </a:xfrm>
+          <a:prstGeom prst="roundRect">
+            <a:avLst>
+              <a:gd name="adj" fmla="val 8000"/>
+            </a:avLst>
+          </a:prstGeom>
+          <a:solidFill>
             <a:srgbClr val="FFFFFF"/>
           </a:solidFill>
           <a:ln>
@@ -5765,14 +5216,14 @@
       </p:sp>
       <p:sp>
         <p:nvSpPr>
-          <p:cNvPr id="3" name="Rectangle 2"/>
+          <p:cNvPr id="6" name="Rectangle 5"/>
           <p:cNvSpPr/>
           <p:nvPr/>
         </p:nvSpPr>
         <p:spPr>
           <a:xfrm>
-            <a:off x="0" y="0"/>
-            <a:ext cx="128016" cy="6858000"/>
+            <a:off x="694944" y="1947672"/>
+            <a:ext cx="64008" cy="1426464"/>
           </a:xfrm>
           <a:prstGeom prst="rect">
             <a:avLst/>
@@ -5794,95 +5245,19 @@
       </p:sp>
       <p:sp>
         <p:nvSpPr>
-          <p:cNvPr id="4" name="TextBox 3"/>
-          <p:cNvSpPr txBox="1"/>
-          <p:nvPr/>
-        </p:nvSpPr>
-        <p:spPr>
-          <a:xfrm>
-            <a:off x="566928" y="384048"/>
-            <a:ext cx="9144000" cy="292608"/>
-          </a:xfrm>
-          <a:prstGeom prst="rect">
-            <a:avLst/>
-          </a:prstGeom>
-          <a:noFill/>
-        </p:spPr>
-        <p:txBody>
-          <a:bodyPr wrap="square" lIns="0" rIns="0" tIns="0" bIns="0" anchor="t"/>
-          <a:lstStyle/>
-          <a:p>
-            <a:pPr algn="l">
-              <a:lnSpc>
-                <a:spcPct val="100000"/>
-              </a:lnSpc>
-            </a:pPr>
-            <a:r>
-              <a:rPr sz="1300" b="1">
-                <a:solidFill>
-                  <a:srgbClr val="006BD9"/>
-                </a:solidFill>
-                <a:latin typeface="Noto Sans"/>
-                <a:ea typeface="Noto Sans"/>
-                <a:cs typeface="Noto Sans"/>
-              </a:rPr>
-              <a:t>THE DECK MCP</a:t>
-            </a:r>
-          </a:p>
-        </p:txBody>
-      </p:sp>
-      <p:sp>
-        <p:nvSpPr>
-          <p:cNvPr id="5" name="TextBox 4"/>
-          <p:cNvSpPr txBox="1"/>
-          <p:nvPr/>
-        </p:nvSpPr>
-        <p:spPr>
-          <a:xfrm>
-            <a:off x="566928" y="749808"/>
-            <a:ext cx="10972800" cy="1234440"/>
-          </a:xfrm>
-          <a:prstGeom prst="rect">
-            <a:avLst/>
-          </a:prstGeom>
-          <a:noFill/>
-        </p:spPr>
-        <p:txBody>
-          <a:bodyPr wrap="square" lIns="0" rIns="0" tIns="0" bIns="0" anchor="t"/>
-          <a:lstStyle/>
-          <a:p>
-            <a:pPr algn="l">
-              <a:lnSpc>
-                <a:spcPct val="98000"/>
-              </a:lnSpc>
-            </a:pPr>
-            <a:r>
-              <a:rPr sz="3400" b="0">
-                <a:solidFill>
-                  <a:srgbClr val="151435"/>
-                </a:solidFill>
-                <a:latin typeface="Noto Sans Black"/>
-                <a:ea typeface="Noto Sans Black"/>
-                <a:cs typeface="Noto Sans Black"/>
-              </a:rPr>
-              <a:t>We built the MCP that builds the deck.</a:t>
-            </a:r>
-          </a:p>
-        </p:txBody>
-      </p:sp>
-      <p:sp>
-        <p:nvSpPr>
-          <p:cNvPr id="6" name="Rectangle 5"/>
+          <p:cNvPr id="7" name="Rounded Rectangle 6"/>
           <p:cNvSpPr/>
           <p:nvPr/>
         </p:nvSpPr>
         <p:spPr>
           <a:xfrm>
-            <a:off x="603504" y="2267712"/>
-            <a:ext cx="146304" cy="146304"/>
-          </a:xfrm>
-          <a:prstGeom prst="rect">
-            <a:avLst/>
+            <a:off x="768096" y="1874520"/>
+            <a:ext cx="1207008" cy="292608"/>
+          </a:xfrm>
+          <a:prstGeom prst="roundRect">
+            <a:avLst>
+              <a:gd name="adj" fmla="val 40000"/>
+            </a:avLst>
           </a:prstGeom>
           <a:solidFill>
             <a:srgbClr val="D6FF00"/>
@@ -5892,65 +5267,177 @@
           </a:ln>
         </p:spPr>
         <p:txBody>
-          <a:bodyPr rtlCol="0" anchor="ctr"/>
+          <a:bodyPr rtlCol="0" anchor="ctr" wrap="none"/>
           <a:lstStyle/>
           <a:p>
             <a:pPr algn="ctr"/>
-          </a:p>
-        </p:txBody>
-      </p:sp>
-      <p:sp>
-        <p:nvSpPr>
-          <p:cNvPr id="7" name="TextBox 6"/>
-          <p:cNvSpPr txBox="1"/>
-          <p:nvPr/>
-        </p:nvSpPr>
-        <p:spPr>
-          <a:xfrm>
-            <a:off x="960120" y="2139696"/>
-            <a:ext cx="10424160" cy="658368"/>
-          </a:xfrm>
-          <a:prstGeom prst="rect">
-            <a:avLst/>
-          </a:prstGeom>
-          <a:noFill/>
-        </p:spPr>
-        <p:txBody>
-          <a:bodyPr wrap="square" lIns="0" rIns="0" tIns="0" bIns="0" anchor="t"/>
-          <a:lstStyle/>
-          <a:p>
-            <a:pPr algn="l">
-              <a:lnSpc>
-                <a:spcPct val="105000"/>
-              </a:lnSpc>
-            </a:pPr>
-            <a:r>
-              <a:rPr sz="2000" b="0">
-                <a:solidFill>
-                  <a:srgbClr val="44435D"/>
+            <a:r>
+              <a:rPr sz="1000" b="1">
+                <a:solidFill>
+                  <a:srgbClr val="151435"/>
                 </a:solidFill>
                 <a:latin typeface="Noto Sans"/>
                 <a:ea typeface="Noto Sans"/>
                 <a:cs typeface="Noto Sans"/>
               </a:rPr>
-              <a:t>An agent sends a brief to the locally run Deck MCP.</a:t>
-            </a:r>
-          </a:p>
-        </p:txBody>
-      </p:sp>
-      <p:sp>
-        <p:nvSpPr>
-          <p:cNvPr id="8" name="Rectangle 7"/>
+              <a:t>LIVE EXAMPLE</a:t>
+            </a:r>
+          </a:p>
+        </p:txBody>
+      </p:sp>
+      <p:sp>
+        <p:nvSpPr>
+          <p:cNvPr id="8" name="TextBox 7"/>
+          <p:cNvSpPr txBox="1"/>
+          <p:nvPr/>
+        </p:nvSpPr>
+        <p:spPr>
+          <a:xfrm>
+            <a:off x="768096" y="2313432"/>
+            <a:ext cx="2307259" cy="777240"/>
+          </a:xfrm>
+          <a:prstGeom prst="rect">
+            <a:avLst/>
+          </a:prstGeom>
+          <a:noFill/>
+        </p:spPr>
+        <p:txBody>
+          <a:bodyPr wrap="square" lIns="0" rIns="0" tIns="0" bIns="0" anchor="t"/>
+          <a:lstStyle/>
+          <a:p>
+            <a:pPr algn="l">
+              <a:lnSpc>
+                <a:spcPct val="95000"/>
+              </a:lnSpc>
+            </a:pPr>
+            <a:r>
+              <a:rPr sz="1500" b="0">
+                <a:solidFill>
+                  <a:srgbClr val="151435"/>
+                </a:solidFill>
+                <a:latin typeface="Noto Sans Black"/>
+                <a:ea typeface="Noto Sans Black"/>
+                <a:cs typeface="Noto Sans Black"/>
+              </a:rPr>
+              <a:t>Grant applications</a:t>
+            </a:r>
+          </a:p>
+        </p:txBody>
+      </p:sp>
+      <p:sp>
+        <p:nvSpPr>
+          <p:cNvPr id="9" name="TextBox 8"/>
+          <p:cNvSpPr txBox="1"/>
+          <p:nvPr/>
+        </p:nvSpPr>
+        <p:spPr>
+          <a:xfrm>
+            <a:off x="768096" y="3136392"/>
+            <a:ext cx="2307259" cy="329184"/>
+          </a:xfrm>
+          <a:prstGeom prst="rect">
+            <a:avLst/>
+          </a:prstGeom>
+          <a:noFill/>
+        </p:spPr>
+        <p:txBody>
+          <a:bodyPr wrap="square" lIns="0" rIns="0" tIns="0" bIns="0" anchor="t"/>
+          <a:lstStyle/>
+          <a:p>
+            <a:pPr algn="l">
+              <a:lnSpc>
+                <a:spcPct val="100000"/>
+              </a:lnSpc>
+            </a:pPr>
+            <a:r>
+              <a:rPr sz="1100" b="0">
+                <a:solidFill>
+                  <a:srgbClr val="44435D"/>
+                </a:solidFill>
+                <a:latin typeface="Noto Sans"/>
+                <a:ea typeface="Noto Sans"/>
+                <a:cs typeface="Noto Sans"/>
+              </a:rPr>
+              <a:t>Synthetic application outline</a:t>
+            </a:r>
+          </a:p>
+        </p:txBody>
+      </p:sp>
+      <p:sp>
+        <p:nvSpPr>
+          <p:cNvPr id="10" name="Rounded Rectangle 9"/>
           <p:cNvSpPr/>
           <p:nvPr/>
         </p:nvSpPr>
         <p:spPr>
           <a:xfrm>
-            <a:off x="603504" y="3108960"/>
-            <a:ext cx="146304" cy="146304"/>
-          </a:xfrm>
-          <a:prstGeom prst="rect">
-            <a:avLst/>
+            <a:off x="3367963" y="1691640"/>
+            <a:ext cx="2654731" cy="1938528"/>
+          </a:xfrm>
+          <a:prstGeom prst="roundRect">
+            <a:avLst>
+              <a:gd name="adj" fmla="val 8000"/>
+            </a:avLst>
+          </a:prstGeom>
+          <a:solidFill>
+            <a:srgbClr val="FFFFFF"/>
+          </a:solidFill>
+          <a:ln>
+            <a:noFill/>
+          </a:ln>
+        </p:spPr>
+        <p:txBody>
+          <a:bodyPr rtlCol="0" anchor="ctr"/>
+          <a:lstStyle/>
+          <a:p>
+            <a:pPr algn="ctr"/>
+          </a:p>
+        </p:txBody>
+      </p:sp>
+      <p:sp>
+        <p:nvSpPr>
+          <p:cNvPr id="11" name="Rectangle 10"/>
+          <p:cNvSpPr/>
+          <p:nvPr/>
+        </p:nvSpPr>
+        <p:spPr>
+          <a:xfrm>
+            <a:off x="3495979" y="1947672"/>
+            <a:ext cx="64008" cy="1426464"/>
+          </a:xfrm>
+          <a:prstGeom prst="rect">
+            <a:avLst/>
+          </a:prstGeom>
+          <a:solidFill>
+            <a:srgbClr val="006BD9"/>
+          </a:solidFill>
+          <a:ln>
+            <a:noFill/>
+          </a:ln>
+        </p:spPr>
+        <p:txBody>
+          <a:bodyPr rtlCol="0" anchor="ctr"/>
+          <a:lstStyle/>
+          <a:p>
+            <a:pPr algn="ctr"/>
+          </a:p>
+        </p:txBody>
+      </p:sp>
+      <p:sp>
+        <p:nvSpPr>
+          <p:cNvPr id="12" name="Rounded Rectangle 11"/>
+          <p:cNvSpPr/>
+          <p:nvPr/>
+        </p:nvSpPr>
+        <p:spPr>
+          <a:xfrm>
+            <a:off x="3569131" y="1874520"/>
+            <a:ext cx="1207008" cy="292608"/>
+          </a:xfrm>
+          <a:prstGeom prst="roundRect">
+            <a:avLst>
+              <a:gd name="adj" fmla="val 40000"/>
+            </a:avLst>
           </a:prstGeom>
           <a:solidFill>
             <a:srgbClr val="D6FF00"/>
@@ -5960,65 +5447,177 @@
           </a:ln>
         </p:spPr>
         <p:txBody>
-          <a:bodyPr rtlCol="0" anchor="ctr"/>
+          <a:bodyPr rtlCol="0" anchor="ctr" wrap="none"/>
           <a:lstStyle/>
           <a:p>
             <a:pPr algn="ctr"/>
-          </a:p>
-        </p:txBody>
-      </p:sp>
-      <p:sp>
-        <p:nvSpPr>
-          <p:cNvPr id="9" name="TextBox 8"/>
-          <p:cNvSpPr txBox="1"/>
-          <p:nvPr/>
-        </p:nvSpPr>
-        <p:spPr>
-          <a:xfrm>
-            <a:off x="960120" y="2980944"/>
-            <a:ext cx="10424160" cy="658368"/>
-          </a:xfrm>
-          <a:prstGeom prst="rect">
-            <a:avLst/>
-          </a:prstGeom>
-          <a:noFill/>
-        </p:spPr>
-        <p:txBody>
-          <a:bodyPr wrap="square" lIns="0" rIns="0" tIns="0" bIns="0" anchor="t"/>
-          <a:lstStyle/>
-          <a:p>
-            <a:pPr algn="l">
-              <a:lnSpc>
-                <a:spcPct val="105000"/>
-              </a:lnSpc>
-            </a:pPr>
-            <a:r>
-              <a:rPr sz="2000" b="0">
-                <a:solidFill>
-                  <a:srgbClr val="44435D"/>
+            <a:r>
+              <a:rPr sz="1000" b="1">
+                <a:solidFill>
+                  <a:srgbClr val="151435"/>
                 </a:solidFill>
                 <a:latin typeface="Noto Sans"/>
                 <a:ea typeface="Noto Sans"/>
                 <a:cs typeface="Noto Sans"/>
               </a:rPr>
-              <a:t>build_deck asks the Brand MCP for colour, type, and the wordmark.</a:t>
-            </a:r>
-          </a:p>
-        </p:txBody>
-      </p:sp>
-      <p:sp>
-        <p:nvSpPr>
-          <p:cNvPr id="10" name="Rectangle 9"/>
+              <a:t>LIVE EXAMPLE</a:t>
+            </a:r>
+          </a:p>
+        </p:txBody>
+      </p:sp>
+      <p:sp>
+        <p:nvSpPr>
+          <p:cNvPr id="13" name="TextBox 12"/>
+          <p:cNvSpPr txBox="1"/>
+          <p:nvPr/>
+        </p:nvSpPr>
+        <p:spPr>
+          <a:xfrm>
+            <a:off x="3569131" y="2313432"/>
+            <a:ext cx="2307259" cy="777240"/>
+          </a:xfrm>
+          <a:prstGeom prst="rect">
+            <a:avLst/>
+          </a:prstGeom>
+          <a:noFill/>
+        </p:spPr>
+        <p:txBody>
+          <a:bodyPr wrap="square" lIns="0" rIns="0" tIns="0" bIns="0" anchor="t"/>
+          <a:lstStyle/>
+          <a:p>
+            <a:pPr algn="l">
+              <a:lnSpc>
+                <a:spcPct val="95000"/>
+              </a:lnSpc>
+            </a:pPr>
+            <a:r>
+              <a:rPr sz="1500" b="0">
+                <a:solidFill>
+                  <a:srgbClr val="151435"/>
+                </a:solidFill>
+                <a:latin typeface="Noto Sans Black"/>
+                <a:ea typeface="Noto Sans Black"/>
+                <a:cs typeface="Noto Sans Black"/>
+              </a:rPr>
+              <a:t>Programme reporting</a:t>
+            </a:r>
+          </a:p>
+        </p:txBody>
+      </p:sp>
+      <p:sp>
+        <p:nvSpPr>
+          <p:cNvPr id="14" name="TextBox 13"/>
+          <p:cNvSpPr txBox="1"/>
+          <p:nvPr/>
+        </p:nvSpPr>
+        <p:spPr>
+          <a:xfrm>
+            <a:off x="3569131" y="3136392"/>
+            <a:ext cx="2307259" cy="329184"/>
+          </a:xfrm>
+          <a:prstGeom prst="rect">
+            <a:avLst/>
+          </a:prstGeom>
+          <a:noFill/>
+        </p:spPr>
+        <p:txBody>
+          <a:bodyPr wrap="square" lIns="0" rIns="0" tIns="0" bIns="0" anchor="t"/>
+          <a:lstStyle/>
+          <a:p>
+            <a:pPr algn="l">
+              <a:lnSpc>
+                <a:spcPct val="100000"/>
+              </a:lnSpc>
+            </a:pPr>
+            <a:r>
+              <a:rPr sz="1100" b="0">
+                <a:solidFill>
+                  <a:srgbClr val="44435D"/>
+                </a:solidFill>
+                <a:latin typeface="Noto Sans"/>
+                <a:ea typeface="Noto Sans"/>
+                <a:cs typeface="Noto Sans"/>
+              </a:rPr>
+              <a:t>Synthetic progress analysis</a:t>
+            </a:r>
+          </a:p>
+        </p:txBody>
+      </p:sp>
+      <p:sp>
+        <p:nvSpPr>
+          <p:cNvPr id="15" name="Rounded Rectangle 14"/>
           <p:cNvSpPr/>
           <p:nvPr/>
         </p:nvSpPr>
         <p:spPr>
           <a:xfrm>
-            <a:off x="603504" y="3950208"/>
-            <a:ext cx="146304" cy="146304"/>
-          </a:xfrm>
-          <a:prstGeom prst="rect">
-            <a:avLst/>
+            <a:off x="6168999" y="1691640"/>
+            <a:ext cx="2654731" cy="1938528"/>
+          </a:xfrm>
+          <a:prstGeom prst="roundRect">
+            <a:avLst>
+              <a:gd name="adj" fmla="val 8000"/>
+            </a:avLst>
+          </a:prstGeom>
+          <a:solidFill>
+            <a:srgbClr val="FFFFFF"/>
+          </a:solidFill>
+          <a:ln>
+            <a:noFill/>
+          </a:ln>
+        </p:spPr>
+        <p:txBody>
+          <a:bodyPr rtlCol="0" anchor="ctr"/>
+          <a:lstStyle/>
+          <a:p>
+            <a:pPr algn="ctr"/>
+          </a:p>
+        </p:txBody>
+      </p:sp>
+      <p:sp>
+        <p:nvSpPr>
+          <p:cNvPr id="16" name="Rectangle 15"/>
+          <p:cNvSpPr/>
+          <p:nvPr/>
+        </p:nvSpPr>
+        <p:spPr>
+          <a:xfrm>
+            <a:off x="6297015" y="1947672"/>
+            <a:ext cx="64008" cy="1426464"/>
+          </a:xfrm>
+          <a:prstGeom prst="rect">
+            <a:avLst/>
+          </a:prstGeom>
+          <a:solidFill>
+            <a:srgbClr val="006BD9"/>
+          </a:solidFill>
+          <a:ln>
+            <a:noFill/>
+          </a:ln>
+        </p:spPr>
+        <p:txBody>
+          <a:bodyPr rtlCol="0" anchor="ctr"/>
+          <a:lstStyle/>
+          <a:p>
+            <a:pPr algn="ctr"/>
+          </a:p>
+        </p:txBody>
+      </p:sp>
+      <p:sp>
+        <p:nvSpPr>
+          <p:cNvPr id="17" name="Rounded Rectangle 16"/>
+          <p:cNvSpPr/>
+          <p:nvPr/>
+        </p:nvSpPr>
+        <p:spPr>
+          <a:xfrm>
+            <a:off x="6370167" y="1874520"/>
+            <a:ext cx="1207008" cy="292608"/>
+          </a:xfrm>
+          <a:prstGeom prst="roundRect">
+            <a:avLst>
+              <a:gd name="adj" fmla="val 40000"/>
+            </a:avLst>
           </a:prstGeom>
           <a:solidFill>
             <a:srgbClr val="D6FF00"/>
@@ -6028,65 +5627,177 @@
           </a:ln>
         </p:spPr>
         <p:txBody>
-          <a:bodyPr rtlCol="0" anchor="ctr"/>
+          <a:bodyPr rtlCol="0" anchor="ctr" wrap="none"/>
           <a:lstStyle/>
           <a:p>
             <a:pPr algn="ctr"/>
-          </a:p>
-        </p:txBody>
-      </p:sp>
-      <p:sp>
-        <p:nvSpPr>
-          <p:cNvPr id="11" name="TextBox 10"/>
-          <p:cNvSpPr txBox="1"/>
-          <p:nvPr/>
-        </p:nvSpPr>
-        <p:spPr>
-          <a:xfrm>
-            <a:off x="960120" y="3822192"/>
-            <a:ext cx="10424160" cy="658368"/>
-          </a:xfrm>
-          <a:prstGeom prst="rect">
-            <a:avLst/>
-          </a:prstGeom>
-          <a:noFill/>
-        </p:spPr>
-        <p:txBody>
-          <a:bodyPr wrap="square" lIns="0" rIns="0" tIns="0" bIns="0" anchor="t"/>
-          <a:lstStyle/>
-          <a:p>
-            <a:pPr algn="l">
-              <a:lnSpc>
-                <a:spcPct val="105000"/>
-              </a:lnSpc>
-            </a:pPr>
-            <a:r>
-              <a:rPr sz="2000" b="0">
-                <a:solidFill>
-                  <a:srgbClr val="44435D"/>
+            <a:r>
+              <a:rPr sz="1000" b="1">
+                <a:solidFill>
+                  <a:srgbClr val="151435"/>
                 </a:solidFill>
                 <a:latin typeface="Noto Sans"/>
                 <a:ea typeface="Noto Sans"/>
                 <a:cs typeface="Noto Sans"/>
               </a:rPr>
-              <a:t>The tool returns a 16:9 PowerPoint a person can open and edit.</a:t>
-            </a:r>
-          </a:p>
-        </p:txBody>
-      </p:sp>
-      <p:sp>
-        <p:nvSpPr>
-          <p:cNvPr id="12" name="Rectangle 11"/>
+              <a:t>LIVE EXAMPLE</a:t>
+            </a:r>
+          </a:p>
+        </p:txBody>
+      </p:sp>
+      <p:sp>
+        <p:nvSpPr>
+          <p:cNvPr id="18" name="TextBox 17"/>
+          <p:cNvSpPr txBox="1"/>
+          <p:nvPr/>
+        </p:nvSpPr>
+        <p:spPr>
+          <a:xfrm>
+            <a:off x="6370167" y="2313432"/>
+            <a:ext cx="2307259" cy="777240"/>
+          </a:xfrm>
+          <a:prstGeom prst="rect">
+            <a:avLst/>
+          </a:prstGeom>
+          <a:noFill/>
+        </p:spPr>
+        <p:txBody>
+          <a:bodyPr wrap="square" lIns="0" rIns="0" tIns="0" bIns="0" anchor="t"/>
+          <a:lstStyle/>
+          <a:p>
+            <a:pPr algn="l">
+              <a:lnSpc>
+                <a:spcPct val="95000"/>
+              </a:lnSpc>
+            </a:pPr>
+            <a:r>
+              <a:rPr sz="1500" b="0">
+                <a:solidFill>
+                  <a:srgbClr val="151435"/>
+                </a:solidFill>
+                <a:latin typeface="Noto Sans Black"/>
+                <a:ea typeface="Noto Sans Black"/>
+                <a:cs typeface="Noto Sans Black"/>
+              </a:rPr>
+              <a:t>Governance and approvals</a:t>
+            </a:r>
+          </a:p>
+        </p:txBody>
+      </p:sp>
+      <p:sp>
+        <p:nvSpPr>
+          <p:cNvPr id="19" name="TextBox 18"/>
+          <p:cNvSpPr txBox="1"/>
+          <p:nvPr/>
+        </p:nvSpPr>
+        <p:spPr>
+          <a:xfrm>
+            <a:off x="6370167" y="3136392"/>
+            <a:ext cx="2307259" cy="329184"/>
+          </a:xfrm>
+          <a:prstGeom prst="rect">
+            <a:avLst/>
+          </a:prstGeom>
+          <a:noFill/>
+        </p:spPr>
+        <p:txBody>
+          <a:bodyPr wrap="square" lIns="0" rIns="0" tIns="0" bIns="0" anchor="t"/>
+          <a:lstStyle/>
+          <a:p>
+            <a:pPr algn="l">
+              <a:lnSpc>
+                <a:spcPct val="100000"/>
+              </a:lnSpc>
+            </a:pPr>
+            <a:r>
+              <a:rPr sz="1100" b="0">
+                <a:solidFill>
+                  <a:srgbClr val="44435D"/>
+                </a:solidFill>
+                <a:latin typeface="Noto Sans"/>
+                <a:ea typeface="Noto Sans"/>
+                <a:cs typeface="Noto Sans"/>
+              </a:rPr>
+              <a:t>Advisory release checks</a:t>
+            </a:r>
+          </a:p>
+        </p:txBody>
+      </p:sp>
+      <p:sp>
+        <p:nvSpPr>
+          <p:cNvPr id="20" name="Rounded Rectangle 19"/>
           <p:cNvSpPr/>
           <p:nvPr/>
         </p:nvSpPr>
         <p:spPr>
           <a:xfrm>
-            <a:off x="603504" y="4791456"/>
-            <a:ext cx="146304" cy="146304"/>
-          </a:xfrm>
-          <a:prstGeom prst="rect">
-            <a:avLst/>
+            <a:off x="8970035" y="1691640"/>
+            <a:ext cx="2654731" cy="1938528"/>
+          </a:xfrm>
+          <a:prstGeom prst="roundRect">
+            <a:avLst>
+              <a:gd name="adj" fmla="val 8000"/>
+            </a:avLst>
+          </a:prstGeom>
+          <a:solidFill>
+            <a:srgbClr val="FFFFFF"/>
+          </a:solidFill>
+          <a:ln>
+            <a:noFill/>
+          </a:ln>
+        </p:spPr>
+        <p:txBody>
+          <a:bodyPr rtlCol="0" anchor="ctr"/>
+          <a:lstStyle/>
+          <a:p>
+            <a:pPr algn="ctr"/>
+          </a:p>
+        </p:txBody>
+      </p:sp>
+      <p:sp>
+        <p:nvSpPr>
+          <p:cNvPr id="21" name="Rectangle 20"/>
+          <p:cNvSpPr/>
+          <p:nvPr/>
+        </p:nvSpPr>
+        <p:spPr>
+          <a:xfrm>
+            <a:off x="9098051" y="1947672"/>
+            <a:ext cx="64008" cy="1426464"/>
+          </a:xfrm>
+          <a:prstGeom prst="rect">
+            <a:avLst/>
+          </a:prstGeom>
+          <a:solidFill>
+            <a:srgbClr val="006BD9"/>
+          </a:solidFill>
+          <a:ln>
+            <a:noFill/>
+          </a:ln>
+        </p:spPr>
+        <p:txBody>
+          <a:bodyPr rtlCol="0" anchor="ctr"/>
+          <a:lstStyle/>
+          <a:p>
+            <a:pPr algn="ctr"/>
+          </a:p>
+        </p:txBody>
+      </p:sp>
+      <p:sp>
+        <p:nvSpPr>
+          <p:cNvPr id="22" name="Rounded Rectangle 21"/>
+          <p:cNvSpPr/>
+          <p:nvPr/>
+        </p:nvSpPr>
+        <p:spPr>
+          <a:xfrm>
+            <a:off x="9171203" y="1874520"/>
+            <a:ext cx="1207008" cy="292608"/>
+          </a:xfrm>
+          <a:prstGeom prst="roundRect">
+            <a:avLst>
+              <a:gd name="adj" fmla="val 40000"/>
+            </a:avLst>
           </a:prstGeom>
           <a:solidFill>
             <a:srgbClr val="D6FF00"/>
@@ -6096,62 +5807,73 @@
           </a:ln>
         </p:spPr>
         <p:txBody>
-          <a:bodyPr rtlCol="0" anchor="ctr"/>
+          <a:bodyPr rtlCol="0" anchor="ctr" wrap="none"/>
           <a:lstStyle/>
           <a:p>
             <a:pPr algn="ctr"/>
-          </a:p>
-        </p:txBody>
-      </p:sp>
-      <p:sp>
-        <p:nvSpPr>
-          <p:cNvPr id="13" name="TextBox 12"/>
-          <p:cNvSpPr txBox="1"/>
-          <p:nvPr/>
-        </p:nvSpPr>
-        <p:spPr>
-          <a:xfrm>
-            <a:off x="960120" y="4663440"/>
-            <a:ext cx="10424160" cy="658368"/>
-          </a:xfrm>
-          <a:prstGeom prst="rect">
-            <a:avLst/>
-          </a:prstGeom>
-          <a:noFill/>
-        </p:spPr>
-        <p:txBody>
-          <a:bodyPr wrap="square" lIns="0" rIns="0" tIns="0" bIns="0" anchor="t"/>
-          <a:lstStyle/>
-          <a:p>
-            <a:pPr algn="l">
-              <a:lnSpc>
-                <a:spcPct val="105000"/>
-              </a:lnSpc>
-            </a:pPr>
-            <a:r>
-              <a:rPr sz="2000" b="0">
-                <a:solidFill>
-                  <a:srgbClr val="44435D"/>
+            <a:r>
+              <a:rPr sz="1000" b="1">
+                <a:solidFill>
+                  <a:srgbClr val="151435"/>
                 </a:solidFill>
                 <a:latin typeface="Noto Sans"/>
                 <a:ea typeface="Noto Sans"/>
                 <a:cs typeface="Noto Sans"/>
               </a:rPr>
-              <a:t>The person who presents it still owns every claim on the slide.</a:t>
-            </a:r>
-          </a:p>
-        </p:txBody>
-      </p:sp>
-      <p:sp>
-        <p:nvSpPr>
-          <p:cNvPr id="14" name="TextBox 13"/>
+              <a:t>LIVE EXAMPLE</a:t>
+            </a:r>
+          </a:p>
+        </p:txBody>
+      </p:sp>
+      <p:sp>
+        <p:nvSpPr>
+          <p:cNvPr id="23" name="TextBox 22"/>
           <p:cNvSpPr txBox="1"/>
           <p:nvPr/>
         </p:nvSpPr>
         <p:spPr>
           <a:xfrm>
-            <a:off x="566928" y="6446520"/>
-            <a:ext cx="8778240" cy="256032"/>
+            <a:off x="9171203" y="2313432"/>
+            <a:ext cx="2307259" cy="777240"/>
+          </a:xfrm>
+          <a:prstGeom prst="rect">
+            <a:avLst/>
+          </a:prstGeom>
+          <a:noFill/>
+        </p:spPr>
+        <p:txBody>
+          <a:bodyPr wrap="square" lIns="0" rIns="0" tIns="0" bIns="0" anchor="t"/>
+          <a:lstStyle/>
+          <a:p>
+            <a:pPr algn="l">
+              <a:lnSpc>
+                <a:spcPct val="95000"/>
+              </a:lnSpc>
+            </a:pPr>
+            <a:r>
+              <a:rPr sz="1500" b="0">
+                <a:solidFill>
+                  <a:srgbClr val="151435"/>
+                </a:solidFill>
+                <a:latin typeface="Noto Sans Black"/>
+                <a:ea typeface="Noto Sans Black"/>
+                <a:cs typeface="Noto Sans Black"/>
+              </a:rPr>
+              <a:t>Tool maintenance</a:t>
+            </a:r>
+          </a:p>
+        </p:txBody>
+      </p:sp>
+      <p:sp>
+        <p:nvSpPr>
+          <p:cNvPr id="24" name="TextBox 23"/>
+          <p:cNvSpPr txBox="1"/>
+          <p:nvPr/>
+        </p:nvSpPr>
+        <p:spPr>
+          <a:xfrm>
+            <a:off x="9171203" y="3136392"/>
+            <a:ext cx="2307259" cy="329184"/>
           </a:xfrm>
           <a:prstGeom prst="rect">
             <a:avLst/>
@@ -6176,6 +5898,765 @@
                 <a:ea typeface="Noto Sans"/>
                 <a:cs typeface="Noto Sans"/>
               </a:rPr>
+              <a:t>Synthetic maintenance triage</a:t>
+            </a:r>
+          </a:p>
+        </p:txBody>
+      </p:sp>
+      <p:sp>
+        <p:nvSpPr>
+          <p:cNvPr id="25" name="Rounded Rectangle 24"/>
+          <p:cNvSpPr/>
+          <p:nvPr/>
+        </p:nvSpPr>
+        <p:spPr>
+          <a:xfrm>
+            <a:off x="566928" y="3776472"/>
+            <a:ext cx="2654731" cy="1938528"/>
+          </a:xfrm>
+          <a:prstGeom prst="roundRect">
+            <a:avLst>
+              <a:gd name="adj" fmla="val 8000"/>
+            </a:avLst>
+          </a:prstGeom>
+          <a:solidFill>
+            <a:srgbClr val="FFFFFF"/>
+          </a:solidFill>
+          <a:ln>
+            <a:noFill/>
+          </a:ln>
+        </p:spPr>
+        <p:txBody>
+          <a:bodyPr rtlCol="0" anchor="ctr"/>
+          <a:lstStyle/>
+          <a:p>
+            <a:pPr algn="ctr"/>
+          </a:p>
+        </p:txBody>
+      </p:sp>
+      <p:sp>
+        <p:nvSpPr>
+          <p:cNvPr id="26" name="Rectangle 25"/>
+          <p:cNvSpPr/>
+          <p:nvPr/>
+        </p:nvSpPr>
+        <p:spPr>
+          <a:xfrm>
+            <a:off x="694944" y="4032504"/>
+            <a:ext cx="64008" cy="1426464"/>
+          </a:xfrm>
+          <a:prstGeom prst="rect">
+            <a:avLst/>
+          </a:prstGeom>
+          <a:solidFill>
+            <a:srgbClr val="006BD9"/>
+          </a:solidFill>
+          <a:ln>
+            <a:noFill/>
+          </a:ln>
+        </p:spPr>
+        <p:txBody>
+          <a:bodyPr rtlCol="0" anchor="ctr"/>
+          <a:lstStyle/>
+          <a:p>
+            <a:pPr algn="ctr"/>
+          </a:p>
+        </p:txBody>
+      </p:sp>
+      <p:sp>
+        <p:nvSpPr>
+          <p:cNvPr id="27" name="Rounded Rectangle 26"/>
+          <p:cNvSpPr/>
+          <p:nvPr/>
+        </p:nvSpPr>
+        <p:spPr>
+          <a:xfrm>
+            <a:off x="768096" y="3959352"/>
+            <a:ext cx="1207008" cy="292608"/>
+          </a:xfrm>
+          <a:prstGeom prst="roundRect">
+            <a:avLst>
+              <a:gd name="adj" fmla="val 40000"/>
+            </a:avLst>
+          </a:prstGeom>
+          <a:solidFill>
+            <a:srgbClr val="D6FF00"/>
+          </a:solidFill>
+          <a:ln>
+            <a:noFill/>
+          </a:ln>
+        </p:spPr>
+        <p:txBody>
+          <a:bodyPr rtlCol="0" anchor="ctr" wrap="none"/>
+          <a:lstStyle/>
+          <a:p>
+            <a:pPr algn="ctr"/>
+            <a:r>
+              <a:rPr sz="1000" b="1">
+                <a:solidFill>
+                  <a:srgbClr val="151435"/>
+                </a:solidFill>
+                <a:latin typeface="Noto Sans"/>
+                <a:ea typeface="Noto Sans"/>
+                <a:cs typeface="Noto Sans"/>
+              </a:rPr>
+              <a:t>LIVE EXAMPLE</a:t>
+            </a:r>
+          </a:p>
+        </p:txBody>
+      </p:sp>
+      <p:sp>
+        <p:nvSpPr>
+          <p:cNvPr id="28" name="TextBox 27"/>
+          <p:cNvSpPr txBox="1"/>
+          <p:nvPr/>
+        </p:nvSpPr>
+        <p:spPr>
+          <a:xfrm>
+            <a:off x="768096" y="4398264"/>
+            <a:ext cx="2307259" cy="777240"/>
+          </a:xfrm>
+          <a:prstGeom prst="rect">
+            <a:avLst/>
+          </a:prstGeom>
+          <a:noFill/>
+        </p:spPr>
+        <p:txBody>
+          <a:bodyPr wrap="square" lIns="0" rIns="0" tIns="0" bIns="0" anchor="t"/>
+          <a:lstStyle/>
+          <a:p>
+            <a:pPr algn="l">
+              <a:lnSpc>
+                <a:spcPct val="95000"/>
+              </a:lnSpc>
+            </a:pPr>
+            <a:r>
+              <a:rPr sz="1500" b="0">
+                <a:solidFill>
+                  <a:srgbClr val="151435"/>
+                </a:solidFill>
+                <a:latin typeface="Noto Sans Black"/>
+                <a:ea typeface="Noto Sans Black"/>
+                <a:cs typeface="Noto Sans Black"/>
+              </a:rPr>
+              <a:t>Staff onboarding</a:t>
+            </a:r>
+          </a:p>
+        </p:txBody>
+      </p:sp>
+      <p:sp>
+        <p:nvSpPr>
+          <p:cNvPr id="29" name="TextBox 28"/>
+          <p:cNvSpPr txBox="1"/>
+          <p:nvPr/>
+        </p:nvSpPr>
+        <p:spPr>
+          <a:xfrm>
+            <a:off x="768096" y="5221224"/>
+            <a:ext cx="2307259" cy="329184"/>
+          </a:xfrm>
+          <a:prstGeom prst="rect">
+            <a:avLst/>
+          </a:prstGeom>
+          <a:noFill/>
+        </p:spPr>
+        <p:txBody>
+          <a:bodyPr wrap="square" lIns="0" rIns="0" tIns="0" bIns="0" anchor="t"/>
+          <a:lstStyle/>
+          <a:p>
+            <a:pPr algn="l">
+              <a:lnSpc>
+                <a:spcPct val="100000"/>
+              </a:lnSpc>
+            </a:pPr>
+            <a:r>
+              <a:rPr sz="1100" b="0">
+                <a:solidFill>
+                  <a:srgbClr val="44435D"/>
+                </a:solidFill>
+                <a:latin typeface="Noto Sans"/>
+                <a:ea typeface="Noto Sans"/>
+                <a:cs typeface="Noto Sans"/>
+              </a:rPr>
+              <a:t>Synthetic onboarding plan</a:t>
+            </a:r>
+          </a:p>
+        </p:txBody>
+      </p:sp>
+      <p:sp>
+        <p:nvSpPr>
+          <p:cNvPr id="30" name="Rounded Rectangle 29"/>
+          <p:cNvSpPr/>
+          <p:nvPr/>
+        </p:nvSpPr>
+        <p:spPr>
+          <a:xfrm>
+            <a:off x="3367963" y="3776472"/>
+            <a:ext cx="2654731" cy="1938528"/>
+          </a:xfrm>
+          <a:prstGeom prst="roundRect">
+            <a:avLst>
+              <a:gd name="adj" fmla="val 8000"/>
+            </a:avLst>
+          </a:prstGeom>
+          <a:solidFill>
+            <a:srgbClr val="FFFFFF"/>
+          </a:solidFill>
+          <a:ln>
+            <a:noFill/>
+          </a:ln>
+        </p:spPr>
+        <p:txBody>
+          <a:bodyPr rtlCol="0" anchor="ctr"/>
+          <a:lstStyle/>
+          <a:p>
+            <a:pPr algn="ctr"/>
+          </a:p>
+        </p:txBody>
+      </p:sp>
+      <p:sp>
+        <p:nvSpPr>
+          <p:cNvPr id="31" name="Rectangle 30"/>
+          <p:cNvSpPr/>
+          <p:nvPr/>
+        </p:nvSpPr>
+        <p:spPr>
+          <a:xfrm>
+            <a:off x="3495979" y="4032504"/>
+            <a:ext cx="64008" cy="1426464"/>
+          </a:xfrm>
+          <a:prstGeom prst="rect">
+            <a:avLst/>
+          </a:prstGeom>
+          <a:solidFill>
+            <a:srgbClr val="006BD9"/>
+          </a:solidFill>
+          <a:ln>
+            <a:noFill/>
+          </a:ln>
+        </p:spPr>
+        <p:txBody>
+          <a:bodyPr rtlCol="0" anchor="ctr"/>
+          <a:lstStyle/>
+          <a:p>
+            <a:pPr algn="ctr"/>
+          </a:p>
+        </p:txBody>
+      </p:sp>
+      <p:sp>
+        <p:nvSpPr>
+          <p:cNvPr id="32" name="Rounded Rectangle 31"/>
+          <p:cNvSpPr/>
+          <p:nvPr/>
+        </p:nvSpPr>
+        <p:spPr>
+          <a:xfrm>
+            <a:off x="3569131" y="3959352"/>
+            <a:ext cx="1207008" cy="292608"/>
+          </a:xfrm>
+          <a:prstGeom prst="roundRect">
+            <a:avLst>
+              <a:gd name="adj" fmla="val 40000"/>
+            </a:avLst>
+          </a:prstGeom>
+          <a:solidFill>
+            <a:srgbClr val="D6FF00"/>
+          </a:solidFill>
+          <a:ln>
+            <a:noFill/>
+          </a:ln>
+        </p:spPr>
+        <p:txBody>
+          <a:bodyPr rtlCol="0" anchor="ctr" wrap="none"/>
+          <a:lstStyle/>
+          <a:p>
+            <a:pPr algn="ctr"/>
+            <a:r>
+              <a:rPr sz="1000" b="1">
+                <a:solidFill>
+                  <a:srgbClr val="151435"/>
+                </a:solidFill>
+                <a:latin typeface="Noto Sans"/>
+                <a:ea typeface="Noto Sans"/>
+                <a:cs typeface="Noto Sans"/>
+              </a:rPr>
+              <a:t>LIVE EXAMPLE</a:t>
+            </a:r>
+          </a:p>
+        </p:txBody>
+      </p:sp>
+      <p:sp>
+        <p:nvSpPr>
+          <p:cNvPr id="33" name="TextBox 32"/>
+          <p:cNvSpPr txBox="1"/>
+          <p:nvPr/>
+        </p:nvSpPr>
+        <p:spPr>
+          <a:xfrm>
+            <a:off x="3569131" y="4398264"/>
+            <a:ext cx="2307259" cy="777240"/>
+          </a:xfrm>
+          <a:prstGeom prst="rect">
+            <a:avLst/>
+          </a:prstGeom>
+          <a:noFill/>
+        </p:spPr>
+        <p:txBody>
+          <a:bodyPr wrap="square" lIns="0" rIns="0" tIns="0" bIns="0" anchor="t"/>
+          <a:lstStyle/>
+          <a:p>
+            <a:pPr algn="l">
+              <a:lnSpc>
+                <a:spcPct val="95000"/>
+              </a:lnSpc>
+            </a:pPr>
+            <a:r>
+              <a:rPr sz="1500" b="0">
+                <a:solidFill>
+                  <a:srgbClr val="151435"/>
+                </a:solidFill>
+                <a:latin typeface="Noto Sans Black"/>
+                <a:ea typeface="Noto Sans Black"/>
+                <a:cs typeface="Noto Sans Black"/>
+              </a:rPr>
+              <a:t>Communications</a:t>
+            </a:r>
+          </a:p>
+        </p:txBody>
+      </p:sp>
+      <p:sp>
+        <p:nvSpPr>
+          <p:cNvPr id="34" name="TextBox 33"/>
+          <p:cNvSpPr txBox="1"/>
+          <p:nvPr/>
+        </p:nvSpPr>
+        <p:spPr>
+          <a:xfrm>
+            <a:off x="3569131" y="5221224"/>
+            <a:ext cx="2307259" cy="329184"/>
+          </a:xfrm>
+          <a:prstGeom prst="rect">
+            <a:avLst/>
+          </a:prstGeom>
+          <a:noFill/>
+        </p:spPr>
+        <p:txBody>
+          <a:bodyPr wrap="square" lIns="0" rIns="0" tIns="0" bIns="0" anchor="t"/>
+          <a:lstStyle/>
+          <a:p>
+            <a:pPr algn="l">
+              <a:lnSpc>
+                <a:spcPct val="100000"/>
+              </a:lnSpc>
+            </a:pPr>
+            <a:r>
+              <a:rPr sz="1100" b="0">
+                <a:solidFill>
+                  <a:srgbClr val="44435D"/>
+                </a:solidFill>
+                <a:latin typeface="Noto Sans"/>
+                <a:ea typeface="Noto Sans"/>
+                <a:cs typeface="Noto Sans"/>
+              </a:rPr>
+              <a:t>Synthetic campaign outline</a:t>
+            </a:r>
+          </a:p>
+        </p:txBody>
+      </p:sp>
+      <p:sp>
+        <p:nvSpPr>
+          <p:cNvPr id="35" name="Rounded Rectangle 34"/>
+          <p:cNvSpPr/>
+          <p:nvPr/>
+        </p:nvSpPr>
+        <p:spPr>
+          <a:xfrm>
+            <a:off x="6168999" y="3776472"/>
+            <a:ext cx="2654731" cy="1938528"/>
+          </a:xfrm>
+          <a:prstGeom prst="roundRect">
+            <a:avLst>
+              <a:gd name="adj" fmla="val 8000"/>
+            </a:avLst>
+          </a:prstGeom>
+          <a:solidFill>
+            <a:srgbClr val="FFFFFF"/>
+          </a:solidFill>
+          <a:ln>
+            <a:noFill/>
+          </a:ln>
+        </p:spPr>
+        <p:txBody>
+          <a:bodyPr rtlCol="0" anchor="ctr"/>
+          <a:lstStyle/>
+          <a:p>
+            <a:pPr algn="ctr"/>
+          </a:p>
+        </p:txBody>
+      </p:sp>
+      <p:sp>
+        <p:nvSpPr>
+          <p:cNvPr id="36" name="Rectangle 35"/>
+          <p:cNvSpPr/>
+          <p:nvPr/>
+        </p:nvSpPr>
+        <p:spPr>
+          <a:xfrm>
+            <a:off x="6297015" y="4032504"/>
+            <a:ext cx="64008" cy="1426464"/>
+          </a:xfrm>
+          <a:prstGeom prst="rect">
+            <a:avLst/>
+          </a:prstGeom>
+          <a:solidFill>
+            <a:srgbClr val="006BD9"/>
+          </a:solidFill>
+          <a:ln>
+            <a:noFill/>
+          </a:ln>
+        </p:spPr>
+        <p:txBody>
+          <a:bodyPr rtlCol="0" anchor="ctr"/>
+          <a:lstStyle/>
+          <a:p>
+            <a:pPr algn="ctr"/>
+          </a:p>
+        </p:txBody>
+      </p:sp>
+      <p:sp>
+        <p:nvSpPr>
+          <p:cNvPr id="37" name="Rounded Rectangle 36"/>
+          <p:cNvSpPr/>
+          <p:nvPr/>
+        </p:nvSpPr>
+        <p:spPr>
+          <a:xfrm>
+            <a:off x="6370167" y="3959352"/>
+            <a:ext cx="1207008" cy="292608"/>
+          </a:xfrm>
+          <a:prstGeom prst="roundRect">
+            <a:avLst>
+              <a:gd name="adj" fmla="val 40000"/>
+            </a:avLst>
+          </a:prstGeom>
+          <a:solidFill>
+            <a:srgbClr val="D6FF00"/>
+          </a:solidFill>
+          <a:ln>
+            <a:noFill/>
+          </a:ln>
+        </p:spPr>
+        <p:txBody>
+          <a:bodyPr rtlCol="0" anchor="ctr" wrap="none"/>
+          <a:lstStyle/>
+          <a:p>
+            <a:pPr algn="ctr"/>
+            <a:r>
+              <a:rPr sz="1000" b="1">
+                <a:solidFill>
+                  <a:srgbClr val="151435"/>
+                </a:solidFill>
+                <a:latin typeface="Noto Sans"/>
+                <a:ea typeface="Noto Sans"/>
+                <a:cs typeface="Noto Sans"/>
+              </a:rPr>
+              <a:t>LIVE EXAMPLE</a:t>
+            </a:r>
+          </a:p>
+        </p:txBody>
+      </p:sp>
+      <p:sp>
+        <p:nvSpPr>
+          <p:cNvPr id="38" name="TextBox 37"/>
+          <p:cNvSpPr txBox="1"/>
+          <p:nvPr/>
+        </p:nvSpPr>
+        <p:spPr>
+          <a:xfrm>
+            <a:off x="6370167" y="4398264"/>
+            <a:ext cx="2307259" cy="777240"/>
+          </a:xfrm>
+          <a:prstGeom prst="rect">
+            <a:avLst/>
+          </a:prstGeom>
+          <a:noFill/>
+        </p:spPr>
+        <p:txBody>
+          <a:bodyPr wrap="square" lIns="0" rIns="0" tIns="0" bIns="0" anchor="t"/>
+          <a:lstStyle/>
+          <a:p>
+            <a:pPr algn="l">
+              <a:lnSpc>
+                <a:spcPct val="95000"/>
+              </a:lnSpc>
+            </a:pPr>
+            <a:r>
+              <a:rPr sz="1500" b="0">
+                <a:solidFill>
+                  <a:srgbClr val="151435"/>
+                </a:solidFill>
+                <a:latin typeface="Noto Sans Black"/>
+                <a:ea typeface="Noto Sans Black"/>
+                <a:cs typeface="Noto Sans Black"/>
+              </a:rPr>
+              <a:t>Developer standards</a:t>
+            </a:r>
+          </a:p>
+        </p:txBody>
+      </p:sp>
+      <p:sp>
+        <p:nvSpPr>
+          <p:cNvPr id="39" name="TextBox 38"/>
+          <p:cNvSpPr txBox="1"/>
+          <p:nvPr/>
+        </p:nvSpPr>
+        <p:spPr>
+          <a:xfrm>
+            <a:off x="6370167" y="5221224"/>
+            <a:ext cx="2307259" cy="329184"/>
+          </a:xfrm>
+          <a:prstGeom prst="rect">
+            <a:avLst/>
+          </a:prstGeom>
+          <a:noFill/>
+        </p:spPr>
+        <p:txBody>
+          <a:bodyPr wrap="square" lIns="0" rIns="0" tIns="0" bIns="0" anchor="t"/>
+          <a:lstStyle/>
+          <a:p>
+            <a:pPr algn="l">
+              <a:lnSpc>
+                <a:spcPct val="100000"/>
+              </a:lnSpc>
+            </a:pPr>
+            <a:r>
+              <a:rPr sz="1100" b="0">
+                <a:solidFill>
+                  <a:srgbClr val="44435D"/>
+                </a:solidFill>
+                <a:latin typeface="Noto Sans"/>
+                <a:ea typeface="Noto Sans"/>
+                <a:cs typeface="Noto Sans"/>
+              </a:rPr>
+              <a:t>Advisory development checks</a:t>
+            </a:r>
+          </a:p>
+        </p:txBody>
+      </p:sp>
+      <p:sp>
+        <p:nvSpPr>
+          <p:cNvPr id="40" name="Rounded Rectangle 39"/>
+          <p:cNvSpPr/>
+          <p:nvPr/>
+        </p:nvSpPr>
+        <p:spPr>
+          <a:xfrm>
+            <a:off x="8970035" y="3776472"/>
+            <a:ext cx="2654731" cy="1938528"/>
+          </a:xfrm>
+          <a:prstGeom prst="roundRect">
+            <a:avLst>
+              <a:gd name="adj" fmla="val 8000"/>
+            </a:avLst>
+          </a:prstGeom>
+          <a:solidFill>
+            <a:srgbClr val="FFFFFF"/>
+          </a:solidFill>
+          <a:ln>
+            <a:noFill/>
+          </a:ln>
+        </p:spPr>
+        <p:txBody>
+          <a:bodyPr rtlCol="0" anchor="ctr"/>
+          <a:lstStyle/>
+          <a:p>
+            <a:pPr algn="ctr"/>
+          </a:p>
+        </p:txBody>
+      </p:sp>
+      <p:sp>
+        <p:nvSpPr>
+          <p:cNvPr id="41" name="Rectangle 40"/>
+          <p:cNvSpPr/>
+          <p:nvPr/>
+        </p:nvSpPr>
+        <p:spPr>
+          <a:xfrm>
+            <a:off x="9098051" y="4032504"/>
+            <a:ext cx="64008" cy="1426464"/>
+          </a:xfrm>
+          <a:prstGeom prst="rect">
+            <a:avLst/>
+          </a:prstGeom>
+          <a:solidFill>
+            <a:srgbClr val="006BD9"/>
+          </a:solidFill>
+          <a:ln>
+            <a:noFill/>
+          </a:ln>
+        </p:spPr>
+        <p:txBody>
+          <a:bodyPr rtlCol="0" anchor="ctr"/>
+          <a:lstStyle/>
+          <a:p>
+            <a:pPr algn="ctr"/>
+          </a:p>
+        </p:txBody>
+      </p:sp>
+      <p:sp>
+        <p:nvSpPr>
+          <p:cNvPr id="42" name="Rounded Rectangle 41"/>
+          <p:cNvSpPr/>
+          <p:nvPr/>
+        </p:nvSpPr>
+        <p:spPr>
+          <a:xfrm>
+            <a:off x="9171203" y="3959352"/>
+            <a:ext cx="1207008" cy="292608"/>
+          </a:xfrm>
+          <a:prstGeom prst="roundRect">
+            <a:avLst>
+              <a:gd name="adj" fmla="val 40000"/>
+            </a:avLst>
+          </a:prstGeom>
+          <a:solidFill>
+            <a:srgbClr val="D6FF00"/>
+          </a:solidFill>
+          <a:ln>
+            <a:noFill/>
+          </a:ln>
+        </p:spPr>
+        <p:txBody>
+          <a:bodyPr rtlCol="0" anchor="ctr" wrap="none"/>
+          <a:lstStyle/>
+          <a:p>
+            <a:pPr algn="ctr"/>
+            <a:r>
+              <a:rPr sz="1000" b="1">
+                <a:solidFill>
+                  <a:srgbClr val="151435"/>
+                </a:solidFill>
+                <a:latin typeface="Noto Sans"/>
+                <a:ea typeface="Noto Sans"/>
+                <a:cs typeface="Noto Sans"/>
+              </a:rPr>
+              <a:t>LIVE EXAMPLE</a:t>
+            </a:r>
+          </a:p>
+        </p:txBody>
+      </p:sp>
+      <p:sp>
+        <p:nvSpPr>
+          <p:cNvPr id="43" name="TextBox 42"/>
+          <p:cNvSpPr txBox="1"/>
+          <p:nvPr/>
+        </p:nvSpPr>
+        <p:spPr>
+          <a:xfrm>
+            <a:off x="9171203" y="4398264"/>
+            <a:ext cx="2307259" cy="777240"/>
+          </a:xfrm>
+          <a:prstGeom prst="rect">
+            <a:avLst/>
+          </a:prstGeom>
+          <a:noFill/>
+        </p:spPr>
+        <p:txBody>
+          <a:bodyPr wrap="square" lIns="0" rIns="0" tIns="0" bIns="0" anchor="t"/>
+          <a:lstStyle/>
+          <a:p>
+            <a:pPr algn="l">
+              <a:lnSpc>
+                <a:spcPct val="95000"/>
+              </a:lnSpc>
+            </a:pPr>
+            <a:r>
+              <a:rPr sz="1500" b="0">
+                <a:solidFill>
+                  <a:srgbClr val="151435"/>
+                </a:solidFill>
+                <a:latin typeface="Noto Sans Black"/>
+                <a:ea typeface="Noto Sans Black"/>
+                <a:cs typeface="Noto Sans Black"/>
+              </a:rPr>
+              <a:t>Organisational learning</a:t>
+            </a:r>
+          </a:p>
+        </p:txBody>
+      </p:sp>
+      <p:sp>
+        <p:nvSpPr>
+          <p:cNvPr id="44" name="TextBox 43"/>
+          <p:cNvSpPr txBox="1"/>
+          <p:nvPr/>
+        </p:nvSpPr>
+        <p:spPr>
+          <a:xfrm>
+            <a:off x="9171203" y="5221224"/>
+            <a:ext cx="2307259" cy="329184"/>
+          </a:xfrm>
+          <a:prstGeom prst="rect">
+            <a:avLst/>
+          </a:prstGeom>
+          <a:noFill/>
+        </p:spPr>
+        <p:txBody>
+          <a:bodyPr wrap="square" lIns="0" rIns="0" tIns="0" bIns="0" anchor="t"/>
+          <a:lstStyle/>
+          <a:p>
+            <a:pPr algn="l">
+              <a:lnSpc>
+                <a:spcPct val="100000"/>
+              </a:lnSpc>
+            </a:pPr>
+            <a:r>
+              <a:rPr sz="1100" b="0">
+                <a:solidFill>
+                  <a:srgbClr val="44435D"/>
+                </a:solidFill>
+                <a:latin typeface="Noto Sans"/>
+                <a:ea typeface="Noto Sans"/>
+                <a:cs typeface="Noto Sans"/>
+              </a:rPr>
+              <a:t>Synthetic learning retrieval</a:t>
+            </a:r>
+          </a:p>
+        </p:txBody>
+      </p:sp>
+      <p:sp>
+        <p:nvSpPr>
+          <p:cNvPr id="45" name="TextBox 44"/>
+          <p:cNvSpPr txBox="1"/>
+          <p:nvPr/>
+        </p:nvSpPr>
+        <p:spPr>
+          <a:xfrm>
+            <a:off x="566928" y="6446520"/>
+            <a:ext cx="8778240" cy="256032"/>
+          </a:xfrm>
+          <a:prstGeom prst="rect">
+            <a:avLst/>
+          </a:prstGeom>
+          <a:noFill/>
+        </p:spPr>
+        <p:txBody>
+          <a:bodyPr wrap="square" lIns="0" rIns="0" tIns="0" bIns="0" anchor="t"/>
+          <a:lstStyle/>
+          <a:p>
+            <a:pPr algn="l">
+              <a:lnSpc>
+                <a:spcPct val="100000"/>
+              </a:lnSpc>
+            </a:pPr>
+            <a:r>
+              <a:rPr sz="1100" b="0">
+                <a:solidFill>
+                  <a:srgbClr val="44435D"/>
+                </a:solidFill>
+                <a:latin typeface="Noto Sans"/>
+                <a:ea typeface="Noto Sans"/>
+                <a:cs typeface="Noto Sans"/>
+              </a:rPr>
               <a:t>Independent Wetland project  ·  Not official WaterAid guidance</a:t>
             </a:r>
           </a:p>
@@ -6183,7 +6664,7 @@
       </p:sp>
       <p:sp>
         <p:nvSpPr>
-          <p:cNvPr id="15" name="TextBox 14"/>
+          <p:cNvPr id="46" name="TextBox 45"/>
           <p:cNvSpPr txBox="1"/>
           <p:nvPr/>
         </p:nvSpPr>
@@ -6215,7 +6696,7 @@
                 <a:ea typeface="Noto Sans"/>
                 <a:cs typeface="Noto Sans"/>
               </a:rPr>
-              <a:t>05  /  08</a:t>
+              <a:t>05  /  10</a:t>
             </a:r>
           </a:p>
         </p:txBody>
@@ -6276,7 +6757,7 @@
         <p:spPr>
           <a:xfrm>
             <a:off x="0" y="0"/>
-            <a:ext cx="12191695" cy="128016"/>
+            <a:ext cx="128016" cy="6858000"/>
           </a:xfrm>
           <a:prstGeom prst="rect">
             <a:avLst/>
@@ -6330,7 +6811,7 @@
                 <a:ea typeface="Noto Sans"/>
                 <a:cs typeface="Noto Sans"/>
               </a:rPr>
-              <a:t>THIS FILE</a:t>
+              <a:t>CONNECTING THE EXAMPLES</a:t>
             </a:r>
           </a:p>
         </p:txBody>
@@ -6343,8 +6824,8 @@
         </p:nvSpPr>
         <p:spPr>
           <a:xfrm>
-            <a:off x="566928" y="768096"/>
-            <a:ext cx="10972800" cy="1097280"/>
+            <a:off x="566928" y="749808"/>
+            <a:ext cx="10972800" cy="1234440"/>
           </a:xfrm>
           <a:prstGeom prst="rect">
             <a:avLst/>
@@ -6357,11 +6838,11 @@
           <a:p>
             <a:pPr algn="l">
               <a:lnSpc>
-                <a:spcPct val="100000"/>
+                <a:spcPct val="98000"/>
               </a:lnSpc>
             </a:pPr>
             <a:r>
-              <a:rPr sz="3600" b="0">
+              <a:rPr sz="3400" b="0">
                 <a:solidFill>
                   <a:srgbClr val="151435"/>
                 </a:solidFill>
@@ -6369,52 +6850,21 @@
                 <a:ea typeface="Noto Sans Black"/>
                 <a:cs typeface="Noto Sans Black"/>
               </a:rPr>
-              <a:t>You are looking at an MCP output.</a:t>
-            </a:r>
-          </a:p>
-        </p:txBody>
-      </p:sp>
-      <p:sp>
-        <p:nvSpPr>
-          <p:cNvPr id="6" name="Rounded Rectangle 5"/>
+              <a:t>Choose a scoped endpoint or connect all eight</a:t>
+            </a:r>
+          </a:p>
+        </p:txBody>
+      </p:sp>
+      <p:sp>
+        <p:nvSpPr>
+          <p:cNvPr id="6" name="Rectangle 5"/>
           <p:cNvSpPr/>
           <p:nvPr/>
         </p:nvSpPr>
         <p:spPr>
           <a:xfrm>
-            <a:off x="566928" y="2331720"/>
-            <a:ext cx="3551834" cy="2880360"/>
-          </a:xfrm>
-          <a:prstGeom prst="roundRect">
-            <a:avLst>
-              <a:gd name="adj" fmla="val 6000"/>
-            </a:avLst>
-          </a:prstGeom>
-          <a:solidFill>
-            <a:srgbClr val="F8F0E4"/>
-          </a:solidFill>
-          <a:ln>
-            <a:noFill/>
-          </a:ln>
-        </p:spPr>
-        <p:txBody>
-          <a:bodyPr rtlCol="0" anchor="ctr"/>
-          <a:lstStyle/>
-          <a:p>
-            <a:pPr algn="ctr"/>
-          </a:p>
-        </p:txBody>
-      </p:sp>
-      <p:sp>
-        <p:nvSpPr>
-          <p:cNvPr id="7" name="Rectangle 6"/>
-          <p:cNvSpPr/>
-          <p:nvPr/>
-        </p:nvSpPr>
-        <p:spPr>
-          <a:xfrm>
-            <a:off x="731520" y="2478024"/>
-            <a:ext cx="3222650" cy="73152"/>
+            <a:off x="603504" y="2267712"/>
+            <a:ext cx="146304" cy="146304"/>
           </a:xfrm>
           <a:prstGeom prst="rect">
             <a:avLst/>
@@ -6436,14 +6886,14 @@
       </p:sp>
       <p:sp>
         <p:nvSpPr>
-          <p:cNvPr id="8" name="TextBox 7"/>
+          <p:cNvPr id="7" name="TextBox 6"/>
           <p:cNvSpPr txBox="1"/>
           <p:nvPr/>
         </p:nvSpPr>
         <p:spPr>
           <a:xfrm>
-            <a:off x="822960" y="2624327"/>
-            <a:ext cx="3094634" cy="640080"/>
+            <a:off x="960120" y="2139696"/>
+            <a:ext cx="10424160" cy="658368"/>
           </a:xfrm>
           <a:prstGeom prst="rect">
             <a:avLst/>
@@ -6456,89 +6906,11 @@
           <a:p>
             <a:pPr algn="l">
               <a:lnSpc>
-                <a:spcPct val="100000"/>
+                <a:spcPct val="105000"/>
               </a:lnSpc>
             </a:pPr>
             <a:r>
-              <a:rPr sz="2800" b="0">
-                <a:solidFill>
-                  <a:srgbClr val="006BD9"/>
-                </a:solidFill>
-                <a:latin typeface="Noto Sans Black"/>
-                <a:ea typeface="Noto Sans Black"/>
-                <a:cs typeface="Noto Sans Black"/>
-              </a:rPr>
-              <a:t>01</a:t>
-            </a:r>
-          </a:p>
-        </p:txBody>
-      </p:sp>
-      <p:sp>
-        <p:nvSpPr>
-          <p:cNvPr id="9" name="TextBox 8"/>
-          <p:cNvSpPr txBox="1"/>
-          <p:nvPr/>
-        </p:nvSpPr>
-        <p:spPr>
-          <a:xfrm>
-            <a:off x="822960" y="3383279"/>
-            <a:ext cx="3094634" cy="640080"/>
-          </a:xfrm>
-          <a:prstGeom prst="rect">
-            <a:avLst/>
-          </a:prstGeom>
-          <a:noFill/>
-        </p:spPr>
-        <p:txBody>
-          <a:bodyPr wrap="square" lIns="0" rIns="0" tIns="0" bIns="0" anchor="t"/>
-          <a:lstStyle/>
-          <a:p>
-            <a:pPr algn="l">
-              <a:lnSpc>
-                <a:spcPct val="100000"/>
-              </a:lnSpc>
-            </a:pPr>
-            <a:r>
               <a:rPr sz="2000" b="0">
-                <a:solidFill>
-                  <a:srgbClr val="151435"/>
-                </a:solidFill>
-                <a:latin typeface="Noto Sans Black"/>
-                <a:ea typeface="Noto Sans Black"/>
-                <a:cs typeface="Noto Sans Black"/>
-              </a:rPr>
-              <a:t>Read the hub</a:t>
-            </a:r>
-          </a:p>
-        </p:txBody>
-      </p:sp>
-      <p:sp>
-        <p:nvSpPr>
-          <p:cNvPr id="10" name="TextBox 9"/>
-          <p:cNvSpPr txBox="1"/>
-          <p:nvPr/>
-        </p:nvSpPr>
-        <p:spPr>
-          <a:xfrm>
-            <a:off x="822960" y="4114800"/>
-            <a:ext cx="3039770" cy="1188720"/>
-          </a:xfrm>
-          <a:prstGeom prst="rect">
-            <a:avLst/>
-          </a:prstGeom>
-          <a:noFill/>
-        </p:spPr>
-        <p:txBody>
-          <a:bodyPr wrap="square" lIns="0" rIns="0" tIns="0" bIns="0" anchor="t"/>
-          <a:lstStyle/>
-          <a:p>
-            <a:pPr algn="l">
-              <a:lnSpc>
-                <a:spcPct val="112000"/>
-              </a:lnSpc>
-            </a:pPr>
-            <a:r>
-              <a:rPr sz="1500" b="0">
                 <a:solidFill>
                   <a:srgbClr val="44435D"/>
                 </a:solidFill>
@@ -6546,52 +6918,21 @@
                 <a:ea typeface="Noto Sans"/>
                 <a:cs typeface="Noto Sans"/>
               </a:rPr>
-              <a:t>Find capabilities, demo links and connection instructions in Wetland.</a:t>
-            </a:r>
-          </a:p>
-        </p:txBody>
-      </p:sp>
-      <p:sp>
-        <p:nvSpPr>
-          <p:cNvPr id="11" name="Rounded Rectangle 10"/>
+              <a:t>One hosted Examples MCP: each /mcp/&lt;scope&gt; exposes one capability; /mcp exposes all eight.</a:t>
+            </a:r>
+          </a:p>
+        </p:txBody>
+      </p:sp>
+      <p:sp>
+        <p:nvSpPr>
+          <p:cNvPr id="8" name="Rectangle 7"/>
           <p:cNvSpPr/>
           <p:nvPr/>
         </p:nvSpPr>
         <p:spPr>
           <a:xfrm>
-            <a:off x="4319930" y="2331720"/>
-            <a:ext cx="3551834" cy="2880360"/>
-          </a:xfrm>
-          <a:prstGeom prst="roundRect">
-            <a:avLst>
-              <a:gd name="adj" fmla="val 6000"/>
-            </a:avLst>
-          </a:prstGeom>
-          <a:solidFill>
-            <a:srgbClr val="F8F0E4"/>
-          </a:solidFill>
-          <a:ln>
-            <a:noFill/>
-          </a:ln>
-        </p:spPr>
-        <p:txBody>
-          <a:bodyPr rtlCol="0" anchor="ctr"/>
-          <a:lstStyle/>
-          <a:p>
-            <a:pPr algn="ctr"/>
-          </a:p>
-        </p:txBody>
-      </p:sp>
-      <p:sp>
-        <p:nvSpPr>
-          <p:cNvPr id="12" name="Rectangle 11"/>
-          <p:cNvSpPr/>
-          <p:nvPr/>
-        </p:nvSpPr>
-        <p:spPr>
-          <a:xfrm>
-            <a:off x="4484522" y="2478024"/>
-            <a:ext cx="3222650" cy="73152"/>
+            <a:off x="603504" y="3108960"/>
+            <a:ext cx="146304" cy="146304"/>
           </a:xfrm>
           <a:prstGeom prst="rect">
             <a:avLst/>
@@ -6613,14 +6954,14 @@
       </p:sp>
       <p:sp>
         <p:nvSpPr>
-          <p:cNvPr id="13" name="TextBox 12"/>
+          <p:cNvPr id="9" name="TextBox 8"/>
           <p:cNvSpPr txBox="1"/>
           <p:nvPr/>
         </p:nvSpPr>
         <p:spPr>
           <a:xfrm>
-            <a:off x="4575962" y="2624327"/>
-            <a:ext cx="3094634" cy="640080"/>
+            <a:off x="960120" y="2980944"/>
+            <a:ext cx="10424160" cy="658368"/>
           </a:xfrm>
           <a:prstGeom prst="rect">
             <a:avLst/>
@@ -6633,89 +6974,11 @@
           <a:p>
             <a:pPr algn="l">
               <a:lnSpc>
-                <a:spcPct val="100000"/>
+                <a:spcPct val="105000"/>
               </a:lnSpc>
             </a:pPr>
             <a:r>
-              <a:rPr sz="2800" b="0">
-                <a:solidFill>
-                  <a:srgbClr val="006BD9"/>
-                </a:solidFill>
-                <a:latin typeface="Noto Sans Black"/>
-                <a:ea typeface="Noto Sans Black"/>
-                <a:cs typeface="Noto Sans Black"/>
-              </a:rPr>
-              <a:t>02</a:t>
-            </a:r>
-          </a:p>
-        </p:txBody>
-      </p:sp>
-      <p:sp>
-        <p:nvSpPr>
-          <p:cNvPr id="14" name="TextBox 13"/>
-          <p:cNvSpPr txBox="1"/>
-          <p:nvPr/>
-        </p:nvSpPr>
-        <p:spPr>
-          <a:xfrm>
-            <a:off x="4575962" y="3383279"/>
-            <a:ext cx="3094634" cy="640080"/>
-          </a:xfrm>
-          <a:prstGeom prst="rect">
-            <a:avLst/>
-          </a:prstGeom>
-          <a:noFill/>
-        </p:spPr>
-        <p:txBody>
-          <a:bodyPr wrap="square" lIns="0" rIns="0" tIns="0" bIns="0" anchor="t"/>
-          <a:lstStyle/>
-          <a:p>
-            <a:pPr algn="l">
-              <a:lnSpc>
-                <a:spcPct val="100000"/>
-              </a:lnSpc>
-            </a:pPr>
-            <a:r>
               <a:rPr sz="2000" b="0">
-                <a:solidFill>
-                  <a:srgbClr val="151435"/>
-                </a:solidFill>
-                <a:latin typeface="Noto Sans Black"/>
-                <a:ea typeface="Noto Sans Black"/>
-                <a:cs typeface="Noto Sans Black"/>
-              </a:rPr>
-              <a:t>Read the brand</a:t>
-            </a:r>
-          </a:p>
-        </p:txBody>
-      </p:sp>
-      <p:sp>
-        <p:nvSpPr>
-          <p:cNvPr id="15" name="TextBox 14"/>
-          <p:cNvSpPr txBox="1"/>
-          <p:nvPr/>
-        </p:nvSpPr>
-        <p:spPr>
-          <a:xfrm>
-            <a:off x="4575962" y="4114800"/>
-            <a:ext cx="3039770" cy="1188720"/>
-          </a:xfrm>
-          <a:prstGeom prst="rect">
-            <a:avLst/>
-          </a:prstGeom>
-          <a:noFill/>
-        </p:spPr>
-        <p:txBody>
-          <a:bodyPr wrap="square" lIns="0" rIns="0" tIns="0" bIns="0" anchor="t"/>
-          <a:lstStyle/>
-          <a:p>
-            <a:pPr algn="l">
-              <a:lnSpc>
-                <a:spcPct val="112000"/>
-              </a:lnSpc>
-            </a:pPr>
-            <a:r>
-              <a:rPr sz="1500" b="0">
                 <a:solidFill>
                   <a:srgbClr val="44435D"/>
                 </a:solidFill>
@@ -6723,52 +6986,21 @@
                 <a:ea typeface="Noto Sans"/>
                 <a:cs typeface="Noto Sans"/>
               </a:rPr>
-              <a:t>Colour, Noto Sans, and the white wordmark came from the live Brand MCP.</a:t>
-            </a:r>
-          </a:p>
-        </p:txBody>
-      </p:sp>
-      <p:sp>
-        <p:nvSpPr>
-          <p:cNvPr id="16" name="Rounded Rectangle 15"/>
+              <a:t>The examples return synthetic evidence, outlines and advisory checks.</a:t>
+            </a:r>
+          </a:p>
+        </p:txBody>
+      </p:sp>
+      <p:sp>
+        <p:nvSpPr>
+          <p:cNvPr id="10" name="Rectangle 9"/>
           <p:cNvSpPr/>
           <p:nvPr/>
         </p:nvSpPr>
         <p:spPr>
           <a:xfrm>
-            <a:off x="8072932" y="2331720"/>
-            <a:ext cx="3551834" cy="2880360"/>
-          </a:xfrm>
-          <a:prstGeom prst="roundRect">
-            <a:avLst>
-              <a:gd name="adj" fmla="val 6000"/>
-            </a:avLst>
-          </a:prstGeom>
-          <a:solidFill>
-            <a:srgbClr val="F8F0E4"/>
-          </a:solidFill>
-          <a:ln>
-            <a:noFill/>
-          </a:ln>
-        </p:spPr>
-        <p:txBody>
-          <a:bodyPr rtlCol="0" anchor="ctr"/>
-          <a:lstStyle/>
-          <a:p>
-            <a:pPr algn="ctr"/>
-          </a:p>
-        </p:txBody>
-      </p:sp>
-      <p:sp>
-        <p:nvSpPr>
-          <p:cNvPr id="17" name="Rectangle 16"/>
-          <p:cNvSpPr/>
-          <p:nvPr/>
-        </p:nvSpPr>
-        <p:spPr>
-          <a:xfrm>
-            <a:off x="8237524" y="2478024"/>
-            <a:ext cx="3222650" cy="73152"/>
+            <a:off x="603504" y="3950208"/>
+            <a:ext cx="146304" cy="146304"/>
           </a:xfrm>
           <a:prstGeom prst="rect">
             <a:avLst/>
@@ -6790,14 +7022,121 @@
       </p:sp>
       <p:sp>
         <p:nvSpPr>
-          <p:cNvPr id="18" name="TextBox 17"/>
+          <p:cNvPr id="11" name="TextBox 10"/>
           <p:cNvSpPr txBox="1"/>
           <p:nvPr/>
         </p:nvSpPr>
         <p:spPr>
           <a:xfrm>
-            <a:off x="8328964" y="2624327"/>
-            <a:ext cx="3094634" cy="640080"/>
+            <a:off x="960120" y="3822192"/>
+            <a:ext cx="10424160" cy="658368"/>
+          </a:xfrm>
+          <a:prstGeom prst="rect">
+            <a:avLst/>
+          </a:prstGeom>
+          <a:noFill/>
+        </p:spPr>
+        <p:txBody>
+          <a:bodyPr wrap="square" lIns="0" rIns="0" tIns="0" bIns="0" anchor="t"/>
+          <a:lstStyle/>
+          <a:p>
+            <a:pPr algn="l">
+              <a:lnSpc>
+                <a:spcPct val="105000"/>
+              </a:lnSpc>
+            </a:pPr>
+            <a:r>
+              <a:rPr sz="2000" b="0">
+                <a:solidFill>
+                  <a:srgbClr val="44435D"/>
+                </a:solidFill>
+                <a:latin typeface="Noto Sans"/>
+                <a:ea typeface="Noto Sans"/>
+                <a:cs typeface="Noto Sans"/>
+              </a:rPr>
+              <a:t>They cannot grant approvals, change systems or generate finished branded reports.</a:t>
+            </a:r>
+          </a:p>
+        </p:txBody>
+      </p:sp>
+      <p:sp>
+        <p:nvSpPr>
+          <p:cNvPr id="12" name="Rectangle 11"/>
+          <p:cNvSpPr/>
+          <p:nvPr/>
+        </p:nvSpPr>
+        <p:spPr>
+          <a:xfrm>
+            <a:off x="603504" y="4791456"/>
+            <a:ext cx="146304" cy="146304"/>
+          </a:xfrm>
+          <a:prstGeom prst="rect">
+            <a:avLst/>
+          </a:prstGeom>
+          <a:solidFill>
+            <a:srgbClr val="D6FF00"/>
+          </a:solidFill>
+          <a:ln>
+            <a:noFill/>
+          </a:ln>
+        </p:spPr>
+        <p:txBody>
+          <a:bodyPr rtlCol="0" anchor="ctr"/>
+          <a:lstStyle/>
+          <a:p>
+            <a:pPr algn="ctr"/>
+          </a:p>
+        </p:txBody>
+      </p:sp>
+      <p:sp>
+        <p:nvSpPr>
+          <p:cNvPr id="13" name="TextBox 12"/>
+          <p:cNvSpPr txBox="1"/>
+          <p:nvPr/>
+        </p:nvSpPr>
+        <p:spPr>
+          <a:xfrm>
+            <a:off x="960120" y="4663440"/>
+            <a:ext cx="10424160" cy="658368"/>
+          </a:xfrm>
+          <a:prstGeom prst="rect">
+            <a:avLst/>
+          </a:prstGeom>
+          <a:noFill/>
+        </p:spPr>
+        <p:txBody>
+          <a:bodyPr wrap="square" lIns="0" rIns="0" tIns="0" bIns="0" anchor="t"/>
+          <a:lstStyle/>
+          <a:p>
+            <a:pPr algn="l">
+              <a:lnSpc>
+                <a:spcPct val="105000"/>
+              </a:lnSpc>
+            </a:pPr>
+            <a:r>
+              <a:rPr sz="2000" b="0">
+                <a:solidFill>
+                  <a:srgbClr val="44435D"/>
+                </a:solidFill>
+                <a:latin typeface="Noto Sans"/>
+                <a:ea typeface="Noto Sans"/>
+                <a:cs typeface="Noto Sans"/>
+              </a:rPr>
+              <a:t>IT must configure the Copilot connection; pasting the URL into a prompt does not connect tools.</a:t>
+            </a:r>
+          </a:p>
+        </p:txBody>
+      </p:sp>
+      <p:sp>
+        <p:nvSpPr>
+          <p:cNvPr id="14" name="TextBox 13"/>
+          <p:cNvSpPr txBox="1"/>
+          <p:nvPr/>
+        </p:nvSpPr>
+        <p:spPr>
+          <a:xfrm>
+            <a:off x="566928" y="6446520"/>
+            <a:ext cx="8778240" cy="256032"/>
           </a:xfrm>
           <a:prstGeom prst="rect">
             <a:avLst/>
@@ -6814,85 +7153,7 @@
               </a:lnSpc>
             </a:pPr>
             <a:r>
-              <a:rPr sz="2800" b="0">
-                <a:solidFill>
-                  <a:srgbClr val="006BD9"/>
-                </a:solidFill>
-                <a:latin typeface="Noto Sans Black"/>
-                <a:ea typeface="Noto Sans Black"/>
-                <a:cs typeface="Noto Sans Black"/>
-              </a:rPr>
-              <a:t>03</a:t>
-            </a:r>
-          </a:p>
-        </p:txBody>
-      </p:sp>
-      <p:sp>
-        <p:nvSpPr>
-          <p:cNvPr id="19" name="TextBox 18"/>
-          <p:cNvSpPr txBox="1"/>
-          <p:nvPr/>
-        </p:nvSpPr>
-        <p:spPr>
-          <a:xfrm>
-            <a:off x="8328964" y="3383279"/>
-            <a:ext cx="3094634" cy="640080"/>
-          </a:xfrm>
-          <a:prstGeom prst="rect">
-            <a:avLst/>
-          </a:prstGeom>
-          <a:noFill/>
-        </p:spPr>
-        <p:txBody>
-          <a:bodyPr wrap="square" lIns="0" rIns="0" tIns="0" bIns="0" anchor="t"/>
-          <a:lstStyle/>
-          <a:p>
-            <a:pPr algn="l">
-              <a:lnSpc>
-                <a:spcPct val="100000"/>
-              </a:lnSpc>
-            </a:pPr>
-            <a:r>
-              <a:rPr sz="2000" b="0">
-                <a:solidFill>
-                  <a:srgbClr val="151435"/>
-                </a:solidFill>
-                <a:latin typeface="Noto Sans Black"/>
-                <a:ea typeface="Noto Sans Black"/>
-                <a:cs typeface="Noto Sans Black"/>
-              </a:rPr>
-              <a:t>build_deck</a:t>
-            </a:r>
-          </a:p>
-        </p:txBody>
-      </p:sp>
-      <p:sp>
-        <p:nvSpPr>
-          <p:cNvPr id="20" name="TextBox 19"/>
-          <p:cNvSpPr txBox="1"/>
-          <p:nvPr/>
-        </p:nvSpPr>
-        <p:spPr>
-          <a:xfrm>
-            <a:off x="8328964" y="4114800"/>
-            <a:ext cx="3039770" cy="1188720"/>
-          </a:xfrm>
-          <a:prstGeom prst="rect">
-            <a:avLst/>
-          </a:prstGeom>
-          <a:noFill/>
-        </p:spPr>
-        <p:txBody>
-          <a:bodyPr wrap="square" lIns="0" rIns="0" tIns="0" bIns="0" anchor="t"/>
-          <a:lstStyle/>
-          <a:p>
-            <a:pPr algn="l">
-              <a:lnSpc>
-                <a:spcPct val="112000"/>
-              </a:lnSpc>
-            </a:pPr>
-            <a:r>
-              <a:rPr sz="1500" b="0">
+              <a:rPr sz="1100" b="0">
                 <a:solidFill>
                   <a:srgbClr val="44435D"/>
                 </a:solidFill>
@@ -6900,45 +7161,6 @@
                 <a:ea typeface="Noto Sans"/>
                 <a:cs typeface="Noto Sans"/>
               </a:rPr>
-              <a:t>The Deck MCP composed these slides. This deck was built with an MCP too.</a:t>
-            </a:r>
-          </a:p>
-        </p:txBody>
-      </p:sp>
-      <p:sp>
-        <p:nvSpPr>
-          <p:cNvPr id="21" name="TextBox 20"/>
-          <p:cNvSpPr txBox="1"/>
-          <p:nvPr/>
-        </p:nvSpPr>
-        <p:spPr>
-          <a:xfrm>
-            <a:off x="566928" y="6446520"/>
-            <a:ext cx="8778240" cy="256032"/>
-          </a:xfrm>
-          <a:prstGeom prst="rect">
-            <a:avLst/>
-          </a:prstGeom>
-          <a:noFill/>
-        </p:spPr>
-        <p:txBody>
-          <a:bodyPr wrap="square" lIns="0" rIns="0" tIns="0" bIns="0" anchor="t"/>
-          <a:lstStyle/>
-          <a:p>
-            <a:pPr algn="l">
-              <a:lnSpc>
-                <a:spcPct val="100000"/>
-              </a:lnSpc>
-            </a:pPr>
-            <a:r>
-              <a:rPr sz="1100" b="0">
-                <a:solidFill>
-                  <a:srgbClr val="44435D"/>
-                </a:solidFill>
-                <a:latin typeface="Noto Sans"/>
-                <a:ea typeface="Noto Sans"/>
-                <a:cs typeface="Noto Sans"/>
-              </a:rPr>
               <a:t>Independent Wetland project  ·  Not official WaterAid guidance</a:t>
             </a:r>
           </a:p>
@@ -6946,7 +7168,7 @@
       </p:sp>
       <p:sp>
         <p:nvSpPr>
-          <p:cNvPr id="22" name="TextBox 21"/>
+          <p:cNvPr id="15" name="TextBox 14"/>
           <p:cNvSpPr txBox="1"/>
           <p:nvPr/>
         </p:nvSpPr>
@@ -6978,7 +7200,7 @@
                 <a:ea typeface="Noto Sans"/>
                 <a:cs typeface="Noto Sans"/>
               </a:rPr>
-              <a:t>06  /  08</a:t>
+              <a:t>06  /  10</a:t>
             </a:r>
           </a:p>
         </p:txBody>
@@ -7093,7 +7315,7 @@
                 <a:ea typeface="Noto Sans"/>
                 <a:cs typeface="Noto Sans"/>
               </a:rPr>
-              <a:t>WHAT STAYS HUMAN</a:t>
+              <a:t>THE DECK MCP</a:t>
             </a:r>
           </a:p>
         </p:txBody>
@@ -7132,25 +7354,7 @@
                 <a:ea typeface="Noto Sans Black"/>
                 <a:cs typeface="Noto Sans Black"/>
               </a:rPr>
-              <a:t>The layout can be generated.</a:t>
-            </a:r>
-          </a:p>
-          <a:p>
-            <a:pPr algn="l">
-              <a:lnSpc>
-                <a:spcPct val="98000"/>
-              </a:lnSpc>
-            </a:pPr>
-            <a:r>
-              <a:rPr sz="3400" b="0">
-                <a:solidFill>
-                  <a:srgbClr val="151435"/>
-                </a:solidFill>
-                <a:latin typeface="Noto Sans Black"/>
-                <a:ea typeface="Noto Sans Black"/>
-                <a:cs typeface="Noto Sans Black"/>
-              </a:rPr>
-              <a:t>The judgment cannot.</a:t>
+              <a:t>We built the MCP that builds the deck.</a:t>
             </a:r>
           </a:p>
         </p:txBody>
@@ -7218,7 +7422,7 @@
                 <a:ea typeface="Noto Sans"/>
                 <a:cs typeface="Noto Sans"/>
               </a:rPr>
-              <a:t>Numbers for a funder, the board, or the public still need a person.</a:t>
+              <a:t>An agent sends a brief to the locally run Deck MCP.</a:t>
             </a:r>
           </a:p>
         </p:txBody>
@@ -7286,7 +7490,7 @@
                 <a:ea typeface="Noto Sans"/>
                 <a:cs typeface="Noto Sans"/>
               </a:rPr>
-              <a:t>Material AI use is disclosed, including in funder text.</a:t>
+              <a:t>build_deck asks the Brand MCP for colour, type, and the wordmark.</a:t>
             </a:r>
           </a:p>
         </p:txBody>
@@ -7354,7 +7558,7 @@
                 <a:ea typeface="Noto Sans"/>
                 <a:cs typeface="Noto Sans"/>
               </a:rPr>
-              <a:t>A concept card is not a connection to donor or programme data.</a:t>
+              <a:t>The tool returns a 16:9 PowerPoint a person can open and edit.</a:t>
             </a:r>
           </a:p>
         </p:txBody>
@@ -7422,7 +7626,7 @@
                 <a:ea typeface="Noto Sans"/>
                 <a:cs typeface="Noto Sans"/>
               </a:rPr>
-              <a:t>A refusal is the boundary working, not a broken tool.</a:t>
+              <a:t>The person who presents it still owns every claim on the slide.</a:t>
             </a:r>
           </a:p>
         </p:txBody>
@@ -7500,7 +7704,7 @@
                 <a:ea typeface="Noto Sans"/>
                 <a:cs typeface="Noto Sans"/>
               </a:rPr>
-              <a:t>07  /  08</a:t>
+              <a:t>07  /  10</a:t>
             </a:r>
           </a:p>
         </p:txBody>
@@ -7538,7 +7742,7 @@
             <a:avLst/>
           </a:prstGeom>
           <a:solidFill>
-            <a:srgbClr val="151435"/>
+            <a:srgbClr val="FFFFFF"/>
           </a:solidFill>
           <a:ln>
             <a:noFill/>
@@ -7552,30 +7756,35 @@
           </a:p>
         </p:txBody>
       </p:sp>
-      <p:pic>
-        <p:nvPicPr>
-          <p:cNvPr id="3" name="Picture 2" descr="image.png"/>
-          <p:cNvPicPr>
-            <a:picLocks noChangeAspect="1"/>
-          </p:cNvPicPr>
-          <p:nvPr/>
-        </p:nvPicPr>
-        <p:blipFill>
-          <a:blip r:embed="rId2"/>
-          <a:stretch>
-            <a:fillRect/>
-          </a:stretch>
-        </p:blipFill>
-        <p:spPr>
-          <a:xfrm>
-            <a:off x="566928" y="384048"/>
-            <a:ext cx="1874519" cy="578465"/>
-          </a:xfrm>
-          <a:prstGeom prst="rect">
-            <a:avLst/>
-          </a:prstGeom>
-        </p:spPr>
-      </p:pic>
+      <p:sp>
+        <p:nvSpPr>
+          <p:cNvPr id="3" name="Rectangle 2"/>
+          <p:cNvSpPr/>
+          <p:nvPr/>
+        </p:nvSpPr>
+        <p:spPr>
+          <a:xfrm>
+            <a:off x="0" y="0"/>
+            <a:ext cx="12191695" cy="128016"/>
+          </a:xfrm>
+          <a:prstGeom prst="rect">
+            <a:avLst/>
+          </a:prstGeom>
+          <a:solidFill>
+            <a:srgbClr val="006BD9"/>
+          </a:solidFill>
+          <a:ln>
+            <a:noFill/>
+          </a:ln>
+        </p:spPr>
+        <p:txBody>
+          <a:bodyPr rtlCol="0" anchor="ctr"/>
+          <a:lstStyle/>
+          <a:p>
+            <a:pPr algn="ctr"/>
+          </a:p>
+        </p:txBody>
+      </p:sp>
       <p:sp>
         <p:nvSpPr>
           <p:cNvPr id="4" name="TextBox 3"/>
@@ -7584,7 +7793,7 @@
         </p:nvSpPr>
         <p:spPr>
           <a:xfrm>
-            <a:off x="566928" y="1691640"/>
+            <a:off x="566928" y="384048"/>
             <a:ext cx="9144000" cy="292608"/>
           </a:xfrm>
           <a:prstGeom prst="rect">
@@ -7604,13 +7813,13 @@
             <a:r>
               <a:rPr sz="1300" b="1">
                 <a:solidFill>
-                  <a:srgbClr val="D6FF00"/>
+                  <a:srgbClr val="006BD9"/>
                 </a:solidFill>
                 <a:latin typeface="Noto Sans"/>
                 <a:ea typeface="Noto Sans"/>
                 <a:cs typeface="Noto Sans"/>
               </a:rPr>
-              <a:t>NEXT DECK, SAME PATH</a:t>
+              <a:t>THIS FILE</a:t>
             </a:r>
           </a:p>
         </p:txBody>
@@ -7623,47 +7832,8 @@
         </p:nvSpPr>
         <p:spPr>
           <a:xfrm>
-            <a:off x="566928" y="2084831"/>
-            <a:ext cx="10972800" cy="1371600"/>
-          </a:xfrm>
-          <a:prstGeom prst="rect">
-            <a:avLst/>
-          </a:prstGeom>
-          <a:noFill/>
-        </p:spPr>
-        <p:txBody>
-          <a:bodyPr wrap="square" lIns="0" rIns="0" tIns="0" bIns="0" anchor="t"/>
-          <a:lstStyle/>
-          <a:p>
-            <a:pPr algn="l">
-              <a:lnSpc>
-                <a:spcPct val="96000"/>
-              </a:lnSpc>
-            </a:pPr>
-            <a:r>
-              <a:rPr sz="4400" b="0">
-                <a:solidFill>
-                  <a:srgbClr val="FFFFFF"/>
-                </a:solidFill>
-                <a:latin typeface="Noto Sans Black"/>
-                <a:ea typeface="Noto Sans Black"/>
-                <a:cs typeface="Noto Sans Black"/>
-              </a:rPr>
-              <a:t>Find the tool. Ask for the deck.</a:t>
-            </a:r>
-          </a:p>
-        </p:txBody>
-      </p:sp>
-      <p:sp>
-        <p:nvSpPr>
-          <p:cNvPr id="6" name="TextBox 5"/>
-          <p:cNvSpPr txBox="1"/>
-          <p:nvPr/>
-        </p:nvSpPr>
-        <p:spPr>
-          <a:xfrm>
-            <a:off x="566928" y="3611880"/>
-            <a:ext cx="10241280" cy="822960"/>
+            <a:off x="566928" y="768096"/>
+            <a:ext cx="10972800" cy="1097280"/>
           </a:xfrm>
           <a:prstGeom prst="rect">
             <a:avLst/>
@@ -7680,29 +7850,89 @@
               </a:lnSpc>
             </a:pPr>
             <a:r>
-              <a:rPr sz="2000" b="0">
-                <a:solidFill>
-                  <a:srgbClr val="F8F0E4"/>
-                </a:solidFill>
-                <a:latin typeface="Noto Sans"/>
-                <a:ea typeface="Noto Sans"/>
-                <a:cs typeface="Noto Sans"/>
-              </a:rPr>
-              <a:t>Try Growth and Brand live. Deck generation runs locally; a published Copilot agent still requires tenant setup.</a:t>
-            </a:r>
-          </a:p>
-        </p:txBody>
-      </p:sp>
-      <p:sp>
-        <p:nvSpPr>
-          <p:cNvPr id="7" name="TextBox 6"/>
+              <a:rPr sz="3600" b="0">
+                <a:solidFill>
+                  <a:srgbClr val="151435"/>
+                </a:solidFill>
+                <a:latin typeface="Noto Sans Black"/>
+                <a:ea typeface="Noto Sans Black"/>
+                <a:cs typeface="Noto Sans Black"/>
+              </a:rPr>
+              <a:t>You are looking at an MCP output.</a:t>
+            </a:r>
+          </a:p>
+        </p:txBody>
+      </p:sp>
+      <p:sp>
+        <p:nvSpPr>
+          <p:cNvPr id="6" name="Rounded Rectangle 5"/>
+          <p:cNvSpPr/>
+          <p:nvPr/>
+        </p:nvSpPr>
+        <p:spPr>
+          <a:xfrm>
+            <a:off x="566928" y="2331720"/>
+            <a:ext cx="3551834" cy="2880360"/>
+          </a:xfrm>
+          <a:prstGeom prst="roundRect">
+            <a:avLst>
+              <a:gd name="adj" fmla="val 6000"/>
+            </a:avLst>
+          </a:prstGeom>
+          <a:solidFill>
+            <a:srgbClr val="F8F0E4"/>
+          </a:solidFill>
+          <a:ln>
+            <a:noFill/>
+          </a:ln>
+        </p:spPr>
+        <p:txBody>
+          <a:bodyPr rtlCol="0" anchor="ctr"/>
+          <a:lstStyle/>
+          <a:p>
+            <a:pPr algn="ctr"/>
+          </a:p>
+        </p:txBody>
+      </p:sp>
+      <p:sp>
+        <p:nvSpPr>
+          <p:cNvPr id="7" name="Rectangle 6"/>
+          <p:cNvSpPr/>
+          <p:nvPr/>
+        </p:nvSpPr>
+        <p:spPr>
+          <a:xfrm>
+            <a:off x="731520" y="2478024"/>
+            <a:ext cx="3222650" cy="73152"/>
+          </a:xfrm>
+          <a:prstGeom prst="rect">
+            <a:avLst/>
+          </a:prstGeom>
+          <a:solidFill>
+            <a:srgbClr val="D6FF00"/>
+          </a:solidFill>
+          <a:ln>
+            <a:noFill/>
+          </a:ln>
+        </p:spPr>
+        <p:txBody>
+          <a:bodyPr rtlCol="0" anchor="ctr"/>
+          <a:lstStyle/>
+          <a:p>
+            <a:pPr algn="ctr"/>
+          </a:p>
+        </p:txBody>
+      </p:sp>
+      <p:sp>
+        <p:nvSpPr>
+          <p:cNvPr id="8" name="TextBox 7"/>
           <p:cNvSpPr txBox="1"/>
           <p:nvPr/>
         </p:nvSpPr>
         <p:spPr>
           <a:xfrm>
-            <a:off x="566928" y="4709160"/>
-            <a:ext cx="10972800" cy="411480"/>
+            <a:off x="822960" y="2624327"/>
+            <a:ext cx="3094634" cy="640080"/>
           </a:xfrm>
           <a:prstGeom prst="rect">
             <a:avLst/>
@@ -7719,29 +7949,29 @@
               </a:lnSpc>
             </a:pPr>
             <a:r>
-              <a:rPr sz="1600" b="1">
-                <a:solidFill>
-                  <a:srgbClr val="D6FF00"/>
-                </a:solidFill>
-                <a:latin typeface="Noto Sans"/>
-                <a:ea typeface="Noto Sans"/>
-                <a:cs typeface="Noto Sans"/>
-              </a:rPr>
-              <a:t>https://wetland-ai-workspace-462504004653.northamerica-northeast2.run.app</a:t>
-            </a:r>
-          </a:p>
-        </p:txBody>
-      </p:sp>
-      <p:sp>
-        <p:nvSpPr>
-          <p:cNvPr id="8" name="TextBox 7"/>
+              <a:rPr sz="2800" b="0">
+                <a:solidFill>
+                  <a:srgbClr val="006BD9"/>
+                </a:solidFill>
+                <a:latin typeface="Noto Sans Black"/>
+                <a:ea typeface="Noto Sans Black"/>
+                <a:cs typeface="Noto Sans Black"/>
+              </a:rPr>
+              <a:t>01</a:t>
+            </a:r>
+          </a:p>
+        </p:txBody>
+      </p:sp>
+      <p:sp>
+        <p:nvSpPr>
+          <p:cNvPr id="9" name="TextBox 8"/>
           <p:cNvSpPr txBox="1"/>
           <p:nvPr/>
         </p:nvSpPr>
         <p:spPr>
           <a:xfrm>
-            <a:off x="566928" y="6446520"/>
-            <a:ext cx="8778240" cy="256032"/>
+            <a:off x="822960" y="3383279"/>
+            <a:ext cx="3094634" cy="640080"/>
           </a:xfrm>
           <a:prstGeom prst="rect">
             <a:avLst/>
@@ -7758,14 +7988,446 @@
               </a:lnSpc>
             </a:pPr>
             <a:r>
-              <a:rPr sz="1100" b="0">
-                <a:solidFill>
-                  <a:srgbClr val="F8F0E4"/>
+              <a:rPr sz="2000" b="0">
+                <a:solidFill>
+                  <a:srgbClr val="151435"/>
+                </a:solidFill>
+                <a:latin typeface="Noto Sans Black"/>
+                <a:ea typeface="Noto Sans Black"/>
+                <a:cs typeface="Noto Sans Black"/>
+              </a:rPr>
+              <a:t>Read the hub</a:t>
+            </a:r>
+          </a:p>
+        </p:txBody>
+      </p:sp>
+      <p:sp>
+        <p:nvSpPr>
+          <p:cNvPr id="10" name="TextBox 9"/>
+          <p:cNvSpPr txBox="1"/>
+          <p:nvPr/>
+        </p:nvSpPr>
+        <p:spPr>
+          <a:xfrm>
+            <a:off x="822960" y="4114800"/>
+            <a:ext cx="3039770" cy="1188720"/>
+          </a:xfrm>
+          <a:prstGeom prst="rect">
+            <a:avLst/>
+          </a:prstGeom>
+          <a:noFill/>
+        </p:spPr>
+        <p:txBody>
+          <a:bodyPr wrap="square" lIns="0" rIns="0" tIns="0" bIns="0" anchor="t"/>
+          <a:lstStyle/>
+          <a:p>
+            <a:pPr algn="l">
+              <a:lnSpc>
+                <a:spcPct val="112000"/>
+              </a:lnSpc>
+            </a:pPr>
+            <a:r>
+              <a:rPr sz="1500" b="0">
+                <a:solidFill>
+                  <a:srgbClr val="44435D"/>
                 </a:solidFill>
                 <a:latin typeface="Noto Sans"/>
                 <a:ea typeface="Noto Sans"/>
                 <a:cs typeface="Noto Sans"/>
               </a:rPr>
+              <a:t>Find capabilities, demo links and connection instructions in Wetland.</a:t>
+            </a:r>
+          </a:p>
+        </p:txBody>
+      </p:sp>
+      <p:sp>
+        <p:nvSpPr>
+          <p:cNvPr id="11" name="Rounded Rectangle 10"/>
+          <p:cNvSpPr/>
+          <p:nvPr/>
+        </p:nvSpPr>
+        <p:spPr>
+          <a:xfrm>
+            <a:off x="4319930" y="2331720"/>
+            <a:ext cx="3551834" cy="2880360"/>
+          </a:xfrm>
+          <a:prstGeom prst="roundRect">
+            <a:avLst>
+              <a:gd name="adj" fmla="val 6000"/>
+            </a:avLst>
+          </a:prstGeom>
+          <a:solidFill>
+            <a:srgbClr val="F8F0E4"/>
+          </a:solidFill>
+          <a:ln>
+            <a:noFill/>
+          </a:ln>
+        </p:spPr>
+        <p:txBody>
+          <a:bodyPr rtlCol="0" anchor="ctr"/>
+          <a:lstStyle/>
+          <a:p>
+            <a:pPr algn="ctr"/>
+          </a:p>
+        </p:txBody>
+      </p:sp>
+      <p:sp>
+        <p:nvSpPr>
+          <p:cNvPr id="12" name="Rectangle 11"/>
+          <p:cNvSpPr/>
+          <p:nvPr/>
+        </p:nvSpPr>
+        <p:spPr>
+          <a:xfrm>
+            <a:off x="4484522" y="2478024"/>
+            <a:ext cx="3222650" cy="73152"/>
+          </a:xfrm>
+          <a:prstGeom prst="rect">
+            <a:avLst/>
+          </a:prstGeom>
+          <a:solidFill>
+            <a:srgbClr val="D6FF00"/>
+          </a:solidFill>
+          <a:ln>
+            <a:noFill/>
+          </a:ln>
+        </p:spPr>
+        <p:txBody>
+          <a:bodyPr rtlCol="0" anchor="ctr"/>
+          <a:lstStyle/>
+          <a:p>
+            <a:pPr algn="ctr"/>
+          </a:p>
+        </p:txBody>
+      </p:sp>
+      <p:sp>
+        <p:nvSpPr>
+          <p:cNvPr id="13" name="TextBox 12"/>
+          <p:cNvSpPr txBox="1"/>
+          <p:nvPr/>
+        </p:nvSpPr>
+        <p:spPr>
+          <a:xfrm>
+            <a:off x="4575962" y="2624327"/>
+            <a:ext cx="3094634" cy="640080"/>
+          </a:xfrm>
+          <a:prstGeom prst="rect">
+            <a:avLst/>
+          </a:prstGeom>
+          <a:noFill/>
+        </p:spPr>
+        <p:txBody>
+          <a:bodyPr wrap="square" lIns="0" rIns="0" tIns="0" bIns="0" anchor="t"/>
+          <a:lstStyle/>
+          <a:p>
+            <a:pPr algn="l">
+              <a:lnSpc>
+                <a:spcPct val="100000"/>
+              </a:lnSpc>
+            </a:pPr>
+            <a:r>
+              <a:rPr sz="2800" b="0">
+                <a:solidFill>
+                  <a:srgbClr val="006BD9"/>
+                </a:solidFill>
+                <a:latin typeface="Noto Sans Black"/>
+                <a:ea typeface="Noto Sans Black"/>
+                <a:cs typeface="Noto Sans Black"/>
+              </a:rPr>
+              <a:t>02</a:t>
+            </a:r>
+          </a:p>
+        </p:txBody>
+      </p:sp>
+      <p:sp>
+        <p:nvSpPr>
+          <p:cNvPr id="14" name="TextBox 13"/>
+          <p:cNvSpPr txBox="1"/>
+          <p:nvPr/>
+        </p:nvSpPr>
+        <p:spPr>
+          <a:xfrm>
+            <a:off x="4575962" y="3383279"/>
+            <a:ext cx="3094634" cy="640080"/>
+          </a:xfrm>
+          <a:prstGeom prst="rect">
+            <a:avLst/>
+          </a:prstGeom>
+          <a:noFill/>
+        </p:spPr>
+        <p:txBody>
+          <a:bodyPr wrap="square" lIns="0" rIns="0" tIns="0" bIns="0" anchor="t"/>
+          <a:lstStyle/>
+          <a:p>
+            <a:pPr algn="l">
+              <a:lnSpc>
+                <a:spcPct val="100000"/>
+              </a:lnSpc>
+            </a:pPr>
+            <a:r>
+              <a:rPr sz="2000" b="0">
+                <a:solidFill>
+                  <a:srgbClr val="151435"/>
+                </a:solidFill>
+                <a:latin typeface="Noto Sans Black"/>
+                <a:ea typeface="Noto Sans Black"/>
+                <a:cs typeface="Noto Sans Black"/>
+              </a:rPr>
+              <a:t>Read the brand</a:t>
+            </a:r>
+          </a:p>
+        </p:txBody>
+      </p:sp>
+      <p:sp>
+        <p:nvSpPr>
+          <p:cNvPr id="15" name="TextBox 14"/>
+          <p:cNvSpPr txBox="1"/>
+          <p:nvPr/>
+        </p:nvSpPr>
+        <p:spPr>
+          <a:xfrm>
+            <a:off x="4575962" y="4114800"/>
+            <a:ext cx="3039770" cy="1188720"/>
+          </a:xfrm>
+          <a:prstGeom prst="rect">
+            <a:avLst/>
+          </a:prstGeom>
+          <a:noFill/>
+        </p:spPr>
+        <p:txBody>
+          <a:bodyPr wrap="square" lIns="0" rIns="0" tIns="0" bIns="0" anchor="t"/>
+          <a:lstStyle/>
+          <a:p>
+            <a:pPr algn="l">
+              <a:lnSpc>
+                <a:spcPct val="112000"/>
+              </a:lnSpc>
+            </a:pPr>
+            <a:r>
+              <a:rPr sz="1500" b="0">
+                <a:solidFill>
+                  <a:srgbClr val="44435D"/>
+                </a:solidFill>
+                <a:latin typeface="Noto Sans"/>
+                <a:ea typeface="Noto Sans"/>
+                <a:cs typeface="Noto Sans"/>
+              </a:rPr>
+              <a:t>Colour, Noto Sans, and the white wordmark came from the live Brand MCP.</a:t>
+            </a:r>
+          </a:p>
+        </p:txBody>
+      </p:sp>
+      <p:sp>
+        <p:nvSpPr>
+          <p:cNvPr id="16" name="Rounded Rectangle 15"/>
+          <p:cNvSpPr/>
+          <p:nvPr/>
+        </p:nvSpPr>
+        <p:spPr>
+          <a:xfrm>
+            <a:off x="8072932" y="2331720"/>
+            <a:ext cx="3551834" cy="2880360"/>
+          </a:xfrm>
+          <a:prstGeom prst="roundRect">
+            <a:avLst>
+              <a:gd name="adj" fmla="val 6000"/>
+            </a:avLst>
+          </a:prstGeom>
+          <a:solidFill>
+            <a:srgbClr val="F8F0E4"/>
+          </a:solidFill>
+          <a:ln>
+            <a:noFill/>
+          </a:ln>
+        </p:spPr>
+        <p:txBody>
+          <a:bodyPr rtlCol="0" anchor="ctr"/>
+          <a:lstStyle/>
+          <a:p>
+            <a:pPr algn="ctr"/>
+          </a:p>
+        </p:txBody>
+      </p:sp>
+      <p:sp>
+        <p:nvSpPr>
+          <p:cNvPr id="17" name="Rectangle 16"/>
+          <p:cNvSpPr/>
+          <p:nvPr/>
+        </p:nvSpPr>
+        <p:spPr>
+          <a:xfrm>
+            <a:off x="8237524" y="2478024"/>
+            <a:ext cx="3222650" cy="73152"/>
+          </a:xfrm>
+          <a:prstGeom prst="rect">
+            <a:avLst/>
+          </a:prstGeom>
+          <a:solidFill>
+            <a:srgbClr val="D6FF00"/>
+          </a:solidFill>
+          <a:ln>
+            <a:noFill/>
+          </a:ln>
+        </p:spPr>
+        <p:txBody>
+          <a:bodyPr rtlCol="0" anchor="ctr"/>
+          <a:lstStyle/>
+          <a:p>
+            <a:pPr algn="ctr"/>
+          </a:p>
+        </p:txBody>
+      </p:sp>
+      <p:sp>
+        <p:nvSpPr>
+          <p:cNvPr id="18" name="TextBox 17"/>
+          <p:cNvSpPr txBox="1"/>
+          <p:nvPr/>
+        </p:nvSpPr>
+        <p:spPr>
+          <a:xfrm>
+            <a:off x="8328964" y="2624327"/>
+            <a:ext cx="3094634" cy="640080"/>
+          </a:xfrm>
+          <a:prstGeom prst="rect">
+            <a:avLst/>
+          </a:prstGeom>
+          <a:noFill/>
+        </p:spPr>
+        <p:txBody>
+          <a:bodyPr wrap="square" lIns="0" rIns="0" tIns="0" bIns="0" anchor="t"/>
+          <a:lstStyle/>
+          <a:p>
+            <a:pPr algn="l">
+              <a:lnSpc>
+                <a:spcPct val="100000"/>
+              </a:lnSpc>
+            </a:pPr>
+            <a:r>
+              <a:rPr sz="2800" b="0">
+                <a:solidFill>
+                  <a:srgbClr val="006BD9"/>
+                </a:solidFill>
+                <a:latin typeface="Noto Sans Black"/>
+                <a:ea typeface="Noto Sans Black"/>
+                <a:cs typeface="Noto Sans Black"/>
+              </a:rPr>
+              <a:t>03</a:t>
+            </a:r>
+          </a:p>
+        </p:txBody>
+      </p:sp>
+      <p:sp>
+        <p:nvSpPr>
+          <p:cNvPr id="19" name="TextBox 18"/>
+          <p:cNvSpPr txBox="1"/>
+          <p:nvPr/>
+        </p:nvSpPr>
+        <p:spPr>
+          <a:xfrm>
+            <a:off x="8328964" y="3383279"/>
+            <a:ext cx="3094634" cy="640080"/>
+          </a:xfrm>
+          <a:prstGeom prst="rect">
+            <a:avLst/>
+          </a:prstGeom>
+          <a:noFill/>
+        </p:spPr>
+        <p:txBody>
+          <a:bodyPr wrap="square" lIns="0" rIns="0" tIns="0" bIns="0" anchor="t"/>
+          <a:lstStyle/>
+          <a:p>
+            <a:pPr algn="l">
+              <a:lnSpc>
+                <a:spcPct val="100000"/>
+              </a:lnSpc>
+            </a:pPr>
+            <a:r>
+              <a:rPr sz="2000" b="0">
+                <a:solidFill>
+                  <a:srgbClr val="151435"/>
+                </a:solidFill>
+                <a:latin typeface="Noto Sans Black"/>
+                <a:ea typeface="Noto Sans Black"/>
+                <a:cs typeface="Noto Sans Black"/>
+              </a:rPr>
+              <a:t>build_deck</a:t>
+            </a:r>
+          </a:p>
+        </p:txBody>
+      </p:sp>
+      <p:sp>
+        <p:nvSpPr>
+          <p:cNvPr id="20" name="TextBox 19"/>
+          <p:cNvSpPr txBox="1"/>
+          <p:nvPr/>
+        </p:nvSpPr>
+        <p:spPr>
+          <a:xfrm>
+            <a:off x="8328964" y="4114800"/>
+            <a:ext cx="3039770" cy="1188720"/>
+          </a:xfrm>
+          <a:prstGeom prst="rect">
+            <a:avLst/>
+          </a:prstGeom>
+          <a:noFill/>
+        </p:spPr>
+        <p:txBody>
+          <a:bodyPr wrap="square" lIns="0" rIns="0" tIns="0" bIns="0" anchor="t"/>
+          <a:lstStyle/>
+          <a:p>
+            <a:pPr algn="l">
+              <a:lnSpc>
+                <a:spcPct val="112000"/>
+              </a:lnSpc>
+            </a:pPr>
+            <a:r>
+              <a:rPr sz="1500" b="0">
+                <a:solidFill>
+                  <a:srgbClr val="44435D"/>
+                </a:solidFill>
+                <a:latin typeface="Noto Sans"/>
+                <a:ea typeface="Noto Sans"/>
+                <a:cs typeface="Noto Sans"/>
+              </a:rPr>
+              <a:t>The Deck MCP composed these slides. This deck was built with an MCP too.</a:t>
+            </a:r>
+          </a:p>
+        </p:txBody>
+      </p:sp>
+      <p:sp>
+        <p:nvSpPr>
+          <p:cNvPr id="21" name="TextBox 20"/>
+          <p:cNvSpPr txBox="1"/>
+          <p:nvPr/>
+        </p:nvSpPr>
+        <p:spPr>
+          <a:xfrm>
+            <a:off x="566928" y="6446520"/>
+            <a:ext cx="8778240" cy="256032"/>
+          </a:xfrm>
+          <a:prstGeom prst="rect">
+            <a:avLst/>
+          </a:prstGeom>
+          <a:noFill/>
+        </p:spPr>
+        <p:txBody>
+          <a:bodyPr wrap="square" lIns="0" rIns="0" tIns="0" bIns="0" anchor="t"/>
+          <a:lstStyle/>
+          <a:p>
+            <a:pPr algn="l">
+              <a:lnSpc>
+                <a:spcPct val="100000"/>
+              </a:lnSpc>
+            </a:pPr>
+            <a:r>
+              <a:rPr sz="1100" b="0">
+                <a:solidFill>
+                  <a:srgbClr val="44435D"/>
+                </a:solidFill>
+                <a:latin typeface="Noto Sans"/>
+                <a:ea typeface="Noto Sans"/>
+                <a:cs typeface="Noto Sans"/>
+              </a:rPr>
               <a:t>Independent Wetland project  ·  Not official WaterAid guidance</a:t>
             </a:r>
           </a:p>
@@ -7773,7 +8435,7 @@
       </p:sp>
       <p:sp>
         <p:nvSpPr>
-          <p:cNvPr id="9" name="TextBox 8"/>
+          <p:cNvPr id="22" name="TextBox 21"/>
           <p:cNvSpPr txBox="1"/>
           <p:nvPr/>
         </p:nvSpPr>
@@ -7799,13 +8461,535 @@
             <a:r>
               <a:rPr sz="1100" b="0">
                 <a:solidFill>
-                  <a:srgbClr val="F8F0E4"/>
+                  <a:srgbClr val="44435D"/>
                 </a:solidFill>
                 <a:latin typeface="Noto Sans"/>
                 <a:ea typeface="Noto Sans"/>
                 <a:cs typeface="Noto Sans"/>
               </a:rPr>
-              <a:t>08  /  08</a:t>
+              <a:t>08  /  10</a:t>
+            </a:r>
+          </a:p>
+        </p:txBody>
+      </p:sp>
+    </p:spTree>
+  </p:cSld>
+  <p:clrMapOvr>
+    <a:masterClrMapping/>
+  </p:clrMapOvr>
+</p:sld>
+</file>
+
+<file path=ppt/slides/slide9.xml><?xml version="1.0" encoding="utf-8"?>
+<p:sld xmlns:a="http://schemas.openxmlformats.org/drawingml/2006/main" xmlns:p="http://schemas.openxmlformats.org/presentationml/2006/main" xmlns:r="http://schemas.openxmlformats.org/officeDocument/2006/relationships">
+  <p:cSld>
+    <p:spTree>
+      <p:nvGrpSpPr>
+        <p:cNvPr id="1" name=""/>
+        <p:cNvGrpSpPr/>
+        <p:nvPr/>
+      </p:nvGrpSpPr>
+      <p:grpSpPr/>
+      <p:sp>
+        <p:nvSpPr>
+          <p:cNvPr id="2" name="Rectangle 1"/>
+          <p:cNvSpPr/>
+          <p:nvPr/>
+        </p:nvSpPr>
+        <p:spPr>
+          <a:xfrm>
+            <a:off x="0" y="0"/>
+            <a:ext cx="12191695" cy="6858000"/>
+          </a:xfrm>
+          <a:prstGeom prst="rect">
+            <a:avLst/>
+          </a:prstGeom>
+          <a:solidFill>
+            <a:srgbClr val="FFFFFF"/>
+          </a:solidFill>
+          <a:ln>
+            <a:noFill/>
+          </a:ln>
+        </p:spPr>
+        <p:txBody>
+          <a:bodyPr rtlCol="0" anchor="ctr"/>
+          <a:lstStyle/>
+          <a:p>
+            <a:pPr algn="ctr"/>
+          </a:p>
+        </p:txBody>
+      </p:sp>
+      <p:sp>
+        <p:nvSpPr>
+          <p:cNvPr id="3" name="Rectangle 2"/>
+          <p:cNvSpPr/>
+          <p:nvPr/>
+        </p:nvSpPr>
+        <p:spPr>
+          <a:xfrm>
+            <a:off x="0" y="0"/>
+            <a:ext cx="128016" cy="6858000"/>
+          </a:xfrm>
+          <a:prstGeom prst="rect">
+            <a:avLst/>
+          </a:prstGeom>
+          <a:solidFill>
+            <a:srgbClr val="006BD9"/>
+          </a:solidFill>
+          <a:ln>
+            <a:noFill/>
+          </a:ln>
+        </p:spPr>
+        <p:txBody>
+          <a:bodyPr rtlCol="0" anchor="ctr"/>
+          <a:lstStyle/>
+          <a:p>
+            <a:pPr algn="ctr"/>
+          </a:p>
+        </p:txBody>
+      </p:sp>
+      <p:sp>
+        <p:nvSpPr>
+          <p:cNvPr id="4" name="TextBox 3"/>
+          <p:cNvSpPr txBox="1"/>
+          <p:nvPr/>
+        </p:nvSpPr>
+        <p:spPr>
+          <a:xfrm>
+            <a:off x="566928" y="384048"/>
+            <a:ext cx="9144000" cy="292608"/>
+          </a:xfrm>
+          <a:prstGeom prst="rect">
+            <a:avLst/>
+          </a:prstGeom>
+          <a:noFill/>
+        </p:spPr>
+        <p:txBody>
+          <a:bodyPr wrap="square" lIns="0" rIns="0" tIns="0" bIns="0" anchor="t"/>
+          <a:lstStyle/>
+          <a:p>
+            <a:pPr algn="l">
+              <a:lnSpc>
+                <a:spcPct val="100000"/>
+              </a:lnSpc>
+            </a:pPr>
+            <a:r>
+              <a:rPr sz="1300" b="1">
+                <a:solidFill>
+                  <a:srgbClr val="006BD9"/>
+                </a:solidFill>
+                <a:latin typeface="Noto Sans"/>
+                <a:ea typeface="Noto Sans"/>
+                <a:cs typeface="Noto Sans"/>
+              </a:rPr>
+              <a:t>WHAT STAYS HUMAN</a:t>
+            </a:r>
+          </a:p>
+        </p:txBody>
+      </p:sp>
+      <p:sp>
+        <p:nvSpPr>
+          <p:cNvPr id="5" name="TextBox 4"/>
+          <p:cNvSpPr txBox="1"/>
+          <p:nvPr/>
+        </p:nvSpPr>
+        <p:spPr>
+          <a:xfrm>
+            <a:off x="566928" y="749808"/>
+            <a:ext cx="10972800" cy="1234440"/>
+          </a:xfrm>
+          <a:prstGeom prst="rect">
+            <a:avLst/>
+          </a:prstGeom>
+          <a:noFill/>
+        </p:spPr>
+        <p:txBody>
+          <a:bodyPr wrap="square" lIns="0" rIns="0" tIns="0" bIns="0" anchor="t"/>
+          <a:lstStyle/>
+          <a:p>
+            <a:pPr algn="l">
+              <a:lnSpc>
+                <a:spcPct val="98000"/>
+              </a:lnSpc>
+            </a:pPr>
+            <a:r>
+              <a:rPr sz="3400" b="0">
+                <a:solidFill>
+                  <a:srgbClr val="151435"/>
+                </a:solidFill>
+                <a:latin typeface="Noto Sans Black"/>
+                <a:ea typeface="Noto Sans Black"/>
+                <a:cs typeface="Noto Sans Black"/>
+              </a:rPr>
+              <a:t>The layout can be generated.</a:t>
+            </a:r>
+          </a:p>
+          <a:p>
+            <a:pPr algn="l">
+              <a:lnSpc>
+                <a:spcPct val="98000"/>
+              </a:lnSpc>
+            </a:pPr>
+            <a:r>
+              <a:rPr sz="3400" b="0">
+                <a:solidFill>
+                  <a:srgbClr val="151435"/>
+                </a:solidFill>
+                <a:latin typeface="Noto Sans Black"/>
+                <a:ea typeface="Noto Sans Black"/>
+                <a:cs typeface="Noto Sans Black"/>
+              </a:rPr>
+              <a:t>The judgment cannot.</a:t>
+            </a:r>
+          </a:p>
+        </p:txBody>
+      </p:sp>
+      <p:sp>
+        <p:nvSpPr>
+          <p:cNvPr id="6" name="Rectangle 5"/>
+          <p:cNvSpPr/>
+          <p:nvPr/>
+        </p:nvSpPr>
+        <p:spPr>
+          <a:xfrm>
+            <a:off x="603504" y="2267712"/>
+            <a:ext cx="146304" cy="146304"/>
+          </a:xfrm>
+          <a:prstGeom prst="rect">
+            <a:avLst/>
+          </a:prstGeom>
+          <a:solidFill>
+            <a:srgbClr val="D6FF00"/>
+          </a:solidFill>
+          <a:ln>
+            <a:noFill/>
+          </a:ln>
+        </p:spPr>
+        <p:txBody>
+          <a:bodyPr rtlCol="0" anchor="ctr"/>
+          <a:lstStyle/>
+          <a:p>
+            <a:pPr algn="ctr"/>
+          </a:p>
+        </p:txBody>
+      </p:sp>
+      <p:sp>
+        <p:nvSpPr>
+          <p:cNvPr id="7" name="TextBox 6"/>
+          <p:cNvSpPr txBox="1"/>
+          <p:nvPr/>
+        </p:nvSpPr>
+        <p:spPr>
+          <a:xfrm>
+            <a:off x="960120" y="2139696"/>
+            <a:ext cx="10424160" cy="658368"/>
+          </a:xfrm>
+          <a:prstGeom prst="rect">
+            <a:avLst/>
+          </a:prstGeom>
+          <a:noFill/>
+        </p:spPr>
+        <p:txBody>
+          <a:bodyPr wrap="square" lIns="0" rIns="0" tIns="0" bIns="0" anchor="t"/>
+          <a:lstStyle/>
+          <a:p>
+            <a:pPr algn="l">
+              <a:lnSpc>
+                <a:spcPct val="105000"/>
+              </a:lnSpc>
+            </a:pPr>
+            <a:r>
+              <a:rPr sz="2000" b="0">
+                <a:solidFill>
+                  <a:srgbClr val="44435D"/>
+                </a:solidFill>
+                <a:latin typeface="Noto Sans"/>
+                <a:ea typeface="Noto Sans"/>
+                <a:cs typeface="Noto Sans"/>
+              </a:rPr>
+              <a:t>Numbers for a funder, the board, or the public still need a person.</a:t>
+            </a:r>
+          </a:p>
+        </p:txBody>
+      </p:sp>
+      <p:sp>
+        <p:nvSpPr>
+          <p:cNvPr id="8" name="Rectangle 7"/>
+          <p:cNvSpPr/>
+          <p:nvPr/>
+        </p:nvSpPr>
+        <p:spPr>
+          <a:xfrm>
+            <a:off x="603504" y="3108960"/>
+            <a:ext cx="146304" cy="146304"/>
+          </a:xfrm>
+          <a:prstGeom prst="rect">
+            <a:avLst/>
+          </a:prstGeom>
+          <a:solidFill>
+            <a:srgbClr val="D6FF00"/>
+          </a:solidFill>
+          <a:ln>
+            <a:noFill/>
+          </a:ln>
+        </p:spPr>
+        <p:txBody>
+          <a:bodyPr rtlCol="0" anchor="ctr"/>
+          <a:lstStyle/>
+          <a:p>
+            <a:pPr algn="ctr"/>
+          </a:p>
+        </p:txBody>
+      </p:sp>
+      <p:sp>
+        <p:nvSpPr>
+          <p:cNvPr id="9" name="TextBox 8"/>
+          <p:cNvSpPr txBox="1"/>
+          <p:nvPr/>
+        </p:nvSpPr>
+        <p:spPr>
+          <a:xfrm>
+            <a:off x="960120" y="2980944"/>
+            <a:ext cx="10424160" cy="658368"/>
+          </a:xfrm>
+          <a:prstGeom prst="rect">
+            <a:avLst/>
+          </a:prstGeom>
+          <a:noFill/>
+        </p:spPr>
+        <p:txBody>
+          <a:bodyPr wrap="square" lIns="0" rIns="0" tIns="0" bIns="0" anchor="t"/>
+          <a:lstStyle/>
+          <a:p>
+            <a:pPr algn="l">
+              <a:lnSpc>
+                <a:spcPct val="105000"/>
+              </a:lnSpc>
+            </a:pPr>
+            <a:r>
+              <a:rPr sz="2000" b="0">
+                <a:solidFill>
+                  <a:srgbClr val="44435D"/>
+                </a:solidFill>
+                <a:latin typeface="Noto Sans"/>
+                <a:ea typeface="Noto Sans"/>
+                <a:cs typeface="Noto Sans"/>
+              </a:rPr>
+              <a:t>Material AI use is disclosed, including in funder text.</a:t>
+            </a:r>
+          </a:p>
+        </p:txBody>
+      </p:sp>
+      <p:sp>
+        <p:nvSpPr>
+          <p:cNvPr id="10" name="Rectangle 9"/>
+          <p:cNvSpPr/>
+          <p:nvPr/>
+        </p:nvSpPr>
+        <p:spPr>
+          <a:xfrm>
+            <a:off x="603504" y="3950208"/>
+            <a:ext cx="146304" cy="146304"/>
+          </a:xfrm>
+          <a:prstGeom prst="rect">
+            <a:avLst/>
+          </a:prstGeom>
+          <a:solidFill>
+            <a:srgbClr val="D6FF00"/>
+          </a:solidFill>
+          <a:ln>
+            <a:noFill/>
+          </a:ln>
+        </p:spPr>
+        <p:txBody>
+          <a:bodyPr rtlCol="0" anchor="ctr"/>
+          <a:lstStyle/>
+          <a:p>
+            <a:pPr algn="ctr"/>
+          </a:p>
+        </p:txBody>
+      </p:sp>
+      <p:sp>
+        <p:nvSpPr>
+          <p:cNvPr id="11" name="TextBox 10"/>
+          <p:cNvSpPr txBox="1"/>
+          <p:nvPr/>
+        </p:nvSpPr>
+        <p:spPr>
+          <a:xfrm>
+            <a:off x="960120" y="3822192"/>
+            <a:ext cx="10424160" cy="658368"/>
+          </a:xfrm>
+          <a:prstGeom prst="rect">
+            <a:avLst/>
+          </a:prstGeom>
+          <a:noFill/>
+        </p:spPr>
+        <p:txBody>
+          <a:bodyPr wrap="square" lIns="0" rIns="0" tIns="0" bIns="0" anchor="t"/>
+          <a:lstStyle/>
+          <a:p>
+            <a:pPr algn="l">
+              <a:lnSpc>
+                <a:spcPct val="105000"/>
+              </a:lnSpc>
+            </a:pPr>
+            <a:r>
+              <a:rPr sz="2000" b="0">
+                <a:solidFill>
+                  <a:srgbClr val="44435D"/>
+                </a:solidFill>
+                <a:latin typeface="Noto Sans"/>
+                <a:ea typeface="Noto Sans"/>
+                <a:cs typeface="Noto Sans"/>
+              </a:rPr>
+              <a:t>Synthetic examples are not connections to donor or programme systems.</a:t>
+            </a:r>
+          </a:p>
+        </p:txBody>
+      </p:sp>
+      <p:sp>
+        <p:nvSpPr>
+          <p:cNvPr id="12" name="Rectangle 11"/>
+          <p:cNvSpPr/>
+          <p:nvPr/>
+        </p:nvSpPr>
+        <p:spPr>
+          <a:xfrm>
+            <a:off x="603504" y="4791456"/>
+            <a:ext cx="146304" cy="146304"/>
+          </a:xfrm>
+          <a:prstGeom prst="rect">
+            <a:avLst/>
+          </a:prstGeom>
+          <a:solidFill>
+            <a:srgbClr val="D6FF00"/>
+          </a:solidFill>
+          <a:ln>
+            <a:noFill/>
+          </a:ln>
+        </p:spPr>
+        <p:txBody>
+          <a:bodyPr rtlCol="0" anchor="ctr"/>
+          <a:lstStyle/>
+          <a:p>
+            <a:pPr algn="ctr"/>
+          </a:p>
+        </p:txBody>
+      </p:sp>
+      <p:sp>
+        <p:nvSpPr>
+          <p:cNvPr id="13" name="TextBox 12"/>
+          <p:cNvSpPr txBox="1"/>
+          <p:nvPr/>
+        </p:nvSpPr>
+        <p:spPr>
+          <a:xfrm>
+            <a:off x="960120" y="4663440"/>
+            <a:ext cx="10424160" cy="658368"/>
+          </a:xfrm>
+          <a:prstGeom prst="rect">
+            <a:avLst/>
+          </a:prstGeom>
+          <a:noFill/>
+        </p:spPr>
+        <p:txBody>
+          <a:bodyPr wrap="square" lIns="0" rIns="0" tIns="0" bIns="0" anchor="t"/>
+          <a:lstStyle/>
+          <a:p>
+            <a:pPr algn="l">
+              <a:lnSpc>
+                <a:spcPct val="105000"/>
+              </a:lnSpc>
+            </a:pPr>
+            <a:r>
+              <a:rPr sz="2000" b="0">
+                <a:solidFill>
+                  <a:srgbClr val="44435D"/>
+                </a:solidFill>
+                <a:latin typeface="Noto Sans"/>
+                <a:ea typeface="Noto Sans"/>
+                <a:cs typeface="Noto Sans"/>
+              </a:rPr>
+              <a:t>A refusal is the boundary working, not a broken tool.</a:t>
+            </a:r>
+          </a:p>
+        </p:txBody>
+      </p:sp>
+      <p:sp>
+        <p:nvSpPr>
+          <p:cNvPr id="14" name="TextBox 13"/>
+          <p:cNvSpPr txBox="1"/>
+          <p:nvPr/>
+        </p:nvSpPr>
+        <p:spPr>
+          <a:xfrm>
+            <a:off x="566928" y="6446520"/>
+            <a:ext cx="8778240" cy="256032"/>
+          </a:xfrm>
+          <a:prstGeom prst="rect">
+            <a:avLst/>
+          </a:prstGeom>
+          <a:noFill/>
+        </p:spPr>
+        <p:txBody>
+          <a:bodyPr wrap="square" lIns="0" rIns="0" tIns="0" bIns="0" anchor="t"/>
+          <a:lstStyle/>
+          <a:p>
+            <a:pPr algn="l">
+              <a:lnSpc>
+                <a:spcPct val="100000"/>
+              </a:lnSpc>
+            </a:pPr>
+            <a:r>
+              <a:rPr sz="1100" b="0">
+                <a:solidFill>
+                  <a:srgbClr val="44435D"/>
+                </a:solidFill>
+                <a:latin typeface="Noto Sans"/>
+                <a:ea typeface="Noto Sans"/>
+                <a:cs typeface="Noto Sans"/>
+              </a:rPr>
+              <a:t>Independent Wetland project  ·  Not official WaterAid guidance</a:t>
+            </a:r>
+          </a:p>
+        </p:txBody>
+      </p:sp>
+      <p:sp>
+        <p:nvSpPr>
+          <p:cNvPr id="15" name="TextBox 14"/>
+          <p:cNvSpPr txBox="1"/>
+          <p:nvPr/>
+        </p:nvSpPr>
+        <p:spPr>
+          <a:xfrm>
+            <a:off x="9509760" y="6446520"/>
+            <a:ext cx="2103120" cy="256032"/>
+          </a:xfrm>
+          <a:prstGeom prst="rect">
+            <a:avLst/>
+          </a:prstGeom>
+          <a:noFill/>
+        </p:spPr>
+        <p:txBody>
+          <a:bodyPr wrap="square" lIns="0" rIns="0" tIns="0" bIns="0" anchor="t"/>
+          <a:lstStyle/>
+          <a:p>
+            <a:pPr algn="ctr">
+              <a:lnSpc>
+                <a:spcPct val="100000"/>
+              </a:lnSpc>
+            </a:pPr>
+            <a:r>
+              <a:rPr sz="1100" b="0">
+                <a:solidFill>
+                  <a:srgbClr val="44435D"/>
+                </a:solidFill>
+                <a:latin typeface="Noto Sans"/>
+                <a:ea typeface="Noto Sans"/>
+                <a:cs typeface="Noto Sans"/>
+              </a:rPr>
+              <a:t>09  /  10</a:t>
             </a:r>
           </a:p>
         </p:txBody>
